--- a/Pictures/Bemutató1.pptx
+++ b/Pictures/Bemutató1.pptx
@@ -8,6 +8,7 @@
     <p:sldId id="256" r:id="rId2"/>
     <p:sldId id="257" r:id="rId3"/>
     <p:sldId id="258" r:id="rId4"/>
+    <p:sldId id="259" r:id="rId5"/>
   </p:sldIdLst>
   <p:sldSz cx="12192000" cy="6858000"/>
   <p:notesSz cx="6858000" cy="9144000"/>
@@ -3343,7 +3344,7 @@
           <p:nvPr>
             <p:extLst>
               <p:ext uri="{D42A27DB-BD31-4B8C-83A1-F6EECF244321}">
-                <p14:modId xmlns:p14="http://schemas.microsoft.com/office/powerpoint/2010/main" val="2322755869"/>
+                <p14:modId xmlns:p14="http://schemas.microsoft.com/office/powerpoint/2010/main" val="2418952363"/>
               </p:ext>
             </p:extLst>
           </p:nvPr>
@@ -3590,7 +3591,7 @@
                     <a:bodyPr/>
                     <a:lstStyle/>
                     <a:p>
-                      <a:endParaRPr lang="hu-HU" dirty="0"/>
+                      <a:endParaRPr lang="hu-HU" noProof="1"/>
                     </a:p>
                   </a:txBody>
                   <a:tcPr>
@@ -3643,7 +3644,7 @@
                     <a:bodyPr/>
                     <a:lstStyle/>
                     <a:p>
-                      <a:endParaRPr lang="hu-HU" dirty="0"/>
+                      <a:endParaRPr lang="hu-HU" noProof="1"/>
                     </a:p>
                   </a:txBody>
                   <a:tcPr>
@@ -3693,7 +3694,7 @@
                     <a:bodyPr/>
                     <a:lstStyle/>
                     <a:p>
-                      <a:endParaRPr lang="hu-HU" dirty="0"/>
+                      <a:endParaRPr lang="hu-HU" noProof="1"/>
                     </a:p>
                   </a:txBody>
                   <a:tcPr>
@@ -3743,7 +3744,7 @@
                     <a:bodyPr/>
                     <a:lstStyle/>
                     <a:p>
-                      <a:endParaRPr lang="hu-HU" dirty="0"/>
+                      <a:endParaRPr lang="hu-HU" noProof="1"/>
                     </a:p>
                   </a:txBody>
                   <a:tcPr>
@@ -3793,7 +3794,7 @@
                     <a:bodyPr/>
                     <a:lstStyle/>
                     <a:p>
-                      <a:endParaRPr lang="hu-HU" dirty="0"/>
+                      <a:endParaRPr lang="hu-HU" noProof="1"/>
                     </a:p>
                   </a:txBody>
                   <a:tcPr>
@@ -3843,7 +3844,7 @@
                     <a:bodyPr/>
                     <a:lstStyle/>
                     <a:p>
-                      <a:endParaRPr lang="hu-HU" dirty="0"/>
+                      <a:endParaRPr lang="hu-HU" noProof="1"/>
                     </a:p>
                   </a:txBody>
                   <a:tcPr>
@@ -3893,7 +3894,7 @@
                     <a:bodyPr/>
                     <a:lstStyle/>
                     <a:p>
-                      <a:endParaRPr lang="hu-HU" dirty="0"/>
+                      <a:endParaRPr lang="hu-HU" noProof="1"/>
                     </a:p>
                   </a:txBody>
                   <a:tcPr>
@@ -3943,7 +3944,7 @@
                     <a:bodyPr/>
                     <a:lstStyle/>
                     <a:p>
-                      <a:endParaRPr lang="hu-HU" dirty="0"/>
+                      <a:endParaRPr lang="hu-HU" noProof="1"/>
                     </a:p>
                   </a:txBody>
                   <a:tcPr>
@@ -3993,7 +3994,7 @@
                     <a:bodyPr/>
                     <a:lstStyle/>
                     <a:p>
-                      <a:endParaRPr lang="hu-HU" dirty="0"/>
+                      <a:endParaRPr lang="hu-HU" noProof="1"/>
                     </a:p>
                   </a:txBody>
                   <a:tcPr>
@@ -4043,7 +4044,7 @@
                     <a:bodyPr/>
                     <a:lstStyle/>
                     <a:p>
-                      <a:endParaRPr lang="hu-HU" dirty="0"/>
+                      <a:endParaRPr lang="hu-HU" noProof="1"/>
                     </a:p>
                   </a:txBody>
                   <a:tcPr>
@@ -4093,7 +4094,7 @@
                     <a:bodyPr/>
                     <a:lstStyle/>
                     <a:p>
-                      <a:endParaRPr lang="hu-HU" dirty="0"/>
+                      <a:endParaRPr lang="hu-HU" noProof="1"/>
                     </a:p>
                   </a:txBody>
                   <a:tcPr>
@@ -4143,7 +4144,7 @@
                     <a:bodyPr/>
                     <a:lstStyle/>
                     <a:p>
-                      <a:endParaRPr lang="hu-HU" dirty="0"/>
+                      <a:endParaRPr lang="hu-HU" noProof="1"/>
                     </a:p>
                   </a:txBody>
                   <a:tcPr>
@@ -4193,7 +4194,7 @@
                     <a:bodyPr/>
                     <a:lstStyle/>
                     <a:p>
-                      <a:endParaRPr lang="hu-HU" dirty="0"/>
+                      <a:endParaRPr lang="hu-HU" noProof="1"/>
                     </a:p>
                   </a:txBody>
                   <a:tcPr>
@@ -4243,7 +4244,7 @@
                     <a:bodyPr/>
                     <a:lstStyle/>
                     <a:p>
-                      <a:endParaRPr lang="hu-HU" dirty="0"/>
+                      <a:endParaRPr lang="hu-HU" noProof="1"/>
                     </a:p>
                   </a:txBody>
                   <a:tcPr>
@@ -4293,7 +4294,7 @@
                     <a:bodyPr/>
                     <a:lstStyle/>
                     <a:p>
-                      <a:endParaRPr lang="hu-HU" dirty="0"/>
+                      <a:endParaRPr lang="hu-HU" noProof="1"/>
                     </a:p>
                   </a:txBody>
                   <a:tcPr>
@@ -4343,7 +4344,7 @@
                     <a:bodyPr/>
                     <a:lstStyle/>
                     <a:p>
-                      <a:endParaRPr lang="hu-HU" dirty="0"/>
+                      <a:endParaRPr lang="hu-HU" noProof="1"/>
                     </a:p>
                   </a:txBody>
                   <a:tcPr>
@@ -4393,7 +4394,7 @@
                     <a:bodyPr/>
                     <a:lstStyle/>
                     <a:p>
-                      <a:endParaRPr lang="hu-HU" dirty="0"/>
+                      <a:endParaRPr lang="hu-HU" noProof="1"/>
                     </a:p>
                   </a:txBody>
                   <a:tcPr>
@@ -4443,7 +4444,7 @@
                     <a:bodyPr/>
                     <a:lstStyle/>
                     <a:p>
-                      <a:endParaRPr lang="hu-HU" dirty="0"/>
+                      <a:endParaRPr lang="hu-HU" noProof="1"/>
                     </a:p>
                   </a:txBody>
                   <a:tcPr>
@@ -4493,7 +4494,7 @@
                     <a:bodyPr/>
                     <a:lstStyle/>
                     <a:p>
-                      <a:endParaRPr lang="hu-HU" dirty="0"/>
+                      <a:endParaRPr lang="hu-HU" noProof="1"/>
                     </a:p>
                   </a:txBody>
                   <a:tcPr>
@@ -4543,7 +4544,7 @@
                     <a:bodyPr/>
                     <a:lstStyle/>
                     <a:p>
-                      <a:endParaRPr lang="hu-HU" dirty="0"/>
+                      <a:endParaRPr lang="hu-HU" noProof="1"/>
                     </a:p>
                   </a:txBody>
                   <a:tcPr>
@@ -4593,7 +4594,7 @@
                     <a:bodyPr/>
                     <a:lstStyle/>
                     <a:p>
-                      <a:endParaRPr lang="hu-HU" dirty="0"/>
+                      <a:endParaRPr lang="hu-HU" noProof="1"/>
                     </a:p>
                   </a:txBody>
                   <a:tcPr>
@@ -4643,7 +4644,7 @@
                     <a:bodyPr/>
                     <a:lstStyle/>
                     <a:p>
-                      <a:endParaRPr lang="hu-HU" dirty="0"/>
+                      <a:endParaRPr lang="hu-HU" noProof="1"/>
                     </a:p>
                   </a:txBody>
                   <a:tcPr>
@@ -4693,7 +4694,7 @@
                     <a:bodyPr/>
                     <a:lstStyle/>
                     <a:p>
-                      <a:endParaRPr lang="hu-HU" dirty="0"/>
+                      <a:endParaRPr lang="hu-HU" noProof="1"/>
                     </a:p>
                   </a:txBody>
                   <a:tcPr>
@@ -4743,7 +4744,7 @@
                     <a:bodyPr/>
                     <a:lstStyle/>
                     <a:p>
-                      <a:endParaRPr lang="hu-HU" dirty="0"/>
+                      <a:endParaRPr lang="hu-HU" noProof="1"/>
                     </a:p>
                   </a:txBody>
                   <a:tcPr>
@@ -4793,7 +4794,7 @@
                     <a:bodyPr/>
                     <a:lstStyle/>
                     <a:p>
-                      <a:endParaRPr lang="hu-HU" dirty="0"/>
+                      <a:endParaRPr lang="hu-HU" noProof="1"/>
                     </a:p>
                   </a:txBody>
                   <a:tcPr>
@@ -4843,7 +4844,7 @@
                     <a:bodyPr/>
                     <a:lstStyle/>
                     <a:p>
-                      <a:endParaRPr lang="hu-HU" dirty="0"/>
+                      <a:endParaRPr lang="hu-HU" noProof="1"/>
                     </a:p>
                   </a:txBody>
                   <a:tcPr>
@@ -4893,7 +4894,7 @@
                     <a:bodyPr/>
                     <a:lstStyle/>
                     <a:p>
-                      <a:endParaRPr lang="hu-HU" dirty="0"/>
+                      <a:endParaRPr lang="hu-HU" noProof="1"/>
                     </a:p>
                   </a:txBody>
                   <a:tcPr>
@@ -4943,7 +4944,7 @@
                     <a:bodyPr/>
                     <a:lstStyle/>
                     <a:p>
-                      <a:endParaRPr lang="hu-HU" dirty="0"/>
+                      <a:endParaRPr lang="hu-HU" noProof="1"/>
                     </a:p>
                   </a:txBody>
                   <a:tcPr>
@@ -4993,7 +4994,7 @@
                     <a:bodyPr/>
                     <a:lstStyle/>
                     <a:p>
-                      <a:endParaRPr lang="hu-HU" dirty="0"/>
+                      <a:endParaRPr lang="hu-HU" noProof="1"/>
                     </a:p>
                   </a:txBody>
                   <a:tcPr>
@@ -5043,7 +5044,7 @@
                     <a:bodyPr/>
                     <a:lstStyle/>
                     <a:p>
-                      <a:endParaRPr lang="hu-HU" dirty="0"/>
+                      <a:endParaRPr lang="hu-HU" noProof="1"/>
                     </a:p>
                   </a:txBody>
                   <a:tcPr>
@@ -5093,7 +5094,7 @@
                     <a:bodyPr/>
                     <a:lstStyle/>
                     <a:p>
-                      <a:endParaRPr lang="hu-HU" dirty="0"/>
+                      <a:endParaRPr lang="hu-HU" noProof="1"/>
                     </a:p>
                   </a:txBody>
                   <a:tcPr>
@@ -5143,7 +5144,7 @@
                     <a:bodyPr/>
                     <a:lstStyle/>
                     <a:p>
-                      <a:endParaRPr lang="hu-HU" dirty="0"/>
+                      <a:endParaRPr lang="hu-HU" noProof="1"/>
                     </a:p>
                   </a:txBody>
                   <a:tcPr>
@@ -5275,7 +5276,7 @@
           <a:p>
             <a:pPr algn="ctr"/>
             <a:r>
-              <a:rPr lang="hu-HU" dirty="0">
+              <a:rPr lang="hu-HU" noProof="1">
                 <a:solidFill>
                   <a:schemeClr val="tx1"/>
                 </a:solidFill>
@@ -5285,23 +5286,23 @@
           </a:p>
           <a:p>
             <a:pPr algn="ctr"/>
-            <a:endParaRPr lang="hu-HU" dirty="0"/>
+            <a:endParaRPr lang="hu-HU" noProof="1"/>
           </a:p>
           <a:p>
             <a:pPr algn="ctr"/>
-            <a:endParaRPr lang="hu-HU" dirty="0"/>
+            <a:endParaRPr lang="hu-HU" noProof="1"/>
           </a:p>
           <a:p>
             <a:pPr algn="ctr"/>
-            <a:endParaRPr lang="hu-HU" dirty="0"/>
+            <a:endParaRPr lang="hu-HU" noProof="1"/>
           </a:p>
           <a:p>
             <a:pPr algn="ctr"/>
-            <a:endParaRPr lang="hu-HU" dirty="0"/>
+            <a:endParaRPr lang="hu-HU" noProof="1"/>
           </a:p>
           <a:p>
             <a:pPr algn="ctr"/>
-            <a:endParaRPr lang="hu-HU" dirty="0"/>
+            <a:endParaRPr lang="hu-HU" noProof="1"/>
           </a:p>
         </p:txBody>
       </p:sp>
@@ -5352,7 +5353,7 @@
           <a:p>
             <a:pPr algn="ctr"/>
             <a:r>
-              <a:rPr lang="hu-HU" dirty="0">
+              <a:rPr lang="hu-HU" noProof="1">
                 <a:solidFill>
                   <a:schemeClr val="tx1"/>
                 </a:solidFill>
@@ -5362,23 +5363,23 @@
           </a:p>
           <a:p>
             <a:pPr algn="ctr"/>
-            <a:endParaRPr lang="hu-HU" dirty="0"/>
+            <a:endParaRPr lang="hu-HU" noProof="1"/>
           </a:p>
           <a:p>
             <a:pPr algn="ctr"/>
-            <a:endParaRPr lang="hu-HU" dirty="0"/>
+            <a:endParaRPr lang="hu-HU" noProof="1"/>
           </a:p>
           <a:p>
             <a:pPr algn="ctr"/>
-            <a:endParaRPr lang="hu-HU" dirty="0"/>
+            <a:endParaRPr lang="hu-HU" noProof="1"/>
           </a:p>
           <a:p>
             <a:pPr algn="ctr"/>
-            <a:endParaRPr lang="hu-HU" dirty="0"/>
+            <a:endParaRPr lang="hu-HU" noProof="1"/>
           </a:p>
           <a:p>
             <a:pPr algn="ctr"/>
-            <a:endParaRPr lang="hu-HU" dirty="0"/>
+            <a:endParaRPr lang="hu-HU" noProof="1"/>
           </a:p>
         </p:txBody>
       </p:sp>
@@ -5425,7 +5426,7 @@
           <a:p>
             <a:pPr algn="ctr"/>
             <a:r>
-              <a:rPr lang="hu-HU" sz="1600" dirty="0"/>
+              <a:rPr lang="hu-HU" sz="1600" noProof="1"/>
               <a:t>Beérkezik a kiszámolandó egyenlet</a:t>
             </a:r>
           </a:p>
@@ -5474,7 +5475,7 @@
           <a:p>
             <a:pPr algn="ctr"/>
             <a:r>
-              <a:rPr lang="hu-HU" sz="1600" dirty="0"/>
+              <a:rPr lang="hu-HU" sz="1600" noProof="1"/>
               <a:t>Tokenizálás</a:t>
             </a:r>
           </a:p>
@@ -5523,7 +5524,7 @@
           <a:p>
             <a:pPr algn="ctr"/>
             <a:r>
-              <a:rPr lang="hu-HU" sz="1600" dirty="0"/>
+              <a:rPr lang="hu-HU" sz="1600" noProof="1"/>
               <a:t>Lengyel formára hozás</a:t>
             </a:r>
           </a:p>
@@ -5572,7 +5573,7 @@
           <a:p>
             <a:pPr algn="ctr"/>
             <a:r>
-              <a:rPr lang="hu-HU" sz="1600" dirty="0"/>
+              <a:rPr lang="hu-HU" sz="1600" noProof="1"/>
               <a:t>Kifejezésfa elkészítése</a:t>
             </a:r>
           </a:p>
@@ -5621,7 +5622,7 @@
           <a:p>
             <a:pPr algn="ctr"/>
             <a:r>
-              <a:rPr lang="hu-HU" sz="1600" dirty="0"/>
+              <a:rPr lang="hu-HU" sz="1600" noProof="1"/>
               <a:t>Kiértékelés mélységi bejárással</a:t>
             </a:r>
           </a:p>
@@ -5845,7 +5846,7 @@
           <a:p>
             <a:pPr algn="ctr"/>
             <a:r>
-              <a:rPr lang="hu-HU" sz="1600" dirty="0"/>
+              <a:rPr lang="hu-HU" sz="1600" noProof="1"/>
               <a:t>Eredmény</a:t>
             </a:r>
           </a:p>
@@ -5939,7 +5940,7 @@
           <p:nvPr>
             <p:extLst>
               <p:ext uri="{D42A27DB-BD31-4B8C-83A1-F6EECF244321}">
-                <p14:modId xmlns:p14="http://schemas.microsoft.com/office/powerpoint/2010/main" val="2507566737"/>
+                <p14:modId xmlns:p14="http://schemas.microsoft.com/office/powerpoint/2010/main" val="2366609622"/>
               </p:ext>
             </p:extLst>
           </p:nvPr>
@@ -6042,14 +6043,6 @@
                         </a:rPr>
                         <a:t>[1-9][0-9]*\.[0-9]+</a:t>
                       </a:r>
-                      <a:endParaRPr lang="hu-HU" sz="4800" b="0" dirty="0">
-                        <a:solidFill>
-                          <a:schemeClr val="tx1"/>
-                        </a:solidFill>
-                        <a:highlight>
-                          <a:srgbClr val="FF0000"/>
-                        </a:highlight>
-                      </a:endParaRPr>
                     </a:p>
                   </a:txBody>
                   <a:tcPr>
@@ -6099,7 +6092,7 @@
                         <a:defRPr/>
                       </a:pPr>
                       <a:r>
-                        <a:rPr lang="hu-HU" sz="4800" b="0" dirty="0">
+                        <a:rPr lang="hu-HU" sz="4800" b="0" noProof="1">
                           <a:solidFill>
                             <a:schemeClr val="tx1"/>
                           </a:solidFill>
@@ -6126,7 +6119,7 @@
                         <a:defRPr/>
                       </a:pPr>
                       <a:r>
-                        <a:rPr lang="hu-HU" sz="4800" b="0" dirty="0">
+                        <a:rPr lang="hu-HU" sz="4800" b="0" noProof="1">
                           <a:solidFill>
                             <a:schemeClr val="tx1"/>
                           </a:solidFill>
@@ -6137,7 +6130,7 @@
                         <a:t>2718</a:t>
                       </a:r>
                       <a:r>
-                        <a:rPr lang="hu-HU" sz="4800" b="0" dirty="0">
+                        <a:rPr lang="hu-HU" sz="4800" b="0" noProof="1">
                           <a:solidFill>
                             <a:schemeClr val="tx1"/>
                           </a:solidFill>
@@ -6146,7 +6139,7 @@
                       </a:r>
                     </a:p>
                     <a:p>
-                      <a:endParaRPr lang="hu-HU" sz="4800" b="0" dirty="0">
+                      <a:endParaRPr lang="hu-HU" sz="4800" b="0" noProof="1">
                         <a:solidFill>
                           <a:schemeClr val="tx1"/>
                         </a:solidFill>
@@ -6191,6 +6184,620 @@
     <p:extLst>
       <p:ext uri="{BB962C8B-B14F-4D97-AF65-F5344CB8AC3E}">
         <p14:creationId xmlns:p14="http://schemas.microsoft.com/office/powerpoint/2010/main" val="1146536456"/>
+      </p:ext>
+    </p:extLst>
+  </p:cSld>
+  <p:clrMapOvr>
+    <a:masterClrMapping/>
+  </p:clrMapOvr>
+</p:sld>
+</file>
+
+<file path=ppt/slides/slide4.xml><?xml version="1.0" encoding="utf-8"?>
+<p:sld xmlns:a="http://schemas.openxmlformats.org/drawingml/2006/main" xmlns:r="http://schemas.openxmlformats.org/officeDocument/2006/relationships" xmlns:p="http://schemas.openxmlformats.org/presentationml/2006/main">
+  <p:cSld>
+    <p:spTree>
+      <p:nvGrpSpPr>
+        <p:cNvPr id="1" name=""/>
+        <p:cNvGrpSpPr/>
+        <p:nvPr/>
+      </p:nvGrpSpPr>
+      <p:grpSpPr>
+        <a:xfrm>
+          <a:off x="0" y="0"/>
+          <a:ext cx="0" cy="0"/>
+          <a:chOff x="0" y="0"/>
+          <a:chExt cx="0" cy="0"/>
+        </a:xfrm>
+      </p:grpSpPr>
+      <p:sp>
+        <p:nvSpPr>
+          <p:cNvPr id="5" name="Téglalap: lekerekített 4">
+            <a:extLst>
+              <a:ext uri="{FF2B5EF4-FFF2-40B4-BE49-F238E27FC236}">
+                <a16:creationId xmlns:a16="http://schemas.microsoft.com/office/drawing/2014/main" id="{0618C48D-49F3-472D-CBBC-4CBD3858C0B0}"/>
+              </a:ext>
+            </a:extLst>
+          </p:cNvPr>
+          <p:cNvSpPr/>
+          <p:nvPr/>
+        </p:nvSpPr>
+        <p:spPr>
+          <a:xfrm>
+            <a:off x="4945930" y="2108461"/>
+            <a:ext cx="2300140" cy="1320539"/>
+          </a:xfrm>
+          <a:prstGeom prst="roundRect">
+            <a:avLst/>
+          </a:prstGeom>
+          <a:solidFill>
+            <a:schemeClr val="accent1">
+              <a:lumMod val="60000"/>
+              <a:lumOff val="40000"/>
+            </a:schemeClr>
+          </a:solidFill>
+          <a:ln>
+            <a:noFill/>
+          </a:ln>
+        </p:spPr>
+        <p:style>
+          <a:lnRef idx="2">
+            <a:schemeClr val="accent1">
+              <a:shade val="15000"/>
+            </a:schemeClr>
+          </a:lnRef>
+          <a:fillRef idx="1">
+            <a:schemeClr val="accent1"/>
+          </a:fillRef>
+          <a:effectRef idx="0">
+            <a:schemeClr val="accent1"/>
+          </a:effectRef>
+          <a:fontRef idx="minor">
+            <a:schemeClr val="lt1"/>
+          </a:fontRef>
+        </p:style>
+        <p:txBody>
+          <a:bodyPr rtlCol="0" anchor="ctr"/>
+          <a:lstStyle/>
+          <a:p>
+            <a:pPr algn="ctr"/>
+            <a:r>
+              <a:rPr lang="hu-HU" sz="2400" noProof="1"/>
+              <a:t>ViewModel</a:t>
+            </a:r>
+          </a:p>
+        </p:txBody>
+      </p:sp>
+      <p:grpSp>
+        <p:nvGrpSpPr>
+          <p:cNvPr id="7" name="Csoportba foglalás 6">
+            <a:extLst>
+              <a:ext uri="{FF2B5EF4-FFF2-40B4-BE49-F238E27FC236}">
+                <a16:creationId xmlns:a16="http://schemas.microsoft.com/office/drawing/2014/main" id="{6A9DF171-912B-2299-17F3-534B543DE34A}"/>
+              </a:ext>
+            </a:extLst>
+          </p:cNvPr>
+          <p:cNvGrpSpPr/>
+          <p:nvPr/>
+        </p:nvGrpSpPr>
+        <p:grpSpPr>
+          <a:xfrm>
+            <a:off x="1994554" y="3984395"/>
+            <a:ext cx="8202891" cy="1320539"/>
+            <a:chOff x="2677212" y="3465921"/>
+            <a:chExt cx="8202891" cy="1320539"/>
+          </a:xfrm>
+        </p:grpSpPr>
+        <p:sp>
+          <p:nvSpPr>
+            <p:cNvPr id="4" name="Téglalap: lekerekített 3">
+              <a:extLst>
+                <a:ext uri="{FF2B5EF4-FFF2-40B4-BE49-F238E27FC236}">
+                  <a16:creationId xmlns:a16="http://schemas.microsoft.com/office/drawing/2014/main" id="{F2FF13C8-EDE3-1767-1446-DCDE4507A206}"/>
+                </a:ext>
+              </a:extLst>
+            </p:cNvPr>
+            <p:cNvSpPr/>
+            <p:nvPr/>
+          </p:nvSpPr>
+          <p:spPr>
+            <a:xfrm>
+              <a:off x="2677212" y="3465921"/>
+              <a:ext cx="2300140" cy="1320539"/>
+            </a:xfrm>
+            <a:prstGeom prst="roundRect">
+              <a:avLst/>
+            </a:prstGeom>
+            <a:solidFill>
+              <a:srgbClr val="FBB753"/>
+            </a:solidFill>
+            <a:ln>
+              <a:noFill/>
+            </a:ln>
+          </p:spPr>
+          <p:style>
+            <a:lnRef idx="2">
+              <a:schemeClr val="accent1">
+                <a:shade val="15000"/>
+              </a:schemeClr>
+            </a:lnRef>
+            <a:fillRef idx="1">
+              <a:schemeClr val="accent1"/>
+            </a:fillRef>
+            <a:effectRef idx="0">
+              <a:schemeClr val="accent1"/>
+            </a:effectRef>
+            <a:fontRef idx="minor">
+              <a:schemeClr val="lt1"/>
+            </a:fontRef>
+          </p:style>
+          <p:txBody>
+            <a:bodyPr rtlCol="0" anchor="ctr"/>
+            <a:lstStyle/>
+            <a:p>
+              <a:pPr algn="ctr"/>
+              <a:r>
+                <a:rPr lang="hu-HU" sz="2400" noProof="1"/>
+                <a:t>Model</a:t>
+              </a:r>
+            </a:p>
+          </p:txBody>
+        </p:sp>
+        <p:sp>
+          <p:nvSpPr>
+            <p:cNvPr id="6" name="Téglalap: lekerekített 5">
+              <a:extLst>
+                <a:ext uri="{FF2B5EF4-FFF2-40B4-BE49-F238E27FC236}">
+                  <a16:creationId xmlns:a16="http://schemas.microsoft.com/office/drawing/2014/main" id="{A0249D09-687D-89EF-43CA-F638BBD84599}"/>
+                </a:ext>
+              </a:extLst>
+            </p:cNvPr>
+            <p:cNvSpPr/>
+            <p:nvPr/>
+          </p:nvSpPr>
+          <p:spPr>
+            <a:xfrm>
+              <a:off x="8579963" y="3465921"/>
+              <a:ext cx="2300140" cy="1320539"/>
+            </a:xfrm>
+            <a:prstGeom prst="roundRect">
+              <a:avLst/>
+            </a:prstGeom>
+            <a:solidFill>
+              <a:schemeClr val="accent3">
+                <a:lumMod val="60000"/>
+                <a:lumOff val="40000"/>
+              </a:schemeClr>
+            </a:solidFill>
+            <a:ln>
+              <a:noFill/>
+            </a:ln>
+          </p:spPr>
+          <p:style>
+            <a:lnRef idx="2">
+              <a:schemeClr val="accent1">
+                <a:shade val="15000"/>
+              </a:schemeClr>
+            </a:lnRef>
+            <a:fillRef idx="1">
+              <a:schemeClr val="accent1"/>
+            </a:fillRef>
+            <a:effectRef idx="0">
+              <a:schemeClr val="accent1"/>
+            </a:effectRef>
+            <a:fontRef idx="minor">
+              <a:schemeClr val="lt1"/>
+            </a:fontRef>
+          </p:style>
+          <p:txBody>
+            <a:bodyPr rtlCol="0" anchor="ctr"/>
+            <a:lstStyle/>
+            <a:p>
+              <a:pPr algn="ctr"/>
+              <a:r>
+                <a:rPr lang="hu-HU" sz="2400" noProof="1"/>
+                <a:t>View</a:t>
+              </a:r>
+            </a:p>
+          </p:txBody>
+        </p:sp>
+      </p:grpSp>
+      <p:sp>
+        <p:nvSpPr>
+          <p:cNvPr id="10" name="Nyíl: kanyarodó 9">
+            <a:extLst>
+              <a:ext uri="{FF2B5EF4-FFF2-40B4-BE49-F238E27FC236}">
+                <a16:creationId xmlns:a16="http://schemas.microsoft.com/office/drawing/2014/main" id="{AAB88164-6E2F-611B-630E-6F7B3C8C4569}"/>
+              </a:ext>
+            </a:extLst>
+          </p:cNvPr>
+          <p:cNvSpPr/>
+          <p:nvPr/>
+        </p:nvSpPr>
+        <p:spPr>
+          <a:xfrm>
+            <a:off x="3579042" y="2743201"/>
+            <a:ext cx="1247482" cy="1121790"/>
+          </a:xfrm>
+          <a:prstGeom prst="bentArrow">
+            <a:avLst>
+              <a:gd name="adj1" fmla="val 1306"/>
+              <a:gd name="adj2" fmla="val 3091"/>
+              <a:gd name="adj3" fmla="val 9112"/>
+              <a:gd name="adj4" fmla="val 43750"/>
+            </a:avLst>
+          </a:prstGeom>
+          <a:solidFill>
+            <a:schemeClr val="tx1"/>
+          </a:solidFill>
+          <a:ln>
+            <a:solidFill>
+              <a:schemeClr val="tx1"/>
+            </a:solidFill>
+          </a:ln>
+        </p:spPr>
+        <p:style>
+          <a:lnRef idx="2">
+            <a:schemeClr val="accent1">
+              <a:shade val="15000"/>
+            </a:schemeClr>
+          </a:lnRef>
+          <a:fillRef idx="1">
+            <a:schemeClr val="accent1"/>
+          </a:fillRef>
+          <a:effectRef idx="0">
+            <a:schemeClr val="accent1"/>
+          </a:effectRef>
+          <a:fontRef idx="minor">
+            <a:schemeClr val="lt1"/>
+          </a:fontRef>
+        </p:style>
+        <p:txBody>
+          <a:bodyPr rtlCol="0" anchor="ctr"/>
+          <a:lstStyle/>
+          <a:p>
+            <a:pPr algn="ctr"/>
+            <a:endParaRPr lang="hu-HU" noProof="1">
+              <a:solidFill>
+                <a:schemeClr val="tx1"/>
+              </a:solidFill>
+            </a:endParaRPr>
+          </a:p>
+        </p:txBody>
+      </p:sp>
+      <p:sp>
+        <p:nvSpPr>
+          <p:cNvPr id="11" name="Nyíl: kanyarodó 10">
+            <a:extLst>
+              <a:ext uri="{FF2B5EF4-FFF2-40B4-BE49-F238E27FC236}">
+                <a16:creationId xmlns:a16="http://schemas.microsoft.com/office/drawing/2014/main" id="{67237632-E7BA-F663-C624-5FF9A2909025}"/>
+              </a:ext>
+            </a:extLst>
+          </p:cNvPr>
+          <p:cNvSpPr/>
+          <p:nvPr/>
+        </p:nvSpPr>
+        <p:spPr>
+          <a:xfrm flipH="1" flipV="1">
+            <a:off x="4389748" y="3551156"/>
+            <a:ext cx="1247481" cy="1121790"/>
+          </a:xfrm>
+          <a:prstGeom prst="bentArrow">
+            <a:avLst>
+              <a:gd name="adj1" fmla="val 1306"/>
+              <a:gd name="adj2" fmla="val 3091"/>
+              <a:gd name="adj3" fmla="val 9112"/>
+              <a:gd name="adj4" fmla="val 43750"/>
+            </a:avLst>
+          </a:prstGeom>
+          <a:solidFill>
+            <a:schemeClr val="tx1"/>
+          </a:solidFill>
+          <a:ln>
+            <a:solidFill>
+              <a:schemeClr val="tx1"/>
+            </a:solidFill>
+          </a:ln>
+        </p:spPr>
+        <p:style>
+          <a:lnRef idx="2">
+            <a:schemeClr val="accent1">
+              <a:shade val="15000"/>
+            </a:schemeClr>
+          </a:lnRef>
+          <a:fillRef idx="1">
+            <a:schemeClr val="accent1"/>
+          </a:fillRef>
+          <a:effectRef idx="0">
+            <a:schemeClr val="accent1"/>
+          </a:effectRef>
+          <a:fontRef idx="minor">
+            <a:schemeClr val="lt1"/>
+          </a:fontRef>
+        </p:style>
+        <p:txBody>
+          <a:bodyPr rtlCol="0" anchor="ctr"/>
+          <a:lstStyle/>
+          <a:p>
+            <a:pPr algn="ctr"/>
+            <a:endParaRPr lang="hu-HU" noProof="1">
+              <a:solidFill>
+                <a:schemeClr val="tx1"/>
+              </a:solidFill>
+            </a:endParaRPr>
+          </a:p>
+        </p:txBody>
+      </p:sp>
+      <p:sp>
+        <p:nvSpPr>
+          <p:cNvPr id="12" name="Nyíl: kanyarodó 11">
+            <a:extLst>
+              <a:ext uri="{FF2B5EF4-FFF2-40B4-BE49-F238E27FC236}">
+                <a16:creationId xmlns:a16="http://schemas.microsoft.com/office/drawing/2014/main" id="{897FBBE2-B78E-FCCD-A6C0-A99C7BB363BB}"/>
+              </a:ext>
+            </a:extLst>
+          </p:cNvPr>
+          <p:cNvSpPr/>
+          <p:nvPr/>
+        </p:nvSpPr>
+        <p:spPr>
+          <a:xfrm flipV="1">
+            <a:off x="6554770" y="3551156"/>
+            <a:ext cx="1247481" cy="1121790"/>
+          </a:xfrm>
+          <a:prstGeom prst="bentArrow">
+            <a:avLst>
+              <a:gd name="adj1" fmla="val 1306"/>
+              <a:gd name="adj2" fmla="val 3091"/>
+              <a:gd name="adj3" fmla="val 9112"/>
+              <a:gd name="adj4" fmla="val 43750"/>
+            </a:avLst>
+          </a:prstGeom>
+          <a:solidFill>
+            <a:schemeClr val="tx1"/>
+          </a:solidFill>
+          <a:ln>
+            <a:solidFill>
+              <a:schemeClr val="tx1"/>
+            </a:solidFill>
+          </a:ln>
+        </p:spPr>
+        <p:style>
+          <a:lnRef idx="2">
+            <a:schemeClr val="accent1">
+              <a:shade val="15000"/>
+            </a:schemeClr>
+          </a:lnRef>
+          <a:fillRef idx="1">
+            <a:schemeClr val="accent1"/>
+          </a:fillRef>
+          <a:effectRef idx="0">
+            <a:schemeClr val="accent1"/>
+          </a:effectRef>
+          <a:fontRef idx="minor">
+            <a:schemeClr val="lt1"/>
+          </a:fontRef>
+        </p:style>
+        <p:txBody>
+          <a:bodyPr rtlCol="0" anchor="ctr"/>
+          <a:lstStyle/>
+          <a:p>
+            <a:pPr algn="ctr"/>
+            <a:endParaRPr lang="hu-HU" noProof="1">
+              <a:solidFill>
+                <a:schemeClr val="tx1"/>
+              </a:solidFill>
+            </a:endParaRPr>
+          </a:p>
+        </p:txBody>
+      </p:sp>
+      <p:sp>
+        <p:nvSpPr>
+          <p:cNvPr id="13" name="Nyíl: kanyarodó 12">
+            <a:extLst>
+              <a:ext uri="{FF2B5EF4-FFF2-40B4-BE49-F238E27FC236}">
+                <a16:creationId xmlns:a16="http://schemas.microsoft.com/office/drawing/2014/main" id="{306D2143-E8DF-81B4-2E16-0A02F679F84C}"/>
+              </a:ext>
+            </a:extLst>
+          </p:cNvPr>
+          <p:cNvSpPr/>
+          <p:nvPr/>
+        </p:nvSpPr>
+        <p:spPr>
+          <a:xfrm flipH="1">
+            <a:off x="7365476" y="2740451"/>
+            <a:ext cx="1247482" cy="1121790"/>
+          </a:xfrm>
+          <a:prstGeom prst="bentArrow">
+            <a:avLst>
+              <a:gd name="adj1" fmla="val 1306"/>
+              <a:gd name="adj2" fmla="val 3091"/>
+              <a:gd name="adj3" fmla="val 9112"/>
+              <a:gd name="adj4" fmla="val 43750"/>
+            </a:avLst>
+          </a:prstGeom>
+          <a:solidFill>
+            <a:schemeClr val="tx1"/>
+          </a:solidFill>
+          <a:ln>
+            <a:solidFill>
+              <a:schemeClr val="tx1"/>
+            </a:solidFill>
+          </a:ln>
+        </p:spPr>
+        <p:style>
+          <a:lnRef idx="2">
+            <a:schemeClr val="accent1">
+              <a:shade val="15000"/>
+            </a:schemeClr>
+          </a:lnRef>
+          <a:fillRef idx="1">
+            <a:schemeClr val="accent1"/>
+          </a:fillRef>
+          <a:effectRef idx="0">
+            <a:schemeClr val="accent1"/>
+          </a:effectRef>
+          <a:fontRef idx="minor">
+            <a:schemeClr val="lt1"/>
+          </a:fontRef>
+        </p:style>
+        <p:txBody>
+          <a:bodyPr rtlCol="0" anchor="ctr"/>
+          <a:lstStyle/>
+          <a:p>
+            <a:pPr algn="ctr"/>
+            <a:endParaRPr lang="hu-HU" noProof="1">
+              <a:solidFill>
+                <a:schemeClr val="tx1"/>
+              </a:solidFill>
+            </a:endParaRPr>
+          </a:p>
+        </p:txBody>
+      </p:sp>
+      <p:sp>
+        <p:nvSpPr>
+          <p:cNvPr id="14" name="Szövegdoboz 13">
+            <a:extLst>
+              <a:ext uri="{FF2B5EF4-FFF2-40B4-BE49-F238E27FC236}">
+                <a16:creationId xmlns:a16="http://schemas.microsoft.com/office/drawing/2014/main" id="{6B56D925-EFF0-4298-F77E-F80250641DF8}"/>
+              </a:ext>
+            </a:extLst>
+          </p:cNvPr>
+          <p:cNvSpPr txBox="1"/>
+          <p:nvPr/>
+        </p:nvSpPr>
+        <p:spPr>
+          <a:xfrm>
+            <a:off x="2853536" y="2623797"/>
+            <a:ext cx="822918" cy="369332"/>
+          </a:xfrm>
+          <a:prstGeom prst="rect">
+            <a:avLst/>
+          </a:prstGeom>
+          <a:noFill/>
+        </p:spPr>
+        <p:txBody>
+          <a:bodyPr wrap="none" rtlCol="0">
+            <a:spAutoFit/>
+          </a:bodyPr>
+          <a:lstStyle/>
+          <a:p>
+            <a:r>
+              <a:rPr lang="hu-HU" b="1" noProof="1"/>
+              <a:t>Notify</a:t>
+            </a:r>
+          </a:p>
+        </p:txBody>
+      </p:sp>
+      <p:sp>
+        <p:nvSpPr>
+          <p:cNvPr id="15" name="Szövegdoboz 14">
+            <a:extLst>
+              <a:ext uri="{FF2B5EF4-FFF2-40B4-BE49-F238E27FC236}">
+                <a16:creationId xmlns:a16="http://schemas.microsoft.com/office/drawing/2014/main" id="{1CB4216A-FCC8-0B3A-829B-CC3B0BE1752E}"/>
+              </a:ext>
+            </a:extLst>
+          </p:cNvPr>
+          <p:cNvSpPr txBox="1"/>
+          <p:nvPr/>
+        </p:nvSpPr>
+        <p:spPr>
+          <a:xfrm>
+            <a:off x="8515546" y="2555785"/>
+            <a:ext cx="773930" cy="369332"/>
+          </a:xfrm>
+          <a:prstGeom prst="rect">
+            <a:avLst/>
+          </a:prstGeom>
+          <a:noFill/>
+        </p:spPr>
+        <p:txBody>
+          <a:bodyPr wrap="none" rtlCol="0">
+            <a:spAutoFit/>
+          </a:bodyPr>
+          <a:lstStyle/>
+          <a:p>
+            <a:r>
+              <a:rPr lang="hu-HU" b="1" noProof="1"/>
+              <a:t>Event</a:t>
+            </a:r>
+          </a:p>
+        </p:txBody>
+      </p:sp>
+      <p:sp>
+        <p:nvSpPr>
+          <p:cNvPr id="16" name="Szövegdoboz 15">
+            <a:extLst>
+              <a:ext uri="{FF2B5EF4-FFF2-40B4-BE49-F238E27FC236}">
+                <a16:creationId xmlns:a16="http://schemas.microsoft.com/office/drawing/2014/main" id="{DB7B99DF-ADEF-421F-21DB-062C6734DCC7}"/>
+              </a:ext>
+            </a:extLst>
+          </p:cNvPr>
+          <p:cNvSpPr txBox="1"/>
+          <p:nvPr/>
+        </p:nvSpPr>
+        <p:spPr>
+          <a:xfrm>
+            <a:off x="4814311" y="4672946"/>
+            <a:ext cx="948273" cy="369332"/>
+          </a:xfrm>
+          <a:prstGeom prst="rect">
+            <a:avLst/>
+          </a:prstGeom>
+          <a:noFill/>
+        </p:spPr>
+        <p:txBody>
+          <a:bodyPr wrap="none" rtlCol="0">
+            <a:spAutoFit/>
+          </a:bodyPr>
+          <a:lstStyle/>
+          <a:p>
+            <a:r>
+              <a:rPr lang="hu-HU" b="1" noProof="1"/>
+              <a:t>Update</a:t>
+            </a:r>
+          </a:p>
+        </p:txBody>
+      </p:sp>
+      <p:sp>
+        <p:nvSpPr>
+          <p:cNvPr id="17" name="Szövegdoboz 16">
+            <a:extLst>
+              <a:ext uri="{FF2B5EF4-FFF2-40B4-BE49-F238E27FC236}">
+                <a16:creationId xmlns:a16="http://schemas.microsoft.com/office/drawing/2014/main" id="{F75527A9-434B-BC49-6AD7-CF87CF10C02A}"/>
+              </a:ext>
+            </a:extLst>
+          </p:cNvPr>
+          <p:cNvSpPr txBox="1"/>
+          <p:nvPr/>
+        </p:nvSpPr>
+        <p:spPr>
+          <a:xfrm>
+            <a:off x="6392167" y="4644664"/>
+            <a:ext cx="971741" cy="369332"/>
+          </a:xfrm>
+          <a:prstGeom prst="rect">
+            <a:avLst/>
+          </a:prstGeom>
+          <a:noFill/>
+        </p:spPr>
+        <p:txBody>
+          <a:bodyPr wrap="none" rtlCol="0">
+            <a:spAutoFit/>
+          </a:bodyPr>
+          <a:lstStyle/>
+          <a:p>
+            <a:r>
+              <a:rPr lang="hu-HU" b="1" noProof="1"/>
+              <a:t>Binding</a:t>
+            </a:r>
+          </a:p>
+        </p:txBody>
+      </p:sp>
+    </p:spTree>
+    <p:extLst>
+      <p:ext uri="{BB962C8B-B14F-4D97-AF65-F5344CB8AC3E}">
+        <p14:creationId xmlns:p14="http://schemas.microsoft.com/office/powerpoint/2010/main" val="3070118959"/>
       </p:ext>
     </p:extLst>
   </p:cSld>

--- a/Pictures/Bemutató1.pptx
+++ b/Pictures/Bemutató1.pptx
@@ -9,6 +9,10 @@
     <p:sldId id="257" r:id="rId3"/>
     <p:sldId id="258" r:id="rId4"/>
     <p:sldId id="259" r:id="rId5"/>
+    <p:sldId id="260" r:id="rId6"/>
+    <p:sldId id="262" r:id="rId7"/>
+    <p:sldId id="261" r:id="rId8"/>
+    <p:sldId id="263" r:id="rId9"/>
   </p:sldIdLst>
   <p:sldSz cx="12192000" cy="6858000"/>
   <p:notesSz cx="6858000" cy="9144000"/>
@@ -262,7 +266,7 @@
           <a:p>
             <a:fld id="{839D5A95-3234-48D1-BBB6-FEF77B066D7E}" type="datetimeFigureOut">
               <a:rPr lang="hu-HU" smtClean="0"/>
-              <a:t>2026. 04. 30.</a:t>
+              <a:t>2026. 05. 01.</a:t>
             </a:fld>
             <a:endParaRPr lang="hu-HU"/>
           </a:p>
@@ -460,7 +464,7 @@
           <a:p>
             <a:fld id="{839D5A95-3234-48D1-BBB6-FEF77B066D7E}" type="datetimeFigureOut">
               <a:rPr lang="hu-HU" smtClean="0"/>
-              <a:t>2026. 04. 30.</a:t>
+              <a:t>2026. 05. 01.</a:t>
             </a:fld>
             <a:endParaRPr lang="hu-HU"/>
           </a:p>
@@ -668,7 +672,7 @@
           <a:p>
             <a:fld id="{839D5A95-3234-48D1-BBB6-FEF77B066D7E}" type="datetimeFigureOut">
               <a:rPr lang="hu-HU" smtClean="0"/>
-              <a:t>2026. 04. 30.</a:t>
+              <a:t>2026. 05. 01.</a:t>
             </a:fld>
             <a:endParaRPr lang="hu-HU"/>
           </a:p>
@@ -866,7 +870,7 @@
           <a:p>
             <a:fld id="{839D5A95-3234-48D1-BBB6-FEF77B066D7E}" type="datetimeFigureOut">
               <a:rPr lang="hu-HU" smtClean="0"/>
-              <a:t>2026. 04. 30.</a:t>
+              <a:t>2026. 05. 01.</a:t>
             </a:fld>
             <a:endParaRPr lang="hu-HU"/>
           </a:p>
@@ -1141,7 +1145,7 @@
           <a:p>
             <a:fld id="{839D5A95-3234-48D1-BBB6-FEF77B066D7E}" type="datetimeFigureOut">
               <a:rPr lang="hu-HU" smtClean="0"/>
-              <a:t>2026. 04. 30.</a:t>
+              <a:t>2026. 05. 01.</a:t>
             </a:fld>
             <a:endParaRPr lang="hu-HU"/>
           </a:p>
@@ -1406,7 +1410,7 @@
           <a:p>
             <a:fld id="{839D5A95-3234-48D1-BBB6-FEF77B066D7E}" type="datetimeFigureOut">
               <a:rPr lang="hu-HU" smtClean="0"/>
-              <a:t>2026. 04. 30.</a:t>
+              <a:t>2026. 05. 01.</a:t>
             </a:fld>
             <a:endParaRPr lang="hu-HU"/>
           </a:p>
@@ -1818,7 +1822,7 @@
           <a:p>
             <a:fld id="{839D5A95-3234-48D1-BBB6-FEF77B066D7E}" type="datetimeFigureOut">
               <a:rPr lang="hu-HU" smtClean="0"/>
-              <a:t>2026. 04. 30.</a:t>
+              <a:t>2026. 05. 01.</a:t>
             </a:fld>
             <a:endParaRPr lang="hu-HU"/>
           </a:p>
@@ -1959,7 +1963,7 @@
           <a:p>
             <a:fld id="{839D5A95-3234-48D1-BBB6-FEF77B066D7E}" type="datetimeFigureOut">
               <a:rPr lang="hu-HU" smtClean="0"/>
-              <a:t>2026. 04. 30.</a:t>
+              <a:t>2026. 05. 01.</a:t>
             </a:fld>
             <a:endParaRPr lang="hu-HU"/>
           </a:p>
@@ -2072,7 +2076,7 @@
           <a:p>
             <a:fld id="{839D5A95-3234-48D1-BBB6-FEF77B066D7E}" type="datetimeFigureOut">
               <a:rPr lang="hu-HU" smtClean="0"/>
-              <a:t>2026. 04. 30.</a:t>
+              <a:t>2026. 05. 01.</a:t>
             </a:fld>
             <a:endParaRPr lang="hu-HU"/>
           </a:p>
@@ -2383,7 +2387,7 @@
           <a:p>
             <a:fld id="{839D5A95-3234-48D1-BBB6-FEF77B066D7E}" type="datetimeFigureOut">
               <a:rPr lang="hu-HU" smtClean="0"/>
-              <a:t>2026. 04. 30.</a:t>
+              <a:t>2026. 05. 01.</a:t>
             </a:fld>
             <a:endParaRPr lang="hu-HU"/>
           </a:p>
@@ -2671,7 +2675,7 @@
           <a:p>
             <a:fld id="{839D5A95-3234-48D1-BBB6-FEF77B066D7E}" type="datetimeFigureOut">
               <a:rPr lang="hu-HU" smtClean="0"/>
-              <a:t>2026. 04. 30.</a:t>
+              <a:t>2026. 05. 01.</a:t>
             </a:fld>
             <a:endParaRPr lang="hu-HU"/>
           </a:p>
@@ -2912,7 +2916,7 @@
           <a:p>
             <a:fld id="{839D5A95-3234-48D1-BBB6-FEF77B066D7E}" type="datetimeFigureOut">
               <a:rPr lang="hu-HU" smtClean="0"/>
-              <a:t>2026. 04. 30.</a:t>
+              <a:t>2026. 05. 01.</a:t>
             </a:fld>
             <a:endParaRPr lang="hu-HU"/>
           </a:p>
@@ -6807,6 +6811,5108 @@
 </p:sld>
 </file>
 
+<file path=ppt/slides/slide5.xml><?xml version="1.0" encoding="utf-8"?>
+<p:sld xmlns:a="http://schemas.openxmlformats.org/drawingml/2006/main" xmlns:r="http://schemas.openxmlformats.org/officeDocument/2006/relationships" xmlns:p="http://schemas.openxmlformats.org/presentationml/2006/main">
+  <p:cSld>
+    <p:spTree>
+      <p:nvGrpSpPr>
+        <p:cNvPr id="1" name=""/>
+        <p:cNvGrpSpPr/>
+        <p:nvPr/>
+      </p:nvGrpSpPr>
+      <p:grpSpPr>
+        <a:xfrm>
+          <a:off x="0" y="0"/>
+          <a:ext cx="0" cy="0"/>
+          <a:chOff x="0" y="0"/>
+          <a:chExt cx="0" cy="0"/>
+        </a:xfrm>
+      </p:grpSpPr>
+      <p:sp>
+        <p:nvSpPr>
+          <p:cNvPr id="4" name="Ellipszis 3">
+            <a:extLst>
+              <a:ext uri="{FF2B5EF4-FFF2-40B4-BE49-F238E27FC236}">
+                <a16:creationId xmlns:a16="http://schemas.microsoft.com/office/drawing/2014/main" id="{E26EAA73-2D1B-4385-3834-8C077F0E5FA0}"/>
+              </a:ext>
+            </a:extLst>
+          </p:cNvPr>
+          <p:cNvSpPr/>
+          <p:nvPr/>
+        </p:nvSpPr>
+        <p:spPr>
+          <a:xfrm>
+            <a:off x="5376000" y="548050"/>
+            <a:ext cx="720000" cy="720000"/>
+          </a:xfrm>
+          <a:prstGeom prst="ellipse">
+            <a:avLst/>
+          </a:prstGeom>
+          <a:solidFill>
+            <a:srgbClr val="FBB753"/>
+          </a:solidFill>
+          <a:ln>
+            <a:solidFill>
+              <a:schemeClr val="tx1"/>
+            </a:solidFill>
+          </a:ln>
+        </p:spPr>
+        <p:style>
+          <a:lnRef idx="2">
+            <a:schemeClr val="accent1">
+              <a:shade val="15000"/>
+            </a:schemeClr>
+          </a:lnRef>
+          <a:fillRef idx="1">
+            <a:schemeClr val="accent1"/>
+          </a:fillRef>
+          <a:effectRef idx="0">
+            <a:schemeClr val="accent1"/>
+          </a:effectRef>
+          <a:fontRef idx="minor">
+            <a:schemeClr val="lt1"/>
+          </a:fontRef>
+        </p:style>
+        <p:txBody>
+          <a:bodyPr rtlCol="0" anchor="ctr"/>
+          <a:lstStyle/>
+          <a:p>
+            <a:pPr algn="ctr"/>
+            <a:r>
+              <a:rPr lang="hu-HU" sz="3200" dirty="0">
+                <a:solidFill>
+                  <a:schemeClr val="tx1"/>
+                </a:solidFill>
+              </a:rPr>
+              <a:t>+</a:t>
+            </a:r>
+          </a:p>
+        </p:txBody>
+      </p:sp>
+      <p:cxnSp>
+        <p:nvCxnSpPr>
+          <p:cNvPr id="6" name="Egyenes összekötő 5">
+            <a:extLst>
+              <a:ext uri="{FF2B5EF4-FFF2-40B4-BE49-F238E27FC236}">
+                <a16:creationId xmlns:a16="http://schemas.microsoft.com/office/drawing/2014/main" id="{BB482EB3-144E-ABBD-B76E-A0FAFB266251}"/>
+              </a:ext>
+            </a:extLst>
+          </p:cNvPr>
+          <p:cNvCxnSpPr>
+            <a:cxnSpLocks/>
+            <a:stCxn id="4" idx="4"/>
+            <a:endCxn id="7" idx="0"/>
+          </p:cNvCxnSpPr>
+          <p:nvPr/>
+        </p:nvCxnSpPr>
+        <p:spPr>
+          <a:xfrm flipH="1">
+            <a:off x="4296000" y="1268050"/>
+            <a:ext cx="1440000" cy="540475"/>
+          </a:xfrm>
+          <a:prstGeom prst="line">
+            <a:avLst/>
+          </a:prstGeom>
+          <a:ln>
+            <a:solidFill>
+              <a:schemeClr val="tx1"/>
+            </a:solidFill>
+          </a:ln>
+        </p:spPr>
+        <p:style>
+          <a:lnRef idx="2">
+            <a:schemeClr val="accent1"/>
+          </a:lnRef>
+          <a:fillRef idx="0">
+            <a:schemeClr val="accent1"/>
+          </a:fillRef>
+          <a:effectRef idx="1">
+            <a:schemeClr val="accent1"/>
+          </a:effectRef>
+          <a:fontRef idx="minor">
+            <a:schemeClr val="tx1"/>
+          </a:fontRef>
+        </p:style>
+      </p:cxnSp>
+      <p:cxnSp>
+        <p:nvCxnSpPr>
+          <p:cNvPr id="13" name="Egyenes összekötő 12">
+            <a:extLst>
+              <a:ext uri="{FF2B5EF4-FFF2-40B4-BE49-F238E27FC236}">
+                <a16:creationId xmlns:a16="http://schemas.microsoft.com/office/drawing/2014/main" id="{C62EF6AF-E717-60F0-F3C7-02B9B73FFA28}"/>
+              </a:ext>
+            </a:extLst>
+          </p:cNvPr>
+          <p:cNvCxnSpPr>
+            <a:cxnSpLocks/>
+            <a:stCxn id="4" idx="4"/>
+            <a:endCxn id="8" idx="0"/>
+          </p:cNvCxnSpPr>
+          <p:nvPr/>
+        </p:nvCxnSpPr>
+        <p:spPr>
+          <a:xfrm>
+            <a:off x="5736000" y="1268050"/>
+            <a:ext cx="1440000" cy="540475"/>
+          </a:xfrm>
+          <a:prstGeom prst="line">
+            <a:avLst/>
+          </a:prstGeom>
+          <a:ln>
+            <a:solidFill>
+              <a:schemeClr val="tx1"/>
+            </a:solidFill>
+          </a:ln>
+        </p:spPr>
+        <p:style>
+          <a:lnRef idx="2">
+            <a:schemeClr val="accent1"/>
+          </a:lnRef>
+          <a:fillRef idx="0">
+            <a:schemeClr val="accent1"/>
+          </a:fillRef>
+          <a:effectRef idx="1">
+            <a:schemeClr val="accent1"/>
+          </a:effectRef>
+          <a:fontRef idx="minor">
+            <a:schemeClr val="tx1"/>
+          </a:fontRef>
+        </p:style>
+      </p:cxnSp>
+      <p:sp>
+        <p:nvSpPr>
+          <p:cNvPr id="7" name="Ellipszis 6">
+            <a:extLst>
+              <a:ext uri="{FF2B5EF4-FFF2-40B4-BE49-F238E27FC236}">
+                <a16:creationId xmlns:a16="http://schemas.microsoft.com/office/drawing/2014/main" id="{969A35FB-08D3-0235-31C0-1E9057B23ACB}"/>
+              </a:ext>
+            </a:extLst>
+          </p:cNvPr>
+          <p:cNvSpPr/>
+          <p:nvPr/>
+        </p:nvSpPr>
+        <p:spPr>
+          <a:xfrm>
+            <a:off x="3936000" y="1808525"/>
+            <a:ext cx="720000" cy="720000"/>
+          </a:xfrm>
+          <a:prstGeom prst="ellipse">
+            <a:avLst/>
+          </a:prstGeom>
+          <a:solidFill>
+            <a:srgbClr val="FBB753"/>
+          </a:solidFill>
+          <a:ln>
+            <a:solidFill>
+              <a:schemeClr val="tx1"/>
+            </a:solidFill>
+          </a:ln>
+        </p:spPr>
+        <p:style>
+          <a:lnRef idx="2">
+            <a:schemeClr val="accent1">
+              <a:shade val="15000"/>
+            </a:schemeClr>
+          </a:lnRef>
+          <a:fillRef idx="1">
+            <a:schemeClr val="accent1"/>
+          </a:fillRef>
+          <a:effectRef idx="0">
+            <a:schemeClr val="accent1"/>
+          </a:effectRef>
+          <a:fontRef idx="minor">
+            <a:schemeClr val="lt1"/>
+          </a:fontRef>
+        </p:style>
+        <p:txBody>
+          <a:bodyPr rtlCol="0" anchor="ctr"/>
+          <a:lstStyle/>
+          <a:p>
+            <a:pPr algn="ctr"/>
+            <a:r>
+              <a:rPr lang="hu-HU" sz="3200" dirty="0">
+                <a:solidFill>
+                  <a:schemeClr val="tx1"/>
+                </a:solidFill>
+              </a:rPr>
+              <a:t>×</a:t>
+            </a:r>
+          </a:p>
+        </p:txBody>
+      </p:sp>
+      <p:sp>
+        <p:nvSpPr>
+          <p:cNvPr id="8" name="Ellipszis 7">
+            <a:extLst>
+              <a:ext uri="{FF2B5EF4-FFF2-40B4-BE49-F238E27FC236}">
+                <a16:creationId xmlns:a16="http://schemas.microsoft.com/office/drawing/2014/main" id="{0CFAEE70-63C4-F26F-6846-0D090E1D5E87}"/>
+              </a:ext>
+            </a:extLst>
+          </p:cNvPr>
+          <p:cNvSpPr/>
+          <p:nvPr/>
+        </p:nvSpPr>
+        <p:spPr>
+          <a:xfrm>
+            <a:off x="6816000" y="1808525"/>
+            <a:ext cx="720000" cy="720000"/>
+          </a:xfrm>
+          <a:prstGeom prst="ellipse">
+            <a:avLst/>
+          </a:prstGeom>
+          <a:solidFill>
+            <a:srgbClr val="FBB753"/>
+          </a:solidFill>
+          <a:ln>
+            <a:solidFill>
+              <a:schemeClr val="tx1"/>
+            </a:solidFill>
+          </a:ln>
+        </p:spPr>
+        <p:style>
+          <a:lnRef idx="2">
+            <a:schemeClr val="accent1">
+              <a:shade val="15000"/>
+            </a:schemeClr>
+          </a:lnRef>
+          <a:fillRef idx="1">
+            <a:schemeClr val="accent1"/>
+          </a:fillRef>
+          <a:effectRef idx="0">
+            <a:schemeClr val="accent1"/>
+          </a:effectRef>
+          <a:fontRef idx="minor">
+            <a:schemeClr val="lt1"/>
+          </a:fontRef>
+        </p:style>
+        <p:txBody>
+          <a:bodyPr rtlCol="0" anchor="ctr"/>
+          <a:lstStyle/>
+          <a:p>
+            <a:pPr algn="ctr"/>
+            <a:r>
+              <a:rPr lang="hu-HU" sz="3200" dirty="0">
+                <a:solidFill>
+                  <a:schemeClr val="tx1"/>
+                </a:solidFill>
+              </a:rPr>
+              <a:t>–</a:t>
+            </a:r>
+          </a:p>
+        </p:txBody>
+      </p:sp>
+      <p:grpSp>
+        <p:nvGrpSpPr>
+          <p:cNvPr id="37" name="Csoportba foglalás 36">
+            <a:extLst>
+              <a:ext uri="{FF2B5EF4-FFF2-40B4-BE49-F238E27FC236}">
+                <a16:creationId xmlns:a16="http://schemas.microsoft.com/office/drawing/2014/main" id="{BA16CA91-761B-A420-E03A-1C00DDC56015}"/>
+              </a:ext>
+            </a:extLst>
+          </p:cNvPr>
+          <p:cNvGrpSpPr/>
+          <p:nvPr/>
+        </p:nvGrpSpPr>
+        <p:grpSpPr>
+          <a:xfrm>
+            <a:off x="3216000" y="3069000"/>
+            <a:ext cx="5040000" cy="720000"/>
+            <a:chOff x="3576000" y="3069000"/>
+            <a:chExt cx="5040000" cy="720000"/>
+          </a:xfrm>
+          <a:solidFill>
+            <a:srgbClr val="FBB753"/>
+          </a:solidFill>
+        </p:grpSpPr>
+        <p:grpSp>
+          <p:nvGrpSpPr>
+            <p:cNvPr id="23" name="Csoportba foglalás 22">
+              <a:extLst>
+                <a:ext uri="{FF2B5EF4-FFF2-40B4-BE49-F238E27FC236}">
+                  <a16:creationId xmlns:a16="http://schemas.microsoft.com/office/drawing/2014/main" id="{891A03F9-30B1-A790-2200-AF4E37608A68}"/>
+                </a:ext>
+              </a:extLst>
+            </p:cNvPr>
+            <p:cNvGrpSpPr/>
+            <p:nvPr/>
+          </p:nvGrpSpPr>
+          <p:grpSpPr>
+            <a:xfrm>
+              <a:off x="3576000" y="3069000"/>
+              <a:ext cx="2160000" cy="720000"/>
+              <a:chOff x="3756001" y="3069000"/>
+              <a:chExt cx="2160000" cy="720000"/>
+            </a:xfrm>
+            <a:grpFill/>
+          </p:grpSpPr>
+          <p:sp>
+            <p:nvSpPr>
+              <p:cNvPr id="20" name="Ellipszis 19">
+                <a:extLst>
+                  <a:ext uri="{FF2B5EF4-FFF2-40B4-BE49-F238E27FC236}">
+                    <a16:creationId xmlns:a16="http://schemas.microsoft.com/office/drawing/2014/main" id="{B4332758-A9F8-6983-D86C-6F2422BD9634}"/>
+                  </a:ext>
+                </a:extLst>
+              </p:cNvPr>
+              <p:cNvSpPr/>
+              <p:nvPr/>
+            </p:nvSpPr>
+            <p:spPr>
+              <a:xfrm>
+                <a:off x="3756001" y="3069000"/>
+                <a:ext cx="720000" cy="720000"/>
+              </a:xfrm>
+              <a:prstGeom prst="ellipse">
+                <a:avLst/>
+              </a:prstGeom>
+              <a:grpFill/>
+              <a:ln>
+                <a:solidFill>
+                  <a:schemeClr val="tx1"/>
+                </a:solidFill>
+              </a:ln>
+            </p:spPr>
+            <p:style>
+              <a:lnRef idx="2">
+                <a:schemeClr val="accent1">
+                  <a:shade val="15000"/>
+                </a:schemeClr>
+              </a:lnRef>
+              <a:fillRef idx="1">
+                <a:schemeClr val="accent1"/>
+              </a:fillRef>
+              <a:effectRef idx="0">
+                <a:schemeClr val="accent1"/>
+              </a:effectRef>
+              <a:fontRef idx="minor">
+                <a:schemeClr val="lt1"/>
+              </a:fontRef>
+            </p:style>
+            <p:txBody>
+              <a:bodyPr rtlCol="0" anchor="ctr"/>
+              <a:lstStyle/>
+              <a:p>
+                <a:pPr algn="ctr"/>
+                <a:r>
+                  <a:rPr lang="hu-HU" sz="3200" dirty="0">
+                    <a:solidFill>
+                      <a:schemeClr val="tx1"/>
+                    </a:solidFill>
+                  </a:rPr>
+                  <a:t>3</a:t>
+                </a:r>
+              </a:p>
+            </p:txBody>
+          </p:sp>
+          <p:sp>
+            <p:nvSpPr>
+              <p:cNvPr id="21" name="Ellipszis 20">
+                <a:extLst>
+                  <a:ext uri="{FF2B5EF4-FFF2-40B4-BE49-F238E27FC236}">
+                    <a16:creationId xmlns:a16="http://schemas.microsoft.com/office/drawing/2014/main" id="{1ABD1125-BFCA-42E5-C279-288BD272CE85}"/>
+                  </a:ext>
+                </a:extLst>
+              </p:cNvPr>
+              <p:cNvSpPr/>
+              <p:nvPr/>
+            </p:nvSpPr>
+            <p:spPr>
+              <a:xfrm>
+                <a:off x="5196001" y="3069000"/>
+                <a:ext cx="720000" cy="720000"/>
+              </a:xfrm>
+              <a:prstGeom prst="ellipse">
+                <a:avLst/>
+              </a:prstGeom>
+              <a:grpFill/>
+              <a:ln>
+                <a:solidFill>
+                  <a:schemeClr val="tx1"/>
+                </a:solidFill>
+              </a:ln>
+            </p:spPr>
+            <p:style>
+              <a:lnRef idx="2">
+                <a:schemeClr val="accent1">
+                  <a:shade val="15000"/>
+                </a:schemeClr>
+              </a:lnRef>
+              <a:fillRef idx="1">
+                <a:schemeClr val="accent1"/>
+              </a:fillRef>
+              <a:effectRef idx="0">
+                <a:schemeClr val="accent1"/>
+              </a:effectRef>
+              <a:fontRef idx="minor">
+                <a:schemeClr val="lt1"/>
+              </a:fontRef>
+            </p:style>
+            <p:txBody>
+              <a:bodyPr rtlCol="0" anchor="ctr"/>
+              <a:lstStyle/>
+              <a:p>
+                <a:pPr algn="ctr"/>
+                <a:r>
+                  <a:rPr lang="hu-HU" sz="3200" dirty="0">
+                    <a:solidFill>
+                      <a:schemeClr val="tx1"/>
+                    </a:solidFill>
+                  </a:rPr>
+                  <a:t>4</a:t>
+                </a:r>
+              </a:p>
+            </p:txBody>
+          </p:sp>
+        </p:grpSp>
+        <p:grpSp>
+          <p:nvGrpSpPr>
+            <p:cNvPr id="36" name="Csoportba foglalás 35">
+              <a:extLst>
+                <a:ext uri="{FF2B5EF4-FFF2-40B4-BE49-F238E27FC236}">
+                  <a16:creationId xmlns:a16="http://schemas.microsoft.com/office/drawing/2014/main" id="{8F142E97-5406-9C61-DDC5-840E7B9C0246}"/>
+                </a:ext>
+              </a:extLst>
+            </p:cNvPr>
+            <p:cNvGrpSpPr/>
+            <p:nvPr/>
+          </p:nvGrpSpPr>
+          <p:grpSpPr>
+            <a:xfrm>
+              <a:off x="6456000" y="3069000"/>
+              <a:ext cx="2160000" cy="720000"/>
+              <a:chOff x="6276000" y="3087854"/>
+              <a:chExt cx="2160000" cy="720000"/>
+            </a:xfrm>
+            <a:grpFill/>
+          </p:grpSpPr>
+          <p:sp>
+            <p:nvSpPr>
+              <p:cNvPr id="25" name="Ellipszis 24">
+                <a:extLst>
+                  <a:ext uri="{FF2B5EF4-FFF2-40B4-BE49-F238E27FC236}">
+                    <a16:creationId xmlns:a16="http://schemas.microsoft.com/office/drawing/2014/main" id="{E8F94B02-7700-3CCC-B03D-EE145A55E975}"/>
+                  </a:ext>
+                </a:extLst>
+              </p:cNvPr>
+              <p:cNvSpPr/>
+              <p:nvPr/>
+            </p:nvSpPr>
+            <p:spPr>
+              <a:xfrm>
+                <a:off x="6276000" y="3087854"/>
+                <a:ext cx="720000" cy="720000"/>
+              </a:xfrm>
+              <a:prstGeom prst="ellipse">
+                <a:avLst/>
+              </a:prstGeom>
+              <a:grpFill/>
+              <a:ln>
+                <a:solidFill>
+                  <a:schemeClr val="tx1"/>
+                </a:solidFill>
+              </a:ln>
+            </p:spPr>
+            <p:style>
+              <a:lnRef idx="2">
+                <a:schemeClr val="accent1">
+                  <a:shade val="15000"/>
+                </a:schemeClr>
+              </a:lnRef>
+              <a:fillRef idx="1">
+                <a:schemeClr val="accent1"/>
+              </a:fillRef>
+              <a:effectRef idx="0">
+                <a:schemeClr val="accent1"/>
+              </a:effectRef>
+              <a:fontRef idx="minor">
+                <a:schemeClr val="lt1"/>
+              </a:fontRef>
+            </p:style>
+            <p:txBody>
+              <a:bodyPr rtlCol="0" anchor="ctr"/>
+              <a:lstStyle/>
+              <a:p>
+                <a:pPr algn="ctr"/>
+                <a:r>
+                  <a:rPr lang="hu-HU" sz="3200" dirty="0">
+                    <a:solidFill>
+                      <a:schemeClr val="tx1"/>
+                    </a:solidFill>
+                  </a:rPr>
+                  <a:t>6</a:t>
+                </a:r>
+              </a:p>
+            </p:txBody>
+          </p:sp>
+          <p:sp>
+            <p:nvSpPr>
+              <p:cNvPr id="26" name="Ellipszis 25">
+                <a:extLst>
+                  <a:ext uri="{FF2B5EF4-FFF2-40B4-BE49-F238E27FC236}">
+                    <a16:creationId xmlns:a16="http://schemas.microsoft.com/office/drawing/2014/main" id="{62DFA57C-2614-25B9-A54D-1D4A32A6AC70}"/>
+                  </a:ext>
+                </a:extLst>
+              </p:cNvPr>
+              <p:cNvSpPr/>
+              <p:nvPr/>
+            </p:nvSpPr>
+            <p:spPr>
+              <a:xfrm>
+                <a:off x="7716000" y="3087854"/>
+                <a:ext cx="720000" cy="720000"/>
+              </a:xfrm>
+              <a:prstGeom prst="ellipse">
+                <a:avLst/>
+              </a:prstGeom>
+              <a:grpFill/>
+              <a:ln>
+                <a:solidFill>
+                  <a:schemeClr val="tx1"/>
+                </a:solidFill>
+              </a:ln>
+            </p:spPr>
+            <p:style>
+              <a:lnRef idx="2">
+                <a:schemeClr val="accent1">
+                  <a:shade val="15000"/>
+                </a:schemeClr>
+              </a:lnRef>
+              <a:fillRef idx="1">
+                <a:schemeClr val="accent1"/>
+              </a:fillRef>
+              <a:effectRef idx="0">
+                <a:schemeClr val="accent1"/>
+              </a:effectRef>
+              <a:fontRef idx="minor">
+                <a:schemeClr val="lt1"/>
+              </a:fontRef>
+            </p:style>
+            <p:txBody>
+              <a:bodyPr rtlCol="0" anchor="ctr"/>
+              <a:lstStyle/>
+              <a:p>
+                <a:pPr algn="ctr"/>
+                <a:r>
+                  <a:rPr lang="hu-HU" sz="3200" dirty="0">
+                    <a:solidFill>
+                      <a:schemeClr val="tx1"/>
+                    </a:solidFill>
+                  </a:rPr>
+                  <a:t>×</a:t>
+                </a:r>
+              </a:p>
+            </p:txBody>
+          </p:sp>
+        </p:grpSp>
+      </p:grpSp>
+      <p:grpSp>
+        <p:nvGrpSpPr>
+          <p:cNvPr id="42" name="Csoportba foglalás 41">
+            <a:extLst>
+              <a:ext uri="{FF2B5EF4-FFF2-40B4-BE49-F238E27FC236}">
+                <a16:creationId xmlns:a16="http://schemas.microsoft.com/office/drawing/2014/main" id="{B883C0D7-4AA9-6C0B-4E7E-47F6C216B18D}"/>
+              </a:ext>
+            </a:extLst>
+          </p:cNvPr>
+          <p:cNvGrpSpPr/>
+          <p:nvPr/>
+        </p:nvGrpSpPr>
+        <p:grpSpPr>
+          <a:xfrm>
+            <a:off x="6964107" y="4329475"/>
+            <a:ext cx="1863786" cy="720000"/>
+            <a:chOff x="7112214" y="4329475"/>
+            <a:chExt cx="1863786" cy="720000"/>
+          </a:xfrm>
+          <a:solidFill>
+            <a:srgbClr val="FBB753"/>
+          </a:solidFill>
+        </p:grpSpPr>
+        <p:sp>
+          <p:nvSpPr>
+            <p:cNvPr id="30" name="Ellipszis 29">
+              <a:extLst>
+                <a:ext uri="{FF2B5EF4-FFF2-40B4-BE49-F238E27FC236}">
+                  <a16:creationId xmlns:a16="http://schemas.microsoft.com/office/drawing/2014/main" id="{650F8513-F464-A45D-6C30-D85E682B3DA7}"/>
+                </a:ext>
+              </a:extLst>
+            </p:cNvPr>
+            <p:cNvSpPr/>
+            <p:nvPr/>
+          </p:nvSpPr>
+          <p:spPr>
+            <a:xfrm>
+              <a:off x="7112214" y="4329475"/>
+              <a:ext cx="720000" cy="720000"/>
+            </a:xfrm>
+            <a:prstGeom prst="ellipse">
+              <a:avLst/>
+            </a:prstGeom>
+            <a:grpFill/>
+            <a:ln>
+              <a:solidFill>
+                <a:schemeClr val="tx1"/>
+              </a:solidFill>
+            </a:ln>
+          </p:spPr>
+          <p:style>
+            <a:lnRef idx="2">
+              <a:schemeClr val="accent1">
+                <a:shade val="15000"/>
+              </a:schemeClr>
+            </a:lnRef>
+            <a:fillRef idx="1">
+              <a:schemeClr val="accent1"/>
+            </a:fillRef>
+            <a:effectRef idx="0">
+              <a:schemeClr val="accent1"/>
+            </a:effectRef>
+            <a:fontRef idx="minor">
+              <a:schemeClr val="lt1"/>
+            </a:fontRef>
+          </p:style>
+          <p:txBody>
+            <a:bodyPr rtlCol="0" anchor="ctr"/>
+            <a:lstStyle/>
+            <a:p>
+              <a:pPr algn="ctr"/>
+              <a:r>
+                <a:rPr lang="hu-HU" sz="3200" dirty="0">
+                  <a:solidFill>
+                    <a:schemeClr val="tx1"/>
+                  </a:solidFill>
+                </a:rPr>
+                <a:t>1</a:t>
+              </a:r>
+            </a:p>
+          </p:txBody>
+        </p:sp>
+        <p:sp>
+          <p:nvSpPr>
+            <p:cNvPr id="31" name="Ellipszis 30">
+              <a:extLst>
+                <a:ext uri="{FF2B5EF4-FFF2-40B4-BE49-F238E27FC236}">
+                  <a16:creationId xmlns:a16="http://schemas.microsoft.com/office/drawing/2014/main" id="{7377392E-2B34-F5A2-5D45-37483872B8D0}"/>
+                </a:ext>
+              </a:extLst>
+            </p:cNvPr>
+            <p:cNvSpPr/>
+            <p:nvPr/>
+          </p:nvSpPr>
+          <p:spPr>
+            <a:xfrm>
+              <a:off x="8256000" y="4329475"/>
+              <a:ext cx="720000" cy="720000"/>
+            </a:xfrm>
+            <a:prstGeom prst="ellipse">
+              <a:avLst/>
+            </a:prstGeom>
+            <a:grpFill/>
+            <a:ln>
+              <a:solidFill>
+                <a:schemeClr val="tx1"/>
+              </a:solidFill>
+            </a:ln>
+          </p:spPr>
+          <p:style>
+            <a:lnRef idx="2">
+              <a:schemeClr val="accent1">
+                <a:shade val="15000"/>
+              </a:schemeClr>
+            </a:lnRef>
+            <a:fillRef idx="1">
+              <a:schemeClr val="accent1"/>
+            </a:fillRef>
+            <a:effectRef idx="0">
+              <a:schemeClr val="accent1"/>
+            </a:effectRef>
+            <a:fontRef idx="minor">
+              <a:schemeClr val="lt1"/>
+            </a:fontRef>
+          </p:style>
+          <p:txBody>
+            <a:bodyPr rtlCol="0" anchor="ctr"/>
+            <a:lstStyle/>
+            <a:p>
+              <a:pPr algn="ctr"/>
+              <a:r>
+                <a:rPr lang="hu-HU" sz="3200" dirty="0">
+                  <a:solidFill>
+                    <a:schemeClr val="tx1"/>
+                  </a:solidFill>
+                </a:rPr>
+                <a:t>8</a:t>
+              </a:r>
+            </a:p>
+          </p:txBody>
+        </p:sp>
+      </p:grpSp>
+      <p:cxnSp>
+        <p:nvCxnSpPr>
+          <p:cNvPr id="43" name="Egyenes összekötő 42">
+            <a:extLst>
+              <a:ext uri="{FF2B5EF4-FFF2-40B4-BE49-F238E27FC236}">
+                <a16:creationId xmlns:a16="http://schemas.microsoft.com/office/drawing/2014/main" id="{A76D7DB6-2468-80B9-B84E-FF91B81FBF6A}"/>
+              </a:ext>
+            </a:extLst>
+          </p:cNvPr>
+          <p:cNvCxnSpPr>
+            <a:cxnSpLocks/>
+            <a:stCxn id="20" idx="0"/>
+            <a:endCxn id="7" idx="4"/>
+          </p:cNvCxnSpPr>
+          <p:nvPr/>
+        </p:nvCxnSpPr>
+        <p:spPr>
+          <a:xfrm flipV="1">
+            <a:off x="3576000" y="2528525"/>
+            <a:ext cx="720000" cy="540475"/>
+          </a:xfrm>
+          <a:prstGeom prst="line">
+            <a:avLst/>
+          </a:prstGeom>
+          <a:ln>
+            <a:solidFill>
+              <a:schemeClr val="tx1"/>
+            </a:solidFill>
+          </a:ln>
+        </p:spPr>
+        <p:style>
+          <a:lnRef idx="2">
+            <a:schemeClr val="accent1"/>
+          </a:lnRef>
+          <a:fillRef idx="0">
+            <a:schemeClr val="accent1"/>
+          </a:fillRef>
+          <a:effectRef idx="1">
+            <a:schemeClr val="accent1"/>
+          </a:effectRef>
+          <a:fontRef idx="minor">
+            <a:schemeClr val="tx1"/>
+          </a:fontRef>
+        </p:style>
+      </p:cxnSp>
+      <p:cxnSp>
+        <p:nvCxnSpPr>
+          <p:cNvPr id="46" name="Egyenes összekötő 45">
+            <a:extLst>
+              <a:ext uri="{FF2B5EF4-FFF2-40B4-BE49-F238E27FC236}">
+                <a16:creationId xmlns:a16="http://schemas.microsoft.com/office/drawing/2014/main" id="{2F6EF120-AF8D-5621-1B55-9CF4EED247CF}"/>
+              </a:ext>
+            </a:extLst>
+          </p:cNvPr>
+          <p:cNvCxnSpPr>
+            <a:cxnSpLocks/>
+            <a:stCxn id="21" idx="0"/>
+            <a:endCxn id="7" idx="4"/>
+          </p:cNvCxnSpPr>
+          <p:nvPr/>
+        </p:nvCxnSpPr>
+        <p:spPr>
+          <a:xfrm flipH="1" flipV="1">
+            <a:off x="4296000" y="2528525"/>
+            <a:ext cx="720000" cy="540475"/>
+          </a:xfrm>
+          <a:prstGeom prst="line">
+            <a:avLst/>
+          </a:prstGeom>
+          <a:ln>
+            <a:solidFill>
+              <a:schemeClr val="tx1"/>
+            </a:solidFill>
+          </a:ln>
+        </p:spPr>
+        <p:style>
+          <a:lnRef idx="2">
+            <a:schemeClr val="accent1"/>
+          </a:lnRef>
+          <a:fillRef idx="0">
+            <a:schemeClr val="accent1"/>
+          </a:fillRef>
+          <a:effectRef idx="1">
+            <a:schemeClr val="accent1"/>
+          </a:effectRef>
+          <a:fontRef idx="minor">
+            <a:schemeClr val="tx1"/>
+          </a:fontRef>
+        </p:style>
+      </p:cxnSp>
+      <p:cxnSp>
+        <p:nvCxnSpPr>
+          <p:cNvPr id="49" name="Egyenes összekötő 48">
+            <a:extLst>
+              <a:ext uri="{FF2B5EF4-FFF2-40B4-BE49-F238E27FC236}">
+                <a16:creationId xmlns:a16="http://schemas.microsoft.com/office/drawing/2014/main" id="{49ED99C9-783B-A16A-321B-DC0D424648AD}"/>
+              </a:ext>
+            </a:extLst>
+          </p:cNvPr>
+          <p:cNvCxnSpPr>
+            <a:cxnSpLocks/>
+            <a:stCxn id="25" idx="0"/>
+            <a:endCxn id="8" idx="4"/>
+          </p:cNvCxnSpPr>
+          <p:nvPr/>
+        </p:nvCxnSpPr>
+        <p:spPr>
+          <a:xfrm flipV="1">
+            <a:off x="6456000" y="2528525"/>
+            <a:ext cx="720000" cy="540475"/>
+          </a:xfrm>
+          <a:prstGeom prst="line">
+            <a:avLst/>
+          </a:prstGeom>
+          <a:ln>
+            <a:solidFill>
+              <a:schemeClr val="tx1"/>
+            </a:solidFill>
+          </a:ln>
+        </p:spPr>
+        <p:style>
+          <a:lnRef idx="2">
+            <a:schemeClr val="accent1"/>
+          </a:lnRef>
+          <a:fillRef idx="0">
+            <a:schemeClr val="accent1"/>
+          </a:fillRef>
+          <a:effectRef idx="1">
+            <a:schemeClr val="accent1"/>
+          </a:effectRef>
+          <a:fontRef idx="minor">
+            <a:schemeClr val="tx1"/>
+          </a:fontRef>
+        </p:style>
+      </p:cxnSp>
+      <p:cxnSp>
+        <p:nvCxnSpPr>
+          <p:cNvPr id="52" name="Egyenes összekötő 51">
+            <a:extLst>
+              <a:ext uri="{FF2B5EF4-FFF2-40B4-BE49-F238E27FC236}">
+                <a16:creationId xmlns:a16="http://schemas.microsoft.com/office/drawing/2014/main" id="{96A83D4F-D56D-69E9-F14B-99C98C483E89}"/>
+              </a:ext>
+            </a:extLst>
+          </p:cNvPr>
+          <p:cNvCxnSpPr>
+            <a:cxnSpLocks/>
+            <a:stCxn id="26" idx="0"/>
+            <a:endCxn id="8" idx="4"/>
+          </p:cNvCxnSpPr>
+          <p:nvPr/>
+        </p:nvCxnSpPr>
+        <p:spPr>
+          <a:xfrm flipH="1" flipV="1">
+            <a:off x="7176000" y="2528525"/>
+            <a:ext cx="720000" cy="540475"/>
+          </a:xfrm>
+          <a:prstGeom prst="line">
+            <a:avLst/>
+          </a:prstGeom>
+          <a:ln>
+            <a:solidFill>
+              <a:schemeClr val="tx1"/>
+            </a:solidFill>
+          </a:ln>
+        </p:spPr>
+        <p:style>
+          <a:lnRef idx="2">
+            <a:schemeClr val="accent1"/>
+          </a:lnRef>
+          <a:fillRef idx="0">
+            <a:schemeClr val="accent1"/>
+          </a:fillRef>
+          <a:effectRef idx="1">
+            <a:schemeClr val="accent1"/>
+          </a:effectRef>
+          <a:fontRef idx="minor">
+            <a:schemeClr val="tx1"/>
+          </a:fontRef>
+        </p:style>
+      </p:cxnSp>
+      <p:cxnSp>
+        <p:nvCxnSpPr>
+          <p:cNvPr id="55" name="Egyenes összekötő 54">
+            <a:extLst>
+              <a:ext uri="{FF2B5EF4-FFF2-40B4-BE49-F238E27FC236}">
+                <a16:creationId xmlns:a16="http://schemas.microsoft.com/office/drawing/2014/main" id="{43DB19B9-F48D-4C08-78CE-6F2D6C360B15}"/>
+              </a:ext>
+            </a:extLst>
+          </p:cNvPr>
+          <p:cNvCxnSpPr>
+            <a:cxnSpLocks/>
+            <a:stCxn id="26" idx="4"/>
+            <a:endCxn id="30" idx="0"/>
+          </p:cNvCxnSpPr>
+          <p:nvPr/>
+        </p:nvCxnSpPr>
+        <p:spPr>
+          <a:xfrm flipH="1">
+            <a:off x="7324107" y="3789000"/>
+            <a:ext cx="571893" cy="540475"/>
+          </a:xfrm>
+          <a:prstGeom prst="line">
+            <a:avLst/>
+          </a:prstGeom>
+          <a:ln>
+            <a:solidFill>
+              <a:schemeClr val="tx1"/>
+            </a:solidFill>
+          </a:ln>
+        </p:spPr>
+        <p:style>
+          <a:lnRef idx="2">
+            <a:schemeClr val="accent1"/>
+          </a:lnRef>
+          <a:fillRef idx="0">
+            <a:schemeClr val="accent1"/>
+          </a:fillRef>
+          <a:effectRef idx="1">
+            <a:schemeClr val="accent1"/>
+          </a:effectRef>
+          <a:fontRef idx="minor">
+            <a:schemeClr val="tx1"/>
+          </a:fontRef>
+        </p:style>
+      </p:cxnSp>
+      <p:cxnSp>
+        <p:nvCxnSpPr>
+          <p:cNvPr id="58" name="Egyenes összekötő 57">
+            <a:extLst>
+              <a:ext uri="{FF2B5EF4-FFF2-40B4-BE49-F238E27FC236}">
+                <a16:creationId xmlns:a16="http://schemas.microsoft.com/office/drawing/2014/main" id="{57C2453E-0F80-5B8E-49B9-B4DBC3D753D2}"/>
+              </a:ext>
+            </a:extLst>
+          </p:cNvPr>
+          <p:cNvCxnSpPr>
+            <a:cxnSpLocks/>
+            <a:stCxn id="26" idx="4"/>
+            <a:endCxn id="31" idx="0"/>
+          </p:cNvCxnSpPr>
+          <p:nvPr/>
+        </p:nvCxnSpPr>
+        <p:spPr>
+          <a:xfrm>
+            <a:off x="7896000" y="3789000"/>
+            <a:ext cx="571893" cy="540475"/>
+          </a:xfrm>
+          <a:prstGeom prst="line">
+            <a:avLst/>
+          </a:prstGeom>
+          <a:ln>
+            <a:solidFill>
+              <a:schemeClr val="tx1"/>
+            </a:solidFill>
+          </a:ln>
+        </p:spPr>
+        <p:style>
+          <a:lnRef idx="2">
+            <a:schemeClr val="accent1"/>
+          </a:lnRef>
+          <a:fillRef idx="0">
+            <a:schemeClr val="accent1"/>
+          </a:fillRef>
+          <a:effectRef idx="1">
+            <a:schemeClr val="accent1"/>
+          </a:effectRef>
+          <a:fontRef idx="minor">
+            <a:schemeClr val="tx1"/>
+          </a:fontRef>
+        </p:style>
+      </p:cxnSp>
+    </p:spTree>
+    <p:extLst>
+      <p:ext uri="{BB962C8B-B14F-4D97-AF65-F5344CB8AC3E}">
+        <p14:creationId xmlns:p14="http://schemas.microsoft.com/office/powerpoint/2010/main" val="2312608206"/>
+      </p:ext>
+    </p:extLst>
+  </p:cSld>
+  <p:clrMapOvr>
+    <a:masterClrMapping/>
+  </p:clrMapOvr>
+</p:sld>
+</file>
+
+<file path=ppt/slides/slide6.xml><?xml version="1.0" encoding="utf-8"?>
+<p:sld xmlns:a="http://schemas.openxmlformats.org/drawingml/2006/main" xmlns:r="http://schemas.openxmlformats.org/officeDocument/2006/relationships" xmlns:p="http://schemas.openxmlformats.org/presentationml/2006/main">
+  <p:cSld>
+    <p:spTree>
+      <p:nvGrpSpPr>
+        <p:cNvPr id="1" name="">
+          <a:extLst>
+            <a:ext uri="{FF2B5EF4-FFF2-40B4-BE49-F238E27FC236}">
+              <a16:creationId xmlns:a16="http://schemas.microsoft.com/office/drawing/2014/main" id="{73C182D5-AEFB-A765-4175-61830BBC369A}"/>
+            </a:ext>
+          </a:extLst>
+        </p:cNvPr>
+        <p:cNvGrpSpPr/>
+        <p:nvPr/>
+      </p:nvGrpSpPr>
+      <p:grpSpPr>
+        <a:xfrm>
+          <a:off x="0" y="0"/>
+          <a:ext cx="0" cy="0"/>
+          <a:chOff x="0" y="0"/>
+          <a:chExt cx="0" cy="0"/>
+        </a:xfrm>
+      </p:grpSpPr>
+      <p:grpSp>
+        <p:nvGrpSpPr>
+          <p:cNvPr id="2" name="Csoportba foglalás 1">
+            <a:extLst>
+              <a:ext uri="{FF2B5EF4-FFF2-40B4-BE49-F238E27FC236}">
+                <a16:creationId xmlns:a16="http://schemas.microsoft.com/office/drawing/2014/main" id="{DAE5EFE2-1548-6234-F417-B93B11728916}"/>
+              </a:ext>
+            </a:extLst>
+          </p:cNvPr>
+          <p:cNvGrpSpPr/>
+          <p:nvPr/>
+        </p:nvGrpSpPr>
+        <p:grpSpPr>
+          <a:xfrm>
+            <a:off x="350251" y="188050"/>
+            <a:ext cx="4536000" cy="2880000"/>
+            <a:chOff x="350251" y="188050"/>
+            <a:chExt cx="5040000" cy="3240950"/>
+          </a:xfrm>
+        </p:grpSpPr>
+        <p:sp>
+          <p:nvSpPr>
+            <p:cNvPr id="4" name="Ellipszis 3">
+              <a:extLst>
+                <a:ext uri="{FF2B5EF4-FFF2-40B4-BE49-F238E27FC236}">
+                  <a16:creationId xmlns:a16="http://schemas.microsoft.com/office/drawing/2014/main" id="{BEC9D4AC-1BAD-489B-AEAC-7009371E15AA}"/>
+                </a:ext>
+              </a:extLst>
+            </p:cNvPr>
+            <p:cNvSpPr/>
+            <p:nvPr/>
+          </p:nvSpPr>
+          <p:spPr>
+            <a:xfrm>
+              <a:off x="2510251" y="188050"/>
+              <a:ext cx="720000" cy="720000"/>
+            </a:xfrm>
+            <a:prstGeom prst="ellipse">
+              <a:avLst/>
+            </a:prstGeom>
+            <a:solidFill>
+              <a:srgbClr val="FBB753"/>
+            </a:solidFill>
+            <a:ln>
+              <a:solidFill>
+                <a:schemeClr val="tx1"/>
+              </a:solidFill>
+            </a:ln>
+          </p:spPr>
+          <p:style>
+            <a:lnRef idx="2">
+              <a:schemeClr val="accent1">
+                <a:shade val="15000"/>
+              </a:schemeClr>
+            </a:lnRef>
+            <a:fillRef idx="1">
+              <a:schemeClr val="accent1"/>
+            </a:fillRef>
+            <a:effectRef idx="0">
+              <a:schemeClr val="accent1"/>
+            </a:effectRef>
+            <a:fontRef idx="minor">
+              <a:schemeClr val="lt1"/>
+            </a:fontRef>
+          </p:style>
+          <p:txBody>
+            <a:bodyPr lIns="0" rIns="0" rtlCol="0" anchor="ctr"/>
+            <a:lstStyle/>
+            <a:p>
+              <a:pPr algn="ctr"/>
+              <a:r>
+                <a:rPr lang="hu-HU" sz="3200" dirty="0">
+                  <a:solidFill>
+                    <a:schemeClr val="tx1"/>
+                  </a:solidFill>
+                </a:rPr>
+                <a:t>+</a:t>
+              </a:r>
+            </a:p>
+          </p:txBody>
+        </p:sp>
+        <p:cxnSp>
+          <p:nvCxnSpPr>
+            <p:cNvPr id="6" name="Egyenes összekötő 5">
+              <a:extLst>
+                <a:ext uri="{FF2B5EF4-FFF2-40B4-BE49-F238E27FC236}">
+                  <a16:creationId xmlns:a16="http://schemas.microsoft.com/office/drawing/2014/main" id="{02DABC1A-27E6-61AC-03FC-19B66AC9A735}"/>
+                </a:ext>
+              </a:extLst>
+            </p:cNvPr>
+            <p:cNvCxnSpPr>
+              <a:cxnSpLocks/>
+              <a:stCxn id="4" idx="4"/>
+              <a:endCxn id="7" idx="0"/>
+            </p:cNvCxnSpPr>
+            <p:nvPr/>
+          </p:nvCxnSpPr>
+          <p:spPr>
+            <a:xfrm flipH="1">
+              <a:off x="1430251" y="908050"/>
+              <a:ext cx="1440000" cy="540475"/>
+            </a:xfrm>
+            <a:prstGeom prst="line">
+              <a:avLst/>
+            </a:prstGeom>
+            <a:ln>
+              <a:solidFill>
+                <a:schemeClr val="tx1"/>
+              </a:solidFill>
+            </a:ln>
+          </p:spPr>
+          <p:style>
+            <a:lnRef idx="2">
+              <a:schemeClr val="accent1"/>
+            </a:lnRef>
+            <a:fillRef idx="0">
+              <a:schemeClr val="accent1"/>
+            </a:fillRef>
+            <a:effectRef idx="1">
+              <a:schemeClr val="accent1"/>
+            </a:effectRef>
+            <a:fontRef idx="minor">
+              <a:schemeClr val="tx1"/>
+            </a:fontRef>
+          </p:style>
+        </p:cxnSp>
+        <p:cxnSp>
+          <p:nvCxnSpPr>
+            <p:cNvPr id="13" name="Egyenes összekötő 12">
+              <a:extLst>
+                <a:ext uri="{FF2B5EF4-FFF2-40B4-BE49-F238E27FC236}">
+                  <a16:creationId xmlns:a16="http://schemas.microsoft.com/office/drawing/2014/main" id="{CB5071F2-4F5A-3BFF-0645-DF7B1DEC13AB}"/>
+                </a:ext>
+              </a:extLst>
+            </p:cNvPr>
+            <p:cNvCxnSpPr>
+              <a:cxnSpLocks/>
+              <a:stCxn id="4" idx="4"/>
+              <a:endCxn id="8" idx="0"/>
+            </p:cNvCxnSpPr>
+            <p:nvPr/>
+          </p:nvCxnSpPr>
+          <p:spPr>
+            <a:xfrm>
+              <a:off x="2870251" y="908050"/>
+              <a:ext cx="1440000" cy="540475"/>
+            </a:xfrm>
+            <a:prstGeom prst="line">
+              <a:avLst/>
+            </a:prstGeom>
+            <a:ln>
+              <a:solidFill>
+                <a:schemeClr val="tx1"/>
+              </a:solidFill>
+            </a:ln>
+          </p:spPr>
+          <p:style>
+            <a:lnRef idx="2">
+              <a:schemeClr val="accent1"/>
+            </a:lnRef>
+            <a:fillRef idx="0">
+              <a:schemeClr val="accent1"/>
+            </a:fillRef>
+            <a:effectRef idx="1">
+              <a:schemeClr val="accent1"/>
+            </a:effectRef>
+            <a:fontRef idx="minor">
+              <a:schemeClr val="tx1"/>
+            </a:fontRef>
+          </p:style>
+        </p:cxnSp>
+        <p:sp>
+          <p:nvSpPr>
+            <p:cNvPr id="7" name="Ellipszis 6">
+              <a:extLst>
+                <a:ext uri="{FF2B5EF4-FFF2-40B4-BE49-F238E27FC236}">
+                  <a16:creationId xmlns:a16="http://schemas.microsoft.com/office/drawing/2014/main" id="{E690D685-2A8A-1EAA-A3DC-7B3A4439EBF0}"/>
+                </a:ext>
+              </a:extLst>
+            </p:cNvPr>
+            <p:cNvSpPr/>
+            <p:nvPr/>
+          </p:nvSpPr>
+          <p:spPr>
+            <a:xfrm>
+              <a:off x="1070251" y="1448525"/>
+              <a:ext cx="720000" cy="720000"/>
+            </a:xfrm>
+            <a:prstGeom prst="ellipse">
+              <a:avLst/>
+            </a:prstGeom>
+            <a:solidFill>
+              <a:srgbClr val="FBB753"/>
+            </a:solidFill>
+            <a:ln>
+              <a:solidFill>
+                <a:schemeClr val="tx1"/>
+              </a:solidFill>
+            </a:ln>
+          </p:spPr>
+          <p:style>
+            <a:lnRef idx="2">
+              <a:schemeClr val="accent1">
+                <a:shade val="15000"/>
+              </a:schemeClr>
+            </a:lnRef>
+            <a:fillRef idx="1">
+              <a:schemeClr val="accent1"/>
+            </a:fillRef>
+            <a:effectRef idx="0">
+              <a:schemeClr val="accent1"/>
+            </a:effectRef>
+            <a:fontRef idx="minor">
+              <a:schemeClr val="lt1"/>
+            </a:fontRef>
+          </p:style>
+          <p:txBody>
+            <a:bodyPr lIns="0" rIns="0" rtlCol="0" anchor="ctr"/>
+            <a:lstStyle/>
+            <a:p>
+              <a:pPr algn="ctr"/>
+              <a:r>
+                <a:rPr lang="hu-HU" sz="3200" dirty="0">
+                  <a:solidFill>
+                    <a:schemeClr val="tx1"/>
+                  </a:solidFill>
+                </a:rPr>
+                <a:t>×</a:t>
+              </a:r>
+            </a:p>
+          </p:txBody>
+        </p:sp>
+        <p:sp>
+          <p:nvSpPr>
+            <p:cNvPr id="8" name="Ellipszis 7">
+              <a:extLst>
+                <a:ext uri="{FF2B5EF4-FFF2-40B4-BE49-F238E27FC236}">
+                  <a16:creationId xmlns:a16="http://schemas.microsoft.com/office/drawing/2014/main" id="{A01401C2-4A27-2706-C255-65EE6BD9A066}"/>
+                </a:ext>
+              </a:extLst>
+            </p:cNvPr>
+            <p:cNvSpPr/>
+            <p:nvPr/>
+          </p:nvSpPr>
+          <p:spPr>
+            <a:xfrm>
+              <a:off x="3950251" y="1448525"/>
+              <a:ext cx="720000" cy="720000"/>
+            </a:xfrm>
+            <a:prstGeom prst="ellipse">
+              <a:avLst/>
+            </a:prstGeom>
+            <a:solidFill>
+              <a:srgbClr val="FBB753"/>
+            </a:solidFill>
+            <a:ln>
+              <a:solidFill>
+                <a:schemeClr val="tx1"/>
+              </a:solidFill>
+            </a:ln>
+          </p:spPr>
+          <p:style>
+            <a:lnRef idx="2">
+              <a:schemeClr val="accent1">
+                <a:shade val="15000"/>
+              </a:schemeClr>
+            </a:lnRef>
+            <a:fillRef idx="1">
+              <a:schemeClr val="accent1"/>
+            </a:fillRef>
+            <a:effectRef idx="0">
+              <a:schemeClr val="accent1"/>
+            </a:effectRef>
+            <a:fontRef idx="minor">
+              <a:schemeClr val="lt1"/>
+            </a:fontRef>
+          </p:style>
+          <p:txBody>
+            <a:bodyPr lIns="0" rIns="0" rtlCol="0" anchor="ctr"/>
+            <a:lstStyle/>
+            <a:p>
+              <a:pPr algn="ctr"/>
+              <a:r>
+                <a:rPr lang="hu-HU" sz="3200" dirty="0">
+                  <a:solidFill>
+                    <a:schemeClr val="tx1"/>
+                  </a:solidFill>
+                </a:rPr>
+                <a:t>–</a:t>
+              </a:r>
+            </a:p>
+          </p:txBody>
+        </p:sp>
+        <p:grpSp>
+          <p:nvGrpSpPr>
+            <p:cNvPr id="37" name="Csoportba foglalás 36">
+              <a:extLst>
+                <a:ext uri="{FF2B5EF4-FFF2-40B4-BE49-F238E27FC236}">
+                  <a16:creationId xmlns:a16="http://schemas.microsoft.com/office/drawing/2014/main" id="{D5CA6575-1D74-C84B-374E-82EA46CB780F}"/>
+                </a:ext>
+              </a:extLst>
+            </p:cNvPr>
+            <p:cNvGrpSpPr/>
+            <p:nvPr/>
+          </p:nvGrpSpPr>
+          <p:grpSpPr>
+            <a:xfrm>
+              <a:off x="350251" y="2709000"/>
+              <a:ext cx="5040000" cy="720000"/>
+              <a:chOff x="3576000" y="3069000"/>
+              <a:chExt cx="5040000" cy="720000"/>
+            </a:xfrm>
+            <a:solidFill>
+              <a:srgbClr val="FBB753"/>
+            </a:solidFill>
+          </p:grpSpPr>
+          <p:grpSp>
+            <p:nvGrpSpPr>
+              <p:cNvPr id="23" name="Csoportba foglalás 22">
+                <a:extLst>
+                  <a:ext uri="{FF2B5EF4-FFF2-40B4-BE49-F238E27FC236}">
+                    <a16:creationId xmlns:a16="http://schemas.microsoft.com/office/drawing/2014/main" id="{04EEF3C8-5E4E-4538-8E23-47579DF5217D}"/>
+                  </a:ext>
+                </a:extLst>
+              </p:cNvPr>
+              <p:cNvGrpSpPr/>
+              <p:nvPr/>
+            </p:nvGrpSpPr>
+            <p:grpSpPr>
+              <a:xfrm>
+                <a:off x="3576000" y="3069000"/>
+                <a:ext cx="2160000" cy="720000"/>
+                <a:chOff x="3756001" y="3069000"/>
+                <a:chExt cx="2160000" cy="720000"/>
+              </a:xfrm>
+              <a:grpFill/>
+            </p:grpSpPr>
+            <p:sp>
+              <p:nvSpPr>
+                <p:cNvPr id="20" name="Ellipszis 19">
+                  <a:extLst>
+                    <a:ext uri="{FF2B5EF4-FFF2-40B4-BE49-F238E27FC236}">
+                      <a16:creationId xmlns:a16="http://schemas.microsoft.com/office/drawing/2014/main" id="{5D4EB492-F422-10C1-9310-46A7DF2118F9}"/>
+                    </a:ext>
+                  </a:extLst>
+                </p:cNvPr>
+                <p:cNvSpPr/>
+                <p:nvPr/>
+              </p:nvSpPr>
+              <p:spPr>
+                <a:xfrm>
+                  <a:off x="3756001" y="3069000"/>
+                  <a:ext cx="720000" cy="720000"/>
+                </a:xfrm>
+                <a:prstGeom prst="ellipse">
+                  <a:avLst/>
+                </a:prstGeom>
+                <a:grpFill/>
+                <a:ln>
+                  <a:solidFill>
+                    <a:schemeClr val="tx1"/>
+                  </a:solidFill>
+                </a:ln>
+              </p:spPr>
+              <p:style>
+                <a:lnRef idx="2">
+                  <a:schemeClr val="accent1">
+                    <a:shade val="15000"/>
+                  </a:schemeClr>
+                </a:lnRef>
+                <a:fillRef idx="1">
+                  <a:schemeClr val="accent1"/>
+                </a:fillRef>
+                <a:effectRef idx="0">
+                  <a:schemeClr val="accent1"/>
+                </a:effectRef>
+                <a:fontRef idx="minor">
+                  <a:schemeClr val="lt1"/>
+                </a:fontRef>
+              </p:style>
+              <p:txBody>
+                <a:bodyPr lIns="0" rIns="0" rtlCol="0" anchor="ctr"/>
+                <a:lstStyle/>
+                <a:p>
+                  <a:pPr algn="ctr"/>
+                  <a:r>
+                    <a:rPr lang="hu-HU" sz="3200" dirty="0">
+                      <a:solidFill>
+                        <a:schemeClr val="tx1"/>
+                      </a:solidFill>
+                    </a:rPr>
+                    <a:t>3</a:t>
+                  </a:r>
+                </a:p>
+              </p:txBody>
+            </p:sp>
+            <p:sp>
+              <p:nvSpPr>
+                <p:cNvPr id="21" name="Ellipszis 20">
+                  <a:extLst>
+                    <a:ext uri="{FF2B5EF4-FFF2-40B4-BE49-F238E27FC236}">
+                      <a16:creationId xmlns:a16="http://schemas.microsoft.com/office/drawing/2014/main" id="{305FF772-8BDB-AD01-593D-121B0F2375F4}"/>
+                    </a:ext>
+                  </a:extLst>
+                </p:cNvPr>
+                <p:cNvSpPr/>
+                <p:nvPr/>
+              </p:nvSpPr>
+              <p:spPr>
+                <a:xfrm>
+                  <a:off x="5196001" y="3069000"/>
+                  <a:ext cx="720000" cy="720000"/>
+                </a:xfrm>
+                <a:prstGeom prst="ellipse">
+                  <a:avLst/>
+                </a:prstGeom>
+                <a:grpFill/>
+                <a:ln>
+                  <a:solidFill>
+                    <a:schemeClr val="tx1"/>
+                  </a:solidFill>
+                </a:ln>
+              </p:spPr>
+              <p:style>
+                <a:lnRef idx="2">
+                  <a:schemeClr val="accent1">
+                    <a:shade val="15000"/>
+                  </a:schemeClr>
+                </a:lnRef>
+                <a:fillRef idx="1">
+                  <a:schemeClr val="accent1"/>
+                </a:fillRef>
+                <a:effectRef idx="0">
+                  <a:schemeClr val="accent1"/>
+                </a:effectRef>
+                <a:fontRef idx="minor">
+                  <a:schemeClr val="lt1"/>
+                </a:fontRef>
+              </p:style>
+              <p:txBody>
+                <a:bodyPr lIns="0" rIns="0" rtlCol="0" anchor="ctr"/>
+                <a:lstStyle/>
+                <a:p>
+                  <a:pPr algn="ctr"/>
+                  <a:r>
+                    <a:rPr lang="hu-HU" sz="3200" dirty="0">
+                      <a:solidFill>
+                        <a:schemeClr val="tx1"/>
+                      </a:solidFill>
+                    </a:rPr>
+                    <a:t>4</a:t>
+                  </a:r>
+                </a:p>
+              </p:txBody>
+            </p:sp>
+          </p:grpSp>
+          <p:grpSp>
+            <p:nvGrpSpPr>
+              <p:cNvPr id="36" name="Csoportba foglalás 35">
+                <a:extLst>
+                  <a:ext uri="{FF2B5EF4-FFF2-40B4-BE49-F238E27FC236}">
+                    <a16:creationId xmlns:a16="http://schemas.microsoft.com/office/drawing/2014/main" id="{FE878442-9E35-BFCA-7298-C4CA6F2C6CE6}"/>
+                  </a:ext>
+                </a:extLst>
+              </p:cNvPr>
+              <p:cNvGrpSpPr/>
+              <p:nvPr/>
+            </p:nvGrpSpPr>
+            <p:grpSpPr>
+              <a:xfrm>
+                <a:off x="6456000" y="3069000"/>
+                <a:ext cx="2160000" cy="720000"/>
+                <a:chOff x="6276000" y="3087854"/>
+                <a:chExt cx="2160000" cy="720000"/>
+              </a:xfrm>
+              <a:grpFill/>
+            </p:grpSpPr>
+            <p:sp>
+              <p:nvSpPr>
+                <p:cNvPr id="25" name="Ellipszis 24">
+                  <a:extLst>
+                    <a:ext uri="{FF2B5EF4-FFF2-40B4-BE49-F238E27FC236}">
+                      <a16:creationId xmlns:a16="http://schemas.microsoft.com/office/drawing/2014/main" id="{6796A0A8-839C-CB84-CE4D-7A91D13E4161}"/>
+                    </a:ext>
+                  </a:extLst>
+                </p:cNvPr>
+                <p:cNvSpPr/>
+                <p:nvPr/>
+              </p:nvSpPr>
+              <p:spPr>
+                <a:xfrm>
+                  <a:off x="6276000" y="3087854"/>
+                  <a:ext cx="720000" cy="720000"/>
+                </a:xfrm>
+                <a:prstGeom prst="ellipse">
+                  <a:avLst/>
+                </a:prstGeom>
+                <a:grpFill/>
+                <a:ln>
+                  <a:solidFill>
+                    <a:schemeClr val="tx1"/>
+                  </a:solidFill>
+                </a:ln>
+              </p:spPr>
+              <p:style>
+                <a:lnRef idx="2">
+                  <a:schemeClr val="accent1">
+                    <a:shade val="15000"/>
+                  </a:schemeClr>
+                </a:lnRef>
+                <a:fillRef idx="1">
+                  <a:schemeClr val="accent1"/>
+                </a:fillRef>
+                <a:effectRef idx="0">
+                  <a:schemeClr val="accent1"/>
+                </a:effectRef>
+                <a:fontRef idx="minor">
+                  <a:schemeClr val="lt1"/>
+                </a:fontRef>
+              </p:style>
+              <p:txBody>
+                <a:bodyPr lIns="0" rIns="0" rtlCol="0" anchor="ctr"/>
+                <a:lstStyle/>
+                <a:p>
+                  <a:pPr algn="ctr"/>
+                  <a:r>
+                    <a:rPr lang="hu-HU" sz="3200" dirty="0">
+                      <a:solidFill>
+                        <a:schemeClr val="tx1"/>
+                      </a:solidFill>
+                    </a:rPr>
+                    <a:t>6</a:t>
+                  </a:r>
+                </a:p>
+              </p:txBody>
+            </p:sp>
+            <p:sp>
+              <p:nvSpPr>
+                <p:cNvPr id="26" name="Ellipszis 25">
+                  <a:extLst>
+                    <a:ext uri="{FF2B5EF4-FFF2-40B4-BE49-F238E27FC236}">
+                      <a16:creationId xmlns:a16="http://schemas.microsoft.com/office/drawing/2014/main" id="{EBA820A8-FFDC-D31C-3D5C-0CC945826C9F}"/>
+                    </a:ext>
+                  </a:extLst>
+                </p:cNvPr>
+                <p:cNvSpPr/>
+                <p:nvPr/>
+              </p:nvSpPr>
+              <p:spPr>
+                <a:xfrm>
+                  <a:off x="7716000" y="3087854"/>
+                  <a:ext cx="720000" cy="720000"/>
+                </a:xfrm>
+                <a:prstGeom prst="ellipse">
+                  <a:avLst/>
+                </a:prstGeom>
+                <a:grpFill/>
+                <a:ln>
+                  <a:solidFill>
+                    <a:schemeClr val="tx1"/>
+                  </a:solidFill>
+                </a:ln>
+              </p:spPr>
+              <p:style>
+                <a:lnRef idx="2">
+                  <a:schemeClr val="accent1">
+                    <a:shade val="15000"/>
+                  </a:schemeClr>
+                </a:lnRef>
+                <a:fillRef idx="1">
+                  <a:schemeClr val="accent1"/>
+                </a:fillRef>
+                <a:effectRef idx="0">
+                  <a:schemeClr val="accent1"/>
+                </a:effectRef>
+                <a:fontRef idx="minor">
+                  <a:schemeClr val="lt1"/>
+                </a:fontRef>
+              </p:style>
+              <p:txBody>
+                <a:bodyPr lIns="0" rIns="0" rtlCol="0" anchor="ctr"/>
+                <a:lstStyle/>
+                <a:p>
+                  <a:pPr algn="ctr"/>
+                  <a:r>
+                    <a:rPr lang="hu-HU" sz="3200" dirty="0">
+                      <a:solidFill>
+                        <a:schemeClr val="tx1"/>
+                      </a:solidFill>
+                    </a:rPr>
+                    <a:t>9</a:t>
+                  </a:r>
+                </a:p>
+              </p:txBody>
+            </p:sp>
+          </p:grpSp>
+        </p:grpSp>
+        <p:cxnSp>
+          <p:nvCxnSpPr>
+            <p:cNvPr id="43" name="Egyenes összekötő 42">
+              <a:extLst>
+                <a:ext uri="{FF2B5EF4-FFF2-40B4-BE49-F238E27FC236}">
+                  <a16:creationId xmlns:a16="http://schemas.microsoft.com/office/drawing/2014/main" id="{E6F93044-074C-2E4E-8298-EF1F6D7D2BF3}"/>
+                </a:ext>
+              </a:extLst>
+            </p:cNvPr>
+            <p:cNvCxnSpPr>
+              <a:cxnSpLocks/>
+              <a:stCxn id="20" idx="0"/>
+              <a:endCxn id="7" idx="4"/>
+            </p:cNvCxnSpPr>
+            <p:nvPr/>
+          </p:nvCxnSpPr>
+          <p:spPr>
+            <a:xfrm flipV="1">
+              <a:off x="710251" y="2168525"/>
+              <a:ext cx="720000" cy="540475"/>
+            </a:xfrm>
+            <a:prstGeom prst="line">
+              <a:avLst/>
+            </a:prstGeom>
+            <a:ln>
+              <a:solidFill>
+                <a:schemeClr val="tx1"/>
+              </a:solidFill>
+            </a:ln>
+          </p:spPr>
+          <p:style>
+            <a:lnRef idx="2">
+              <a:schemeClr val="accent1"/>
+            </a:lnRef>
+            <a:fillRef idx="0">
+              <a:schemeClr val="accent1"/>
+            </a:fillRef>
+            <a:effectRef idx="1">
+              <a:schemeClr val="accent1"/>
+            </a:effectRef>
+            <a:fontRef idx="minor">
+              <a:schemeClr val="tx1"/>
+            </a:fontRef>
+          </p:style>
+        </p:cxnSp>
+        <p:cxnSp>
+          <p:nvCxnSpPr>
+            <p:cNvPr id="46" name="Egyenes összekötő 45">
+              <a:extLst>
+                <a:ext uri="{FF2B5EF4-FFF2-40B4-BE49-F238E27FC236}">
+                  <a16:creationId xmlns:a16="http://schemas.microsoft.com/office/drawing/2014/main" id="{057F2051-EA2C-9C74-A283-25751BD05361}"/>
+                </a:ext>
+              </a:extLst>
+            </p:cNvPr>
+            <p:cNvCxnSpPr>
+              <a:cxnSpLocks/>
+              <a:stCxn id="21" idx="0"/>
+              <a:endCxn id="7" idx="4"/>
+            </p:cNvCxnSpPr>
+            <p:nvPr/>
+          </p:nvCxnSpPr>
+          <p:spPr>
+            <a:xfrm flipH="1" flipV="1">
+              <a:off x="1430251" y="2168525"/>
+              <a:ext cx="720000" cy="540475"/>
+            </a:xfrm>
+            <a:prstGeom prst="line">
+              <a:avLst/>
+            </a:prstGeom>
+            <a:ln>
+              <a:solidFill>
+                <a:schemeClr val="tx1"/>
+              </a:solidFill>
+            </a:ln>
+          </p:spPr>
+          <p:style>
+            <a:lnRef idx="2">
+              <a:schemeClr val="accent1"/>
+            </a:lnRef>
+            <a:fillRef idx="0">
+              <a:schemeClr val="accent1"/>
+            </a:fillRef>
+            <a:effectRef idx="1">
+              <a:schemeClr val="accent1"/>
+            </a:effectRef>
+            <a:fontRef idx="minor">
+              <a:schemeClr val="tx1"/>
+            </a:fontRef>
+          </p:style>
+        </p:cxnSp>
+        <p:cxnSp>
+          <p:nvCxnSpPr>
+            <p:cNvPr id="49" name="Egyenes összekötő 48">
+              <a:extLst>
+                <a:ext uri="{FF2B5EF4-FFF2-40B4-BE49-F238E27FC236}">
+                  <a16:creationId xmlns:a16="http://schemas.microsoft.com/office/drawing/2014/main" id="{38B67A71-FED0-FCCD-5B66-E18B1BA8124E}"/>
+                </a:ext>
+              </a:extLst>
+            </p:cNvPr>
+            <p:cNvCxnSpPr>
+              <a:cxnSpLocks/>
+              <a:stCxn id="25" idx="0"/>
+              <a:endCxn id="8" idx="4"/>
+            </p:cNvCxnSpPr>
+            <p:nvPr/>
+          </p:nvCxnSpPr>
+          <p:spPr>
+            <a:xfrm flipV="1">
+              <a:off x="3590251" y="2168525"/>
+              <a:ext cx="720000" cy="540475"/>
+            </a:xfrm>
+            <a:prstGeom prst="line">
+              <a:avLst/>
+            </a:prstGeom>
+            <a:ln>
+              <a:solidFill>
+                <a:schemeClr val="tx1"/>
+              </a:solidFill>
+            </a:ln>
+          </p:spPr>
+          <p:style>
+            <a:lnRef idx="2">
+              <a:schemeClr val="accent1"/>
+            </a:lnRef>
+            <a:fillRef idx="0">
+              <a:schemeClr val="accent1"/>
+            </a:fillRef>
+            <a:effectRef idx="1">
+              <a:schemeClr val="accent1"/>
+            </a:effectRef>
+            <a:fontRef idx="minor">
+              <a:schemeClr val="tx1"/>
+            </a:fontRef>
+          </p:style>
+        </p:cxnSp>
+        <p:cxnSp>
+          <p:nvCxnSpPr>
+            <p:cNvPr id="52" name="Egyenes összekötő 51">
+              <a:extLst>
+                <a:ext uri="{FF2B5EF4-FFF2-40B4-BE49-F238E27FC236}">
+                  <a16:creationId xmlns:a16="http://schemas.microsoft.com/office/drawing/2014/main" id="{0407C5FA-56D4-6F2C-6918-6EA9CD6536A7}"/>
+                </a:ext>
+              </a:extLst>
+            </p:cNvPr>
+            <p:cNvCxnSpPr>
+              <a:cxnSpLocks/>
+              <a:stCxn id="26" idx="0"/>
+              <a:endCxn id="8" idx="4"/>
+            </p:cNvCxnSpPr>
+            <p:nvPr/>
+          </p:nvCxnSpPr>
+          <p:spPr>
+            <a:xfrm flipH="1" flipV="1">
+              <a:off x="4310251" y="2168525"/>
+              <a:ext cx="720000" cy="540475"/>
+            </a:xfrm>
+            <a:prstGeom prst="line">
+              <a:avLst/>
+            </a:prstGeom>
+            <a:ln>
+              <a:solidFill>
+                <a:schemeClr val="tx1"/>
+              </a:solidFill>
+            </a:ln>
+          </p:spPr>
+          <p:style>
+            <a:lnRef idx="2">
+              <a:schemeClr val="accent1"/>
+            </a:lnRef>
+            <a:fillRef idx="0">
+              <a:schemeClr val="accent1"/>
+            </a:fillRef>
+            <a:effectRef idx="1">
+              <a:schemeClr val="accent1"/>
+            </a:effectRef>
+            <a:fontRef idx="minor">
+              <a:schemeClr val="tx1"/>
+            </a:fontRef>
+          </p:style>
+        </p:cxnSp>
+      </p:grpSp>
+      <p:grpSp>
+        <p:nvGrpSpPr>
+          <p:cNvPr id="3" name="Csoportba foglalás 2">
+            <a:extLst>
+              <a:ext uri="{FF2B5EF4-FFF2-40B4-BE49-F238E27FC236}">
+                <a16:creationId xmlns:a16="http://schemas.microsoft.com/office/drawing/2014/main" id="{13BE15B4-7943-0E8A-4036-280E48CA6149}"/>
+              </a:ext>
+            </a:extLst>
+          </p:cNvPr>
+          <p:cNvGrpSpPr/>
+          <p:nvPr/>
+        </p:nvGrpSpPr>
+        <p:grpSpPr>
+          <a:xfrm>
+            <a:off x="6096000" y="188050"/>
+            <a:ext cx="4536000" cy="2880000"/>
+            <a:chOff x="350251" y="188050"/>
+            <a:chExt cx="5040000" cy="3240950"/>
+          </a:xfrm>
+        </p:grpSpPr>
+        <p:sp>
+          <p:nvSpPr>
+            <p:cNvPr id="5" name="Ellipszis 4">
+              <a:extLst>
+                <a:ext uri="{FF2B5EF4-FFF2-40B4-BE49-F238E27FC236}">
+                  <a16:creationId xmlns:a16="http://schemas.microsoft.com/office/drawing/2014/main" id="{6B819B77-3835-AD22-E362-AB06A68179F0}"/>
+                </a:ext>
+              </a:extLst>
+            </p:cNvPr>
+            <p:cNvSpPr/>
+            <p:nvPr/>
+          </p:nvSpPr>
+          <p:spPr>
+            <a:xfrm>
+              <a:off x="2510251" y="188050"/>
+              <a:ext cx="720000" cy="720000"/>
+            </a:xfrm>
+            <a:prstGeom prst="ellipse">
+              <a:avLst/>
+            </a:prstGeom>
+            <a:solidFill>
+              <a:srgbClr val="FBB753"/>
+            </a:solidFill>
+            <a:ln>
+              <a:solidFill>
+                <a:schemeClr val="tx1"/>
+              </a:solidFill>
+            </a:ln>
+          </p:spPr>
+          <p:style>
+            <a:lnRef idx="2">
+              <a:schemeClr val="accent1">
+                <a:shade val="15000"/>
+              </a:schemeClr>
+            </a:lnRef>
+            <a:fillRef idx="1">
+              <a:schemeClr val="accent1"/>
+            </a:fillRef>
+            <a:effectRef idx="0">
+              <a:schemeClr val="accent1"/>
+            </a:effectRef>
+            <a:fontRef idx="minor">
+              <a:schemeClr val="lt1"/>
+            </a:fontRef>
+          </p:style>
+          <p:txBody>
+            <a:bodyPr lIns="0" rIns="0" rtlCol="0" anchor="ctr"/>
+            <a:lstStyle/>
+            <a:p>
+              <a:pPr algn="ctr"/>
+              <a:r>
+                <a:rPr lang="hu-HU" sz="3200" dirty="0">
+                  <a:solidFill>
+                    <a:schemeClr val="tx1"/>
+                  </a:solidFill>
+                </a:rPr>
+                <a:t>+</a:t>
+              </a:r>
+            </a:p>
+          </p:txBody>
+        </p:sp>
+        <p:cxnSp>
+          <p:nvCxnSpPr>
+            <p:cNvPr id="9" name="Egyenes összekötő 8">
+              <a:extLst>
+                <a:ext uri="{FF2B5EF4-FFF2-40B4-BE49-F238E27FC236}">
+                  <a16:creationId xmlns:a16="http://schemas.microsoft.com/office/drawing/2014/main" id="{8F87899C-7EF8-1E28-CF60-C5A0017D7AFB}"/>
+                </a:ext>
+              </a:extLst>
+            </p:cNvPr>
+            <p:cNvCxnSpPr>
+              <a:cxnSpLocks/>
+              <a:stCxn id="5" idx="4"/>
+              <a:endCxn id="11" idx="0"/>
+            </p:cNvCxnSpPr>
+            <p:nvPr/>
+          </p:nvCxnSpPr>
+          <p:spPr>
+            <a:xfrm flipH="1">
+              <a:off x="1430251" y="908050"/>
+              <a:ext cx="1440000" cy="540475"/>
+            </a:xfrm>
+            <a:prstGeom prst="line">
+              <a:avLst/>
+            </a:prstGeom>
+            <a:ln>
+              <a:solidFill>
+                <a:schemeClr val="tx1"/>
+              </a:solidFill>
+            </a:ln>
+          </p:spPr>
+          <p:style>
+            <a:lnRef idx="2">
+              <a:schemeClr val="accent1"/>
+            </a:lnRef>
+            <a:fillRef idx="0">
+              <a:schemeClr val="accent1"/>
+            </a:fillRef>
+            <a:effectRef idx="1">
+              <a:schemeClr val="accent1"/>
+            </a:effectRef>
+            <a:fontRef idx="minor">
+              <a:schemeClr val="tx1"/>
+            </a:fontRef>
+          </p:style>
+        </p:cxnSp>
+        <p:cxnSp>
+          <p:nvCxnSpPr>
+            <p:cNvPr id="10" name="Egyenes összekötő 9">
+              <a:extLst>
+                <a:ext uri="{FF2B5EF4-FFF2-40B4-BE49-F238E27FC236}">
+                  <a16:creationId xmlns:a16="http://schemas.microsoft.com/office/drawing/2014/main" id="{656B5503-21CA-FEC8-9EA5-F205F5706333}"/>
+                </a:ext>
+              </a:extLst>
+            </p:cNvPr>
+            <p:cNvCxnSpPr>
+              <a:cxnSpLocks/>
+              <a:stCxn id="5" idx="4"/>
+              <a:endCxn id="12" idx="0"/>
+            </p:cNvCxnSpPr>
+            <p:nvPr/>
+          </p:nvCxnSpPr>
+          <p:spPr>
+            <a:xfrm>
+              <a:off x="2870251" y="908050"/>
+              <a:ext cx="1440000" cy="540475"/>
+            </a:xfrm>
+            <a:prstGeom prst="line">
+              <a:avLst/>
+            </a:prstGeom>
+            <a:ln>
+              <a:solidFill>
+                <a:schemeClr val="tx1"/>
+              </a:solidFill>
+            </a:ln>
+          </p:spPr>
+          <p:style>
+            <a:lnRef idx="2">
+              <a:schemeClr val="accent1"/>
+            </a:lnRef>
+            <a:fillRef idx="0">
+              <a:schemeClr val="accent1"/>
+            </a:fillRef>
+            <a:effectRef idx="1">
+              <a:schemeClr val="accent1"/>
+            </a:effectRef>
+            <a:fontRef idx="minor">
+              <a:schemeClr val="tx1"/>
+            </a:fontRef>
+          </p:style>
+        </p:cxnSp>
+        <p:sp>
+          <p:nvSpPr>
+            <p:cNvPr id="11" name="Ellipszis 10">
+              <a:extLst>
+                <a:ext uri="{FF2B5EF4-FFF2-40B4-BE49-F238E27FC236}">
+                  <a16:creationId xmlns:a16="http://schemas.microsoft.com/office/drawing/2014/main" id="{7CC249AC-1322-DC77-4E8C-A6CDC108C23A}"/>
+                </a:ext>
+              </a:extLst>
+            </p:cNvPr>
+            <p:cNvSpPr/>
+            <p:nvPr/>
+          </p:nvSpPr>
+          <p:spPr>
+            <a:xfrm>
+              <a:off x="1070251" y="1448525"/>
+              <a:ext cx="720000" cy="720000"/>
+            </a:xfrm>
+            <a:prstGeom prst="ellipse">
+              <a:avLst/>
+            </a:prstGeom>
+            <a:solidFill>
+              <a:srgbClr val="FBB753"/>
+            </a:solidFill>
+            <a:ln>
+              <a:solidFill>
+                <a:schemeClr val="tx1"/>
+              </a:solidFill>
+            </a:ln>
+          </p:spPr>
+          <p:style>
+            <a:lnRef idx="2">
+              <a:schemeClr val="accent1">
+                <a:shade val="15000"/>
+              </a:schemeClr>
+            </a:lnRef>
+            <a:fillRef idx="1">
+              <a:schemeClr val="accent1"/>
+            </a:fillRef>
+            <a:effectRef idx="0">
+              <a:schemeClr val="accent1"/>
+            </a:effectRef>
+            <a:fontRef idx="minor">
+              <a:schemeClr val="lt1"/>
+            </a:fontRef>
+          </p:style>
+          <p:txBody>
+            <a:bodyPr lIns="0" rIns="0" rtlCol="0" anchor="ctr"/>
+            <a:lstStyle/>
+            <a:p>
+              <a:pPr algn="ctr"/>
+              <a:r>
+                <a:rPr lang="hu-HU" sz="3200" dirty="0">
+                  <a:solidFill>
+                    <a:schemeClr val="tx1"/>
+                  </a:solidFill>
+                </a:rPr>
+                <a:t>12</a:t>
+              </a:r>
+            </a:p>
+          </p:txBody>
+        </p:sp>
+        <p:sp>
+          <p:nvSpPr>
+            <p:cNvPr id="12" name="Ellipszis 11">
+              <a:extLst>
+                <a:ext uri="{FF2B5EF4-FFF2-40B4-BE49-F238E27FC236}">
+                  <a16:creationId xmlns:a16="http://schemas.microsoft.com/office/drawing/2014/main" id="{5A95EE63-C11A-651F-E88B-6176BF146C20}"/>
+                </a:ext>
+              </a:extLst>
+            </p:cNvPr>
+            <p:cNvSpPr/>
+            <p:nvPr/>
+          </p:nvSpPr>
+          <p:spPr>
+            <a:xfrm>
+              <a:off x="3950251" y="1448525"/>
+              <a:ext cx="720000" cy="720000"/>
+            </a:xfrm>
+            <a:prstGeom prst="ellipse">
+              <a:avLst/>
+            </a:prstGeom>
+            <a:solidFill>
+              <a:srgbClr val="FBB753"/>
+            </a:solidFill>
+            <a:ln>
+              <a:solidFill>
+                <a:schemeClr val="tx1"/>
+              </a:solidFill>
+            </a:ln>
+          </p:spPr>
+          <p:style>
+            <a:lnRef idx="2">
+              <a:schemeClr val="accent1">
+                <a:shade val="15000"/>
+              </a:schemeClr>
+            </a:lnRef>
+            <a:fillRef idx="1">
+              <a:schemeClr val="accent1"/>
+            </a:fillRef>
+            <a:effectRef idx="0">
+              <a:schemeClr val="accent1"/>
+            </a:effectRef>
+            <a:fontRef idx="minor">
+              <a:schemeClr val="lt1"/>
+            </a:fontRef>
+          </p:style>
+          <p:txBody>
+            <a:bodyPr lIns="0" rIns="0" rtlCol="0" anchor="ctr"/>
+            <a:lstStyle/>
+            <a:p>
+              <a:pPr algn="ctr"/>
+              <a:r>
+                <a:rPr lang="hu-HU" sz="3200" dirty="0">
+                  <a:solidFill>
+                    <a:schemeClr val="tx1"/>
+                  </a:solidFill>
+                </a:rPr>
+                <a:t>–</a:t>
+              </a:r>
+            </a:p>
+          </p:txBody>
+        </p:sp>
+        <p:grpSp>
+          <p:nvGrpSpPr>
+            <p:cNvPr id="14" name="Csoportba foglalás 13">
+              <a:extLst>
+                <a:ext uri="{FF2B5EF4-FFF2-40B4-BE49-F238E27FC236}">
+                  <a16:creationId xmlns:a16="http://schemas.microsoft.com/office/drawing/2014/main" id="{268EE617-19EB-47AA-83A9-A11E0531043A}"/>
+                </a:ext>
+              </a:extLst>
+            </p:cNvPr>
+            <p:cNvGrpSpPr/>
+            <p:nvPr/>
+          </p:nvGrpSpPr>
+          <p:grpSpPr>
+            <a:xfrm>
+              <a:off x="350251" y="2709000"/>
+              <a:ext cx="5040000" cy="720000"/>
+              <a:chOff x="3576000" y="3069000"/>
+              <a:chExt cx="5040000" cy="720000"/>
+            </a:xfrm>
+            <a:solidFill>
+              <a:srgbClr val="FBB753"/>
+            </a:solidFill>
+          </p:grpSpPr>
+          <p:grpSp>
+            <p:nvGrpSpPr>
+              <p:cNvPr id="19" name="Csoportba foglalás 18">
+                <a:extLst>
+                  <a:ext uri="{FF2B5EF4-FFF2-40B4-BE49-F238E27FC236}">
+                    <a16:creationId xmlns:a16="http://schemas.microsoft.com/office/drawing/2014/main" id="{38D90649-728E-3EE1-63F2-9DC80E0D3F74}"/>
+                  </a:ext>
+                </a:extLst>
+              </p:cNvPr>
+              <p:cNvGrpSpPr/>
+              <p:nvPr/>
+            </p:nvGrpSpPr>
+            <p:grpSpPr>
+              <a:xfrm>
+                <a:off x="3576000" y="3069000"/>
+                <a:ext cx="2160000" cy="720000"/>
+                <a:chOff x="3756001" y="3069000"/>
+                <a:chExt cx="2160000" cy="720000"/>
+              </a:xfrm>
+              <a:grpFill/>
+            </p:grpSpPr>
+            <p:sp>
+              <p:nvSpPr>
+                <p:cNvPr id="28" name="Ellipszis 27">
+                  <a:extLst>
+                    <a:ext uri="{FF2B5EF4-FFF2-40B4-BE49-F238E27FC236}">
+                      <a16:creationId xmlns:a16="http://schemas.microsoft.com/office/drawing/2014/main" id="{49C2484B-958B-C4E3-80C9-0757C3102604}"/>
+                    </a:ext>
+                  </a:extLst>
+                </p:cNvPr>
+                <p:cNvSpPr/>
+                <p:nvPr/>
+              </p:nvSpPr>
+              <p:spPr>
+                <a:xfrm>
+                  <a:off x="3756001" y="3069000"/>
+                  <a:ext cx="720000" cy="720000"/>
+                </a:xfrm>
+                <a:prstGeom prst="ellipse">
+                  <a:avLst/>
+                </a:prstGeom>
+                <a:solidFill>
+                  <a:schemeClr val="bg2">
+                    <a:lumMod val="90000"/>
+                  </a:schemeClr>
+                </a:solidFill>
+                <a:ln>
+                  <a:solidFill>
+                    <a:schemeClr val="bg2">
+                      <a:lumMod val="50000"/>
+                    </a:schemeClr>
+                  </a:solidFill>
+                </a:ln>
+              </p:spPr>
+              <p:style>
+                <a:lnRef idx="2">
+                  <a:schemeClr val="accent1">
+                    <a:shade val="15000"/>
+                  </a:schemeClr>
+                </a:lnRef>
+                <a:fillRef idx="1">
+                  <a:schemeClr val="accent1"/>
+                </a:fillRef>
+                <a:effectRef idx="0">
+                  <a:schemeClr val="accent1"/>
+                </a:effectRef>
+                <a:fontRef idx="minor">
+                  <a:schemeClr val="lt1"/>
+                </a:fontRef>
+              </p:style>
+              <p:txBody>
+                <a:bodyPr lIns="0" rIns="0" rtlCol="0" anchor="ctr"/>
+                <a:lstStyle/>
+                <a:p>
+                  <a:pPr algn="ctr"/>
+                  <a:r>
+                    <a:rPr lang="hu-HU" sz="3200" dirty="0">
+                      <a:solidFill>
+                        <a:schemeClr val="bg2">
+                          <a:lumMod val="75000"/>
+                        </a:schemeClr>
+                      </a:solidFill>
+                    </a:rPr>
+                    <a:t>3</a:t>
+                  </a:r>
+                </a:p>
+              </p:txBody>
+            </p:sp>
+            <p:sp>
+              <p:nvSpPr>
+                <p:cNvPr id="29" name="Ellipszis 28">
+                  <a:extLst>
+                    <a:ext uri="{FF2B5EF4-FFF2-40B4-BE49-F238E27FC236}">
+                      <a16:creationId xmlns:a16="http://schemas.microsoft.com/office/drawing/2014/main" id="{204A8ACA-4566-4937-C1A8-A3155AE1E465}"/>
+                    </a:ext>
+                  </a:extLst>
+                </p:cNvPr>
+                <p:cNvSpPr/>
+                <p:nvPr/>
+              </p:nvSpPr>
+              <p:spPr>
+                <a:xfrm>
+                  <a:off x="5196001" y="3069000"/>
+                  <a:ext cx="720000" cy="720000"/>
+                </a:xfrm>
+                <a:prstGeom prst="ellipse">
+                  <a:avLst/>
+                </a:prstGeom>
+                <a:solidFill>
+                  <a:schemeClr val="bg2">
+                    <a:lumMod val="90000"/>
+                  </a:schemeClr>
+                </a:solidFill>
+                <a:ln>
+                  <a:solidFill>
+                    <a:schemeClr val="bg2">
+                      <a:lumMod val="50000"/>
+                    </a:schemeClr>
+                  </a:solidFill>
+                </a:ln>
+              </p:spPr>
+              <p:style>
+                <a:lnRef idx="2">
+                  <a:schemeClr val="accent1">
+                    <a:shade val="15000"/>
+                  </a:schemeClr>
+                </a:lnRef>
+                <a:fillRef idx="1">
+                  <a:schemeClr val="accent1"/>
+                </a:fillRef>
+                <a:effectRef idx="0">
+                  <a:schemeClr val="accent1"/>
+                </a:effectRef>
+                <a:fontRef idx="minor">
+                  <a:schemeClr val="lt1"/>
+                </a:fontRef>
+              </p:style>
+              <p:txBody>
+                <a:bodyPr lIns="0" rIns="0" rtlCol="0" anchor="ctr"/>
+                <a:lstStyle/>
+                <a:p>
+                  <a:pPr algn="ctr"/>
+                  <a:r>
+                    <a:rPr lang="hu-HU" sz="3200" dirty="0">
+                      <a:solidFill>
+                        <a:schemeClr val="bg2">
+                          <a:lumMod val="75000"/>
+                        </a:schemeClr>
+                      </a:solidFill>
+                    </a:rPr>
+                    <a:t>4</a:t>
+                  </a:r>
+                </a:p>
+              </p:txBody>
+            </p:sp>
+          </p:grpSp>
+          <p:grpSp>
+            <p:nvGrpSpPr>
+              <p:cNvPr id="22" name="Csoportba foglalás 21">
+                <a:extLst>
+                  <a:ext uri="{FF2B5EF4-FFF2-40B4-BE49-F238E27FC236}">
+                    <a16:creationId xmlns:a16="http://schemas.microsoft.com/office/drawing/2014/main" id="{D9615B22-D876-C1CC-13D1-80BC34A06FE1}"/>
+                  </a:ext>
+                </a:extLst>
+              </p:cNvPr>
+              <p:cNvGrpSpPr/>
+              <p:nvPr/>
+            </p:nvGrpSpPr>
+            <p:grpSpPr>
+              <a:xfrm>
+                <a:off x="6456000" y="3069000"/>
+                <a:ext cx="2160000" cy="720000"/>
+                <a:chOff x="6276000" y="3087854"/>
+                <a:chExt cx="2160000" cy="720000"/>
+              </a:xfrm>
+              <a:grpFill/>
+            </p:grpSpPr>
+            <p:sp>
+              <p:nvSpPr>
+                <p:cNvPr id="24" name="Ellipszis 23">
+                  <a:extLst>
+                    <a:ext uri="{FF2B5EF4-FFF2-40B4-BE49-F238E27FC236}">
+                      <a16:creationId xmlns:a16="http://schemas.microsoft.com/office/drawing/2014/main" id="{5E16B085-5D1D-A799-B9EF-A319BA4A2BAC}"/>
+                    </a:ext>
+                  </a:extLst>
+                </p:cNvPr>
+                <p:cNvSpPr/>
+                <p:nvPr/>
+              </p:nvSpPr>
+              <p:spPr>
+                <a:xfrm>
+                  <a:off x="6276000" y="3087854"/>
+                  <a:ext cx="720000" cy="720000"/>
+                </a:xfrm>
+                <a:prstGeom prst="ellipse">
+                  <a:avLst/>
+                </a:prstGeom>
+                <a:grpFill/>
+                <a:ln>
+                  <a:solidFill>
+                    <a:schemeClr val="tx1"/>
+                  </a:solidFill>
+                </a:ln>
+              </p:spPr>
+              <p:style>
+                <a:lnRef idx="2">
+                  <a:schemeClr val="accent1">
+                    <a:shade val="15000"/>
+                  </a:schemeClr>
+                </a:lnRef>
+                <a:fillRef idx="1">
+                  <a:schemeClr val="accent1"/>
+                </a:fillRef>
+                <a:effectRef idx="0">
+                  <a:schemeClr val="accent1"/>
+                </a:effectRef>
+                <a:fontRef idx="minor">
+                  <a:schemeClr val="lt1"/>
+                </a:fontRef>
+              </p:style>
+              <p:txBody>
+                <a:bodyPr lIns="0" rIns="0" rtlCol="0" anchor="ctr"/>
+                <a:lstStyle/>
+                <a:p>
+                  <a:pPr algn="ctr"/>
+                  <a:r>
+                    <a:rPr lang="hu-HU" sz="3200" dirty="0">
+                      <a:solidFill>
+                        <a:schemeClr val="tx1"/>
+                      </a:solidFill>
+                    </a:rPr>
+                    <a:t>6</a:t>
+                  </a:r>
+                </a:p>
+              </p:txBody>
+            </p:sp>
+            <p:sp>
+              <p:nvSpPr>
+                <p:cNvPr id="27" name="Ellipszis 26">
+                  <a:extLst>
+                    <a:ext uri="{FF2B5EF4-FFF2-40B4-BE49-F238E27FC236}">
+                      <a16:creationId xmlns:a16="http://schemas.microsoft.com/office/drawing/2014/main" id="{292A56A8-91D1-0605-F1EE-BB4C73D298E3}"/>
+                    </a:ext>
+                  </a:extLst>
+                </p:cNvPr>
+                <p:cNvSpPr/>
+                <p:nvPr/>
+              </p:nvSpPr>
+              <p:spPr>
+                <a:xfrm>
+                  <a:off x="7716000" y="3087854"/>
+                  <a:ext cx="720000" cy="720000"/>
+                </a:xfrm>
+                <a:prstGeom prst="ellipse">
+                  <a:avLst/>
+                </a:prstGeom>
+                <a:grpFill/>
+                <a:ln>
+                  <a:solidFill>
+                    <a:schemeClr val="tx1"/>
+                  </a:solidFill>
+                </a:ln>
+              </p:spPr>
+              <p:style>
+                <a:lnRef idx="2">
+                  <a:schemeClr val="accent1">
+                    <a:shade val="15000"/>
+                  </a:schemeClr>
+                </a:lnRef>
+                <a:fillRef idx="1">
+                  <a:schemeClr val="accent1"/>
+                </a:fillRef>
+                <a:effectRef idx="0">
+                  <a:schemeClr val="accent1"/>
+                </a:effectRef>
+                <a:fontRef idx="minor">
+                  <a:schemeClr val="lt1"/>
+                </a:fontRef>
+              </p:style>
+              <p:txBody>
+                <a:bodyPr lIns="0" rIns="0" rtlCol="0" anchor="ctr"/>
+                <a:lstStyle/>
+                <a:p>
+                  <a:pPr algn="ctr"/>
+                  <a:r>
+                    <a:rPr lang="hu-HU" sz="3200" dirty="0">
+                      <a:solidFill>
+                        <a:schemeClr val="tx1"/>
+                      </a:solidFill>
+                    </a:rPr>
+                    <a:t>9</a:t>
+                  </a:r>
+                </a:p>
+              </p:txBody>
+            </p:sp>
+          </p:grpSp>
+        </p:grpSp>
+        <p:cxnSp>
+          <p:nvCxnSpPr>
+            <p:cNvPr id="15" name="Egyenes összekötő 14">
+              <a:extLst>
+                <a:ext uri="{FF2B5EF4-FFF2-40B4-BE49-F238E27FC236}">
+                  <a16:creationId xmlns:a16="http://schemas.microsoft.com/office/drawing/2014/main" id="{9C83D850-B93E-256B-F714-9E0C8563EE11}"/>
+                </a:ext>
+              </a:extLst>
+            </p:cNvPr>
+            <p:cNvCxnSpPr>
+              <a:cxnSpLocks/>
+              <a:stCxn id="28" idx="0"/>
+              <a:endCxn id="11" idx="4"/>
+            </p:cNvCxnSpPr>
+            <p:nvPr/>
+          </p:nvCxnSpPr>
+          <p:spPr>
+            <a:xfrm flipV="1">
+              <a:off x="710251" y="2168525"/>
+              <a:ext cx="720000" cy="540475"/>
+            </a:xfrm>
+            <a:prstGeom prst="line">
+              <a:avLst/>
+            </a:prstGeom>
+            <a:ln>
+              <a:solidFill>
+                <a:schemeClr val="bg2">
+                  <a:lumMod val="50000"/>
+                </a:schemeClr>
+              </a:solidFill>
+            </a:ln>
+          </p:spPr>
+          <p:style>
+            <a:lnRef idx="2">
+              <a:schemeClr val="accent1"/>
+            </a:lnRef>
+            <a:fillRef idx="0">
+              <a:schemeClr val="accent1"/>
+            </a:fillRef>
+            <a:effectRef idx="1">
+              <a:schemeClr val="accent1"/>
+            </a:effectRef>
+            <a:fontRef idx="minor">
+              <a:schemeClr val="tx1"/>
+            </a:fontRef>
+          </p:style>
+        </p:cxnSp>
+        <p:cxnSp>
+          <p:nvCxnSpPr>
+            <p:cNvPr id="16" name="Egyenes összekötő 15">
+              <a:extLst>
+                <a:ext uri="{FF2B5EF4-FFF2-40B4-BE49-F238E27FC236}">
+                  <a16:creationId xmlns:a16="http://schemas.microsoft.com/office/drawing/2014/main" id="{F44E476A-0A6C-0DAC-F8C9-78AD2E2C1D0A}"/>
+                </a:ext>
+              </a:extLst>
+            </p:cNvPr>
+            <p:cNvCxnSpPr>
+              <a:cxnSpLocks/>
+              <a:stCxn id="29" idx="0"/>
+              <a:endCxn id="11" idx="4"/>
+            </p:cNvCxnSpPr>
+            <p:nvPr/>
+          </p:nvCxnSpPr>
+          <p:spPr>
+            <a:xfrm flipH="1" flipV="1">
+              <a:off x="1430251" y="2168525"/>
+              <a:ext cx="720000" cy="540475"/>
+            </a:xfrm>
+            <a:prstGeom prst="line">
+              <a:avLst/>
+            </a:prstGeom>
+            <a:ln>
+              <a:solidFill>
+                <a:schemeClr val="bg2">
+                  <a:lumMod val="50000"/>
+                </a:schemeClr>
+              </a:solidFill>
+            </a:ln>
+          </p:spPr>
+          <p:style>
+            <a:lnRef idx="2">
+              <a:schemeClr val="accent1"/>
+            </a:lnRef>
+            <a:fillRef idx="0">
+              <a:schemeClr val="accent1"/>
+            </a:fillRef>
+            <a:effectRef idx="1">
+              <a:schemeClr val="accent1"/>
+            </a:effectRef>
+            <a:fontRef idx="minor">
+              <a:schemeClr val="tx1"/>
+            </a:fontRef>
+          </p:style>
+        </p:cxnSp>
+        <p:cxnSp>
+          <p:nvCxnSpPr>
+            <p:cNvPr id="17" name="Egyenes összekötő 16">
+              <a:extLst>
+                <a:ext uri="{FF2B5EF4-FFF2-40B4-BE49-F238E27FC236}">
+                  <a16:creationId xmlns:a16="http://schemas.microsoft.com/office/drawing/2014/main" id="{F75A5074-37C8-F85B-F3BC-7B2DC1D61EB0}"/>
+                </a:ext>
+              </a:extLst>
+            </p:cNvPr>
+            <p:cNvCxnSpPr>
+              <a:cxnSpLocks/>
+              <a:stCxn id="24" idx="0"/>
+              <a:endCxn id="12" idx="4"/>
+            </p:cNvCxnSpPr>
+            <p:nvPr/>
+          </p:nvCxnSpPr>
+          <p:spPr>
+            <a:xfrm flipV="1">
+              <a:off x="3590251" y="2168525"/>
+              <a:ext cx="720000" cy="540475"/>
+            </a:xfrm>
+            <a:prstGeom prst="line">
+              <a:avLst/>
+            </a:prstGeom>
+            <a:ln>
+              <a:solidFill>
+                <a:schemeClr val="tx1"/>
+              </a:solidFill>
+            </a:ln>
+          </p:spPr>
+          <p:style>
+            <a:lnRef idx="2">
+              <a:schemeClr val="accent1"/>
+            </a:lnRef>
+            <a:fillRef idx="0">
+              <a:schemeClr val="accent1"/>
+            </a:fillRef>
+            <a:effectRef idx="1">
+              <a:schemeClr val="accent1"/>
+            </a:effectRef>
+            <a:fontRef idx="minor">
+              <a:schemeClr val="tx1"/>
+            </a:fontRef>
+          </p:style>
+        </p:cxnSp>
+        <p:cxnSp>
+          <p:nvCxnSpPr>
+            <p:cNvPr id="18" name="Egyenes összekötő 17">
+              <a:extLst>
+                <a:ext uri="{FF2B5EF4-FFF2-40B4-BE49-F238E27FC236}">
+                  <a16:creationId xmlns:a16="http://schemas.microsoft.com/office/drawing/2014/main" id="{AA13EECB-6BDA-84A6-5EF7-90D95BA2B66C}"/>
+                </a:ext>
+              </a:extLst>
+            </p:cNvPr>
+            <p:cNvCxnSpPr>
+              <a:cxnSpLocks/>
+              <a:stCxn id="27" idx="0"/>
+              <a:endCxn id="12" idx="4"/>
+            </p:cNvCxnSpPr>
+            <p:nvPr/>
+          </p:nvCxnSpPr>
+          <p:spPr>
+            <a:xfrm flipH="1" flipV="1">
+              <a:off x="4310251" y="2168525"/>
+              <a:ext cx="720000" cy="540475"/>
+            </a:xfrm>
+            <a:prstGeom prst="line">
+              <a:avLst/>
+            </a:prstGeom>
+            <a:ln>
+              <a:solidFill>
+                <a:schemeClr val="tx1"/>
+              </a:solidFill>
+            </a:ln>
+          </p:spPr>
+          <p:style>
+            <a:lnRef idx="2">
+              <a:schemeClr val="accent1"/>
+            </a:lnRef>
+            <a:fillRef idx="0">
+              <a:schemeClr val="accent1"/>
+            </a:fillRef>
+            <a:effectRef idx="1">
+              <a:schemeClr val="accent1"/>
+            </a:effectRef>
+            <a:fontRef idx="minor">
+              <a:schemeClr val="tx1"/>
+            </a:fontRef>
+          </p:style>
+        </p:cxnSp>
+      </p:grpSp>
+      <p:grpSp>
+        <p:nvGrpSpPr>
+          <p:cNvPr id="59" name="Csoportba foglalás 58">
+            <a:extLst>
+              <a:ext uri="{FF2B5EF4-FFF2-40B4-BE49-F238E27FC236}">
+                <a16:creationId xmlns:a16="http://schemas.microsoft.com/office/drawing/2014/main" id="{D1CCC809-61AC-F1D9-0AF1-29888B80FC5C}"/>
+              </a:ext>
+            </a:extLst>
+          </p:cNvPr>
+          <p:cNvGrpSpPr/>
+          <p:nvPr/>
+        </p:nvGrpSpPr>
+        <p:grpSpPr>
+          <a:xfrm>
+            <a:off x="350251" y="3429000"/>
+            <a:ext cx="4536000" cy="2880000"/>
+            <a:chOff x="350251" y="188050"/>
+            <a:chExt cx="5040000" cy="3240950"/>
+          </a:xfrm>
+        </p:grpSpPr>
+        <p:sp>
+          <p:nvSpPr>
+            <p:cNvPr id="60" name="Ellipszis 59">
+              <a:extLst>
+                <a:ext uri="{FF2B5EF4-FFF2-40B4-BE49-F238E27FC236}">
+                  <a16:creationId xmlns:a16="http://schemas.microsoft.com/office/drawing/2014/main" id="{942DEDF2-1A03-F896-2217-1E0E90CB4311}"/>
+                </a:ext>
+              </a:extLst>
+            </p:cNvPr>
+            <p:cNvSpPr/>
+            <p:nvPr/>
+          </p:nvSpPr>
+          <p:spPr>
+            <a:xfrm>
+              <a:off x="2510251" y="188050"/>
+              <a:ext cx="720000" cy="720000"/>
+            </a:xfrm>
+            <a:prstGeom prst="ellipse">
+              <a:avLst/>
+            </a:prstGeom>
+            <a:solidFill>
+              <a:srgbClr val="FBB753"/>
+            </a:solidFill>
+            <a:ln>
+              <a:solidFill>
+                <a:schemeClr val="tx1"/>
+              </a:solidFill>
+            </a:ln>
+          </p:spPr>
+          <p:style>
+            <a:lnRef idx="2">
+              <a:schemeClr val="accent1">
+                <a:shade val="15000"/>
+              </a:schemeClr>
+            </a:lnRef>
+            <a:fillRef idx="1">
+              <a:schemeClr val="accent1"/>
+            </a:fillRef>
+            <a:effectRef idx="0">
+              <a:schemeClr val="accent1"/>
+            </a:effectRef>
+            <a:fontRef idx="minor">
+              <a:schemeClr val="lt1"/>
+            </a:fontRef>
+          </p:style>
+          <p:txBody>
+            <a:bodyPr lIns="0" rIns="0" rtlCol="0" anchor="ctr"/>
+            <a:lstStyle/>
+            <a:p>
+              <a:pPr algn="ctr"/>
+              <a:r>
+                <a:rPr lang="hu-HU" sz="3200" dirty="0">
+                  <a:solidFill>
+                    <a:schemeClr val="tx1"/>
+                  </a:solidFill>
+                </a:rPr>
+                <a:t>+</a:t>
+              </a:r>
+            </a:p>
+          </p:txBody>
+        </p:sp>
+        <p:cxnSp>
+          <p:nvCxnSpPr>
+            <p:cNvPr id="61" name="Egyenes összekötő 60">
+              <a:extLst>
+                <a:ext uri="{FF2B5EF4-FFF2-40B4-BE49-F238E27FC236}">
+                  <a16:creationId xmlns:a16="http://schemas.microsoft.com/office/drawing/2014/main" id="{5538B195-0ECC-067C-A3A4-953930A896C9}"/>
+                </a:ext>
+              </a:extLst>
+            </p:cNvPr>
+            <p:cNvCxnSpPr>
+              <a:cxnSpLocks/>
+              <a:stCxn id="60" idx="4"/>
+              <a:endCxn id="63" idx="0"/>
+            </p:cNvCxnSpPr>
+            <p:nvPr/>
+          </p:nvCxnSpPr>
+          <p:spPr>
+            <a:xfrm flipH="1">
+              <a:off x="1430251" y="908050"/>
+              <a:ext cx="1440000" cy="540475"/>
+            </a:xfrm>
+            <a:prstGeom prst="line">
+              <a:avLst/>
+            </a:prstGeom>
+            <a:ln>
+              <a:solidFill>
+                <a:schemeClr val="tx1"/>
+              </a:solidFill>
+            </a:ln>
+          </p:spPr>
+          <p:style>
+            <a:lnRef idx="2">
+              <a:schemeClr val="accent1"/>
+            </a:lnRef>
+            <a:fillRef idx="0">
+              <a:schemeClr val="accent1"/>
+            </a:fillRef>
+            <a:effectRef idx="1">
+              <a:schemeClr val="accent1"/>
+            </a:effectRef>
+            <a:fontRef idx="minor">
+              <a:schemeClr val="tx1"/>
+            </a:fontRef>
+          </p:style>
+        </p:cxnSp>
+        <p:cxnSp>
+          <p:nvCxnSpPr>
+            <p:cNvPr id="62" name="Egyenes összekötő 61">
+              <a:extLst>
+                <a:ext uri="{FF2B5EF4-FFF2-40B4-BE49-F238E27FC236}">
+                  <a16:creationId xmlns:a16="http://schemas.microsoft.com/office/drawing/2014/main" id="{C59F4EAF-CA13-47CA-FA22-10E26C2FAB67}"/>
+                </a:ext>
+              </a:extLst>
+            </p:cNvPr>
+            <p:cNvCxnSpPr>
+              <a:cxnSpLocks/>
+              <a:stCxn id="60" idx="4"/>
+              <a:endCxn id="64" idx="0"/>
+            </p:cNvCxnSpPr>
+            <p:nvPr/>
+          </p:nvCxnSpPr>
+          <p:spPr>
+            <a:xfrm>
+              <a:off x="2870251" y="908050"/>
+              <a:ext cx="1440000" cy="540475"/>
+            </a:xfrm>
+            <a:prstGeom prst="line">
+              <a:avLst/>
+            </a:prstGeom>
+            <a:ln>
+              <a:solidFill>
+                <a:schemeClr val="tx1"/>
+              </a:solidFill>
+            </a:ln>
+          </p:spPr>
+          <p:style>
+            <a:lnRef idx="2">
+              <a:schemeClr val="accent1"/>
+            </a:lnRef>
+            <a:fillRef idx="0">
+              <a:schemeClr val="accent1"/>
+            </a:fillRef>
+            <a:effectRef idx="1">
+              <a:schemeClr val="accent1"/>
+            </a:effectRef>
+            <a:fontRef idx="minor">
+              <a:schemeClr val="tx1"/>
+            </a:fontRef>
+          </p:style>
+        </p:cxnSp>
+        <p:sp>
+          <p:nvSpPr>
+            <p:cNvPr id="63" name="Ellipszis 62">
+              <a:extLst>
+                <a:ext uri="{FF2B5EF4-FFF2-40B4-BE49-F238E27FC236}">
+                  <a16:creationId xmlns:a16="http://schemas.microsoft.com/office/drawing/2014/main" id="{832BBE24-CFAE-FFC7-F9CD-CC45CB328E48}"/>
+                </a:ext>
+              </a:extLst>
+            </p:cNvPr>
+            <p:cNvSpPr/>
+            <p:nvPr/>
+          </p:nvSpPr>
+          <p:spPr>
+            <a:xfrm>
+              <a:off x="1070251" y="1448525"/>
+              <a:ext cx="720000" cy="720000"/>
+            </a:xfrm>
+            <a:prstGeom prst="ellipse">
+              <a:avLst/>
+            </a:prstGeom>
+            <a:solidFill>
+              <a:srgbClr val="FBB753"/>
+            </a:solidFill>
+            <a:ln>
+              <a:solidFill>
+                <a:schemeClr val="tx1"/>
+              </a:solidFill>
+            </a:ln>
+          </p:spPr>
+          <p:style>
+            <a:lnRef idx="2">
+              <a:schemeClr val="accent1">
+                <a:shade val="15000"/>
+              </a:schemeClr>
+            </a:lnRef>
+            <a:fillRef idx="1">
+              <a:schemeClr val="accent1"/>
+            </a:fillRef>
+            <a:effectRef idx="0">
+              <a:schemeClr val="accent1"/>
+            </a:effectRef>
+            <a:fontRef idx="minor">
+              <a:schemeClr val="lt1"/>
+            </a:fontRef>
+          </p:style>
+          <p:txBody>
+            <a:bodyPr lIns="0" rIns="0" rtlCol="0" anchor="ctr"/>
+            <a:lstStyle/>
+            <a:p>
+              <a:pPr algn="ctr"/>
+              <a:r>
+                <a:rPr lang="hu-HU" sz="3200" dirty="0">
+                  <a:solidFill>
+                    <a:schemeClr val="tx1"/>
+                  </a:solidFill>
+                </a:rPr>
+                <a:t>12</a:t>
+              </a:r>
+            </a:p>
+          </p:txBody>
+        </p:sp>
+        <p:sp>
+          <p:nvSpPr>
+            <p:cNvPr id="64" name="Ellipszis 63">
+              <a:extLst>
+                <a:ext uri="{FF2B5EF4-FFF2-40B4-BE49-F238E27FC236}">
+                  <a16:creationId xmlns:a16="http://schemas.microsoft.com/office/drawing/2014/main" id="{5B575C9C-B25D-44F4-A5F5-867A8DFD69A6}"/>
+                </a:ext>
+              </a:extLst>
+            </p:cNvPr>
+            <p:cNvSpPr/>
+            <p:nvPr/>
+          </p:nvSpPr>
+          <p:spPr>
+            <a:xfrm>
+              <a:off x="3950251" y="1448525"/>
+              <a:ext cx="720000" cy="720000"/>
+            </a:xfrm>
+            <a:prstGeom prst="ellipse">
+              <a:avLst/>
+            </a:prstGeom>
+            <a:solidFill>
+              <a:srgbClr val="FBB753"/>
+            </a:solidFill>
+            <a:ln>
+              <a:solidFill>
+                <a:schemeClr val="tx1"/>
+              </a:solidFill>
+            </a:ln>
+          </p:spPr>
+          <p:style>
+            <a:lnRef idx="2">
+              <a:schemeClr val="accent1">
+                <a:shade val="15000"/>
+              </a:schemeClr>
+            </a:lnRef>
+            <a:fillRef idx="1">
+              <a:schemeClr val="accent1"/>
+            </a:fillRef>
+            <a:effectRef idx="0">
+              <a:schemeClr val="accent1"/>
+            </a:effectRef>
+            <a:fontRef idx="minor">
+              <a:schemeClr val="lt1"/>
+            </a:fontRef>
+          </p:style>
+          <p:txBody>
+            <a:bodyPr lIns="0" rIns="0" rtlCol="0" anchor="ctr"/>
+            <a:lstStyle/>
+            <a:p>
+              <a:pPr algn="ctr"/>
+              <a:r>
+                <a:rPr lang="hu-HU" sz="3200" dirty="0">
+                  <a:solidFill>
+                    <a:schemeClr val="tx1"/>
+                  </a:solidFill>
+                </a:rPr>
+                <a:t>-3</a:t>
+              </a:r>
+            </a:p>
+          </p:txBody>
+        </p:sp>
+        <p:grpSp>
+          <p:nvGrpSpPr>
+            <p:cNvPr id="65" name="Csoportba foglalás 64">
+              <a:extLst>
+                <a:ext uri="{FF2B5EF4-FFF2-40B4-BE49-F238E27FC236}">
+                  <a16:creationId xmlns:a16="http://schemas.microsoft.com/office/drawing/2014/main" id="{99164A0D-3FBF-2AD9-3C94-98DD36E87D1A}"/>
+                </a:ext>
+              </a:extLst>
+            </p:cNvPr>
+            <p:cNvGrpSpPr/>
+            <p:nvPr/>
+          </p:nvGrpSpPr>
+          <p:grpSpPr>
+            <a:xfrm>
+              <a:off x="350251" y="2709000"/>
+              <a:ext cx="5040000" cy="720000"/>
+              <a:chOff x="3576000" y="3069000"/>
+              <a:chExt cx="5040000" cy="720000"/>
+            </a:xfrm>
+            <a:solidFill>
+              <a:srgbClr val="FBB753"/>
+            </a:solidFill>
+          </p:grpSpPr>
+          <p:grpSp>
+            <p:nvGrpSpPr>
+              <p:cNvPr id="70" name="Csoportba foglalás 69">
+                <a:extLst>
+                  <a:ext uri="{FF2B5EF4-FFF2-40B4-BE49-F238E27FC236}">
+                    <a16:creationId xmlns:a16="http://schemas.microsoft.com/office/drawing/2014/main" id="{8F6AD8F4-F5FB-B77D-5E98-6E5D7031944E}"/>
+                  </a:ext>
+                </a:extLst>
+              </p:cNvPr>
+              <p:cNvGrpSpPr/>
+              <p:nvPr/>
+            </p:nvGrpSpPr>
+            <p:grpSpPr>
+              <a:xfrm>
+                <a:off x="3576000" y="3069000"/>
+                <a:ext cx="2160000" cy="720000"/>
+                <a:chOff x="3756001" y="3069000"/>
+                <a:chExt cx="2160000" cy="720000"/>
+              </a:xfrm>
+              <a:grpFill/>
+            </p:grpSpPr>
+            <p:sp>
+              <p:nvSpPr>
+                <p:cNvPr id="74" name="Ellipszis 73">
+                  <a:extLst>
+                    <a:ext uri="{FF2B5EF4-FFF2-40B4-BE49-F238E27FC236}">
+                      <a16:creationId xmlns:a16="http://schemas.microsoft.com/office/drawing/2014/main" id="{72DFB6C0-9B94-84E6-17C5-B6299D70F6E0}"/>
+                    </a:ext>
+                  </a:extLst>
+                </p:cNvPr>
+                <p:cNvSpPr/>
+                <p:nvPr/>
+              </p:nvSpPr>
+              <p:spPr>
+                <a:xfrm>
+                  <a:off x="3756001" y="3069000"/>
+                  <a:ext cx="720000" cy="720000"/>
+                </a:xfrm>
+                <a:prstGeom prst="ellipse">
+                  <a:avLst/>
+                </a:prstGeom>
+                <a:solidFill>
+                  <a:schemeClr val="bg2">
+                    <a:lumMod val="90000"/>
+                  </a:schemeClr>
+                </a:solidFill>
+                <a:ln>
+                  <a:solidFill>
+                    <a:schemeClr val="bg2">
+                      <a:lumMod val="50000"/>
+                    </a:schemeClr>
+                  </a:solidFill>
+                </a:ln>
+              </p:spPr>
+              <p:style>
+                <a:lnRef idx="2">
+                  <a:schemeClr val="accent1">
+                    <a:shade val="15000"/>
+                  </a:schemeClr>
+                </a:lnRef>
+                <a:fillRef idx="1">
+                  <a:schemeClr val="accent1"/>
+                </a:fillRef>
+                <a:effectRef idx="0">
+                  <a:schemeClr val="accent1"/>
+                </a:effectRef>
+                <a:fontRef idx="minor">
+                  <a:schemeClr val="lt1"/>
+                </a:fontRef>
+              </p:style>
+              <p:txBody>
+                <a:bodyPr lIns="0" rIns="0" rtlCol="0" anchor="ctr"/>
+                <a:lstStyle/>
+                <a:p>
+                  <a:pPr algn="ctr"/>
+                  <a:r>
+                    <a:rPr lang="hu-HU" sz="3200" dirty="0">
+                      <a:solidFill>
+                        <a:schemeClr val="bg2">
+                          <a:lumMod val="75000"/>
+                        </a:schemeClr>
+                      </a:solidFill>
+                    </a:rPr>
+                    <a:t>3</a:t>
+                  </a:r>
+                </a:p>
+              </p:txBody>
+            </p:sp>
+            <p:sp>
+              <p:nvSpPr>
+                <p:cNvPr id="75" name="Ellipszis 74">
+                  <a:extLst>
+                    <a:ext uri="{FF2B5EF4-FFF2-40B4-BE49-F238E27FC236}">
+                      <a16:creationId xmlns:a16="http://schemas.microsoft.com/office/drawing/2014/main" id="{B95840E3-8F4F-D2F7-CEDB-CEBD7C07163D}"/>
+                    </a:ext>
+                  </a:extLst>
+                </p:cNvPr>
+                <p:cNvSpPr/>
+                <p:nvPr/>
+              </p:nvSpPr>
+              <p:spPr>
+                <a:xfrm>
+                  <a:off x="5196001" y="3069000"/>
+                  <a:ext cx="720000" cy="720000"/>
+                </a:xfrm>
+                <a:prstGeom prst="ellipse">
+                  <a:avLst/>
+                </a:prstGeom>
+                <a:solidFill>
+                  <a:schemeClr val="bg2">
+                    <a:lumMod val="90000"/>
+                  </a:schemeClr>
+                </a:solidFill>
+                <a:ln>
+                  <a:solidFill>
+                    <a:schemeClr val="bg2">
+                      <a:lumMod val="50000"/>
+                    </a:schemeClr>
+                  </a:solidFill>
+                </a:ln>
+              </p:spPr>
+              <p:style>
+                <a:lnRef idx="2">
+                  <a:schemeClr val="accent1">
+                    <a:shade val="15000"/>
+                  </a:schemeClr>
+                </a:lnRef>
+                <a:fillRef idx="1">
+                  <a:schemeClr val="accent1"/>
+                </a:fillRef>
+                <a:effectRef idx="0">
+                  <a:schemeClr val="accent1"/>
+                </a:effectRef>
+                <a:fontRef idx="minor">
+                  <a:schemeClr val="lt1"/>
+                </a:fontRef>
+              </p:style>
+              <p:txBody>
+                <a:bodyPr lIns="0" rIns="0" rtlCol="0" anchor="ctr"/>
+                <a:lstStyle/>
+                <a:p>
+                  <a:pPr algn="ctr"/>
+                  <a:r>
+                    <a:rPr lang="hu-HU" sz="3200" dirty="0">
+                      <a:solidFill>
+                        <a:schemeClr val="bg2">
+                          <a:lumMod val="75000"/>
+                        </a:schemeClr>
+                      </a:solidFill>
+                    </a:rPr>
+                    <a:t>4</a:t>
+                  </a:r>
+                </a:p>
+              </p:txBody>
+            </p:sp>
+          </p:grpSp>
+          <p:grpSp>
+            <p:nvGrpSpPr>
+              <p:cNvPr id="71" name="Csoportba foglalás 70">
+                <a:extLst>
+                  <a:ext uri="{FF2B5EF4-FFF2-40B4-BE49-F238E27FC236}">
+                    <a16:creationId xmlns:a16="http://schemas.microsoft.com/office/drawing/2014/main" id="{0A3175CB-1903-DDB4-9C3F-7840A32EC4AF}"/>
+                  </a:ext>
+                </a:extLst>
+              </p:cNvPr>
+              <p:cNvGrpSpPr/>
+              <p:nvPr/>
+            </p:nvGrpSpPr>
+            <p:grpSpPr>
+              <a:xfrm>
+                <a:off x="6456000" y="3069000"/>
+                <a:ext cx="2160000" cy="720000"/>
+                <a:chOff x="6276000" y="3087854"/>
+                <a:chExt cx="2160000" cy="720000"/>
+              </a:xfrm>
+              <a:grpFill/>
+            </p:grpSpPr>
+            <p:sp>
+              <p:nvSpPr>
+                <p:cNvPr id="72" name="Ellipszis 71">
+                  <a:extLst>
+                    <a:ext uri="{FF2B5EF4-FFF2-40B4-BE49-F238E27FC236}">
+                      <a16:creationId xmlns:a16="http://schemas.microsoft.com/office/drawing/2014/main" id="{89E6C319-5F50-14BF-919F-664B84E9AA58}"/>
+                    </a:ext>
+                  </a:extLst>
+                </p:cNvPr>
+                <p:cNvSpPr/>
+                <p:nvPr/>
+              </p:nvSpPr>
+              <p:spPr>
+                <a:xfrm>
+                  <a:off x="6276000" y="3087854"/>
+                  <a:ext cx="720000" cy="720000"/>
+                </a:xfrm>
+                <a:prstGeom prst="ellipse">
+                  <a:avLst/>
+                </a:prstGeom>
+                <a:solidFill>
+                  <a:schemeClr val="bg2">
+                    <a:lumMod val="90000"/>
+                  </a:schemeClr>
+                </a:solidFill>
+                <a:ln>
+                  <a:solidFill>
+                    <a:schemeClr val="bg2">
+                      <a:lumMod val="50000"/>
+                    </a:schemeClr>
+                  </a:solidFill>
+                </a:ln>
+              </p:spPr>
+              <p:style>
+                <a:lnRef idx="2">
+                  <a:schemeClr val="accent1">
+                    <a:shade val="15000"/>
+                  </a:schemeClr>
+                </a:lnRef>
+                <a:fillRef idx="1">
+                  <a:schemeClr val="accent1"/>
+                </a:fillRef>
+                <a:effectRef idx="0">
+                  <a:schemeClr val="accent1"/>
+                </a:effectRef>
+                <a:fontRef idx="minor">
+                  <a:schemeClr val="lt1"/>
+                </a:fontRef>
+              </p:style>
+              <p:txBody>
+                <a:bodyPr lIns="0" rIns="0" rtlCol="0" anchor="ctr"/>
+                <a:lstStyle/>
+                <a:p>
+                  <a:pPr algn="ctr"/>
+                  <a:r>
+                    <a:rPr lang="hu-HU" sz="3200" dirty="0">
+                      <a:solidFill>
+                        <a:schemeClr val="bg2">
+                          <a:lumMod val="75000"/>
+                        </a:schemeClr>
+                      </a:solidFill>
+                    </a:rPr>
+                    <a:t>6</a:t>
+                  </a:r>
+                </a:p>
+              </p:txBody>
+            </p:sp>
+            <p:sp>
+              <p:nvSpPr>
+                <p:cNvPr id="73" name="Ellipszis 72">
+                  <a:extLst>
+                    <a:ext uri="{FF2B5EF4-FFF2-40B4-BE49-F238E27FC236}">
+                      <a16:creationId xmlns:a16="http://schemas.microsoft.com/office/drawing/2014/main" id="{9FB5262E-DF15-395F-0912-9AC7811B5FC3}"/>
+                    </a:ext>
+                  </a:extLst>
+                </p:cNvPr>
+                <p:cNvSpPr/>
+                <p:nvPr/>
+              </p:nvSpPr>
+              <p:spPr>
+                <a:xfrm>
+                  <a:off x="7716000" y="3087854"/>
+                  <a:ext cx="720000" cy="720000"/>
+                </a:xfrm>
+                <a:prstGeom prst="ellipse">
+                  <a:avLst/>
+                </a:prstGeom>
+                <a:solidFill>
+                  <a:schemeClr val="bg2">
+                    <a:lumMod val="90000"/>
+                  </a:schemeClr>
+                </a:solidFill>
+                <a:ln>
+                  <a:solidFill>
+                    <a:schemeClr val="bg2">
+                      <a:lumMod val="50000"/>
+                    </a:schemeClr>
+                  </a:solidFill>
+                </a:ln>
+              </p:spPr>
+              <p:style>
+                <a:lnRef idx="2">
+                  <a:schemeClr val="accent1">
+                    <a:shade val="15000"/>
+                  </a:schemeClr>
+                </a:lnRef>
+                <a:fillRef idx="1">
+                  <a:schemeClr val="accent1"/>
+                </a:fillRef>
+                <a:effectRef idx="0">
+                  <a:schemeClr val="accent1"/>
+                </a:effectRef>
+                <a:fontRef idx="minor">
+                  <a:schemeClr val="lt1"/>
+                </a:fontRef>
+              </p:style>
+              <p:txBody>
+                <a:bodyPr lIns="0" rIns="0" rtlCol="0" anchor="ctr"/>
+                <a:lstStyle/>
+                <a:p>
+                  <a:pPr algn="ctr"/>
+                  <a:r>
+                    <a:rPr lang="hu-HU" sz="3200" dirty="0">
+                      <a:solidFill>
+                        <a:schemeClr val="bg2">
+                          <a:lumMod val="75000"/>
+                        </a:schemeClr>
+                      </a:solidFill>
+                    </a:rPr>
+                    <a:t>9</a:t>
+                  </a:r>
+                </a:p>
+              </p:txBody>
+            </p:sp>
+          </p:grpSp>
+        </p:grpSp>
+        <p:cxnSp>
+          <p:nvCxnSpPr>
+            <p:cNvPr id="66" name="Egyenes összekötő 65">
+              <a:extLst>
+                <a:ext uri="{FF2B5EF4-FFF2-40B4-BE49-F238E27FC236}">
+                  <a16:creationId xmlns:a16="http://schemas.microsoft.com/office/drawing/2014/main" id="{67D23819-31C2-4567-A301-D1AC4CD0E0F0}"/>
+                </a:ext>
+              </a:extLst>
+            </p:cNvPr>
+            <p:cNvCxnSpPr>
+              <a:cxnSpLocks/>
+              <a:stCxn id="74" idx="0"/>
+              <a:endCxn id="63" idx="4"/>
+            </p:cNvCxnSpPr>
+            <p:nvPr/>
+          </p:nvCxnSpPr>
+          <p:spPr>
+            <a:xfrm flipV="1">
+              <a:off x="710251" y="2168525"/>
+              <a:ext cx="720000" cy="540475"/>
+            </a:xfrm>
+            <a:prstGeom prst="line">
+              <a:avLst/>
+            </a:prstGeom>
+            <a:ln>
+              <a:solidFill>
+                <a:schemeClr val="bg2">
+                  <a:lumMod val="50000"/>
+                </a:schemeClr>
+              </a:solidFill>
+            </a:ln>
+          </p:spPr>
+          <p:style>
+            <a:lnRef idx="2">
+              <a:schemeClr val="accent1"/>
+            </a:lnRef>
+            <a:fillRef idx="0">
+              <a:schemeClr val="accent1"/>
+            </a:fillRef>
+            <a:effectRef idx="1">
+              <a:schemeClr val="accent1"/>
+            </a:effectRef>
+            <a:fontRef idx="minor">
+              <a:schemeClr val="tx1"/>
+            </a:fontRef>
+          </p:style>
+        </p:cxnSp>
+        <p:cxnSp>
+          <p:nvCxnSpPr>
+            <p:cNvPr id="67" name="Egyenes összekötő 66">
+              <a:extLst>
+                <a:ext uri="{FF2B5EF4-FFF2-40B4-BE49-F238E27FC236}">
+                  <a16:creationId xmlns:a16="http://schemas.microsoft.com/office/drawing/2014/main" id="{566875BC-7415-B01F-D066-17F5F599AB29}"/>
+                </a:ext>
+              </a:extLst>
+            </p:cNvPr>
+            <p:cNvCxnSpPr>
+              <a:cxnSpLocks/>
+              <a:stCxn id="75" idx="0"/>
+              <a:endCxn id="63" idx="4"/>
+            </p:cNvCxnSpPr>
+            <p:nvPr/>
+          </p:nvCxnSpPr>
+          <p:spPr>
+            <a:xfrm flipH="1" flipV="1">
+              <a:off x="1430251" y="2168525"/>
+              <a:ext cx="720000" cy="540475"/>
+            </a:xfrm>
+            <a:prstGeom prst="line">
+              <a:avLst/>
+            </a:prstGeom>
+            <a:ln>
+              <a:solidFill>
+                <a:schemeClr val="bg2">
+                  <a:lumMod val="50000"/>
+                </a:schemeClr>
+              </a:solidFill>
+            </a:ln>
+          </p:spPr>
+          <p:style>
+            <a:lnRef idx="2">
+              <a:schemeClr val="accent1"/>
+            </a:lnRef>
+            <a:fillRef idx="0">
+              <a:schemeClr val="accent1"/>
+            </a:fillRef>
+            <a:effectRef idx="1">
+              <a:schemeClr val="accent1"/>
+            </a:effectRef>
+            <a:fontRef idx="minor">
+              <a:schemeClr val="tx1"/>
+            </a:fontRef>
+          </p:style>
+        </p:cxnSp>
+        <p:cxnSp>
+          <p:nvCxnSpPr>
+            <p:cNvPr id="68" name="Egyenes összekötő 67">
+              <a:extLst>
+                <a:ext uri="{FF2B5EF4-FFF2-40B4-BE49-F238E27FC236}">
+                  <a16:creationId xmlns:a16="http://schemas.microsoft.com/office/drawing/2014/main" id="{E56DA1FB-0F6F-8900-BFA5-44EB76DB43A0}"/>
+                </a:ext>
+              </a:extLst>
+            </p:cNvPr>
+            <p:cNvCxnSpPr>
+              <a:cxnSpLocks/>
+              <a:stCxn id="72" idx="0"/>
+              <a:endCxn id="64" idx="4"/>
+            </p:cNvCxnSpPr>
+            <p:nvPr/>
+          </p:nvCxnSpPr>
+          <p:spPr>
+            <a:xfrm flipV="1">
+              <a:off x="3590251" y="2168525"/>
+              <a:ext cx="720000" cy="540475"/>
+            </a:xfrm>
+            <a:prstGeom prst="line">
+              <a:avLst/>
+            </a:prstGeom>
+            <a:solidFill>
+              <a:schemeClr val="bg2">
+                <a:lumMod val="90000"/>
+              </a:schemeClr>
+            </a:solidFill>
+            <a:ln>
+              <a:solidFill>
+                <a:schemeClr val="bg2">
+                  <a:lumMod val="50000"/>
+                </a:schemeClr>
+              </a:solidFill>
+            </a:ln>
+          </p:spPr>
+          <p:style>
+            <a:lnRef idx="2">
+              <a:schemeClr val="accent1"/>
+            </a:lnRef>
+            <a:fillRef idx="0">
+              <a:schemeClr val="accent1"/>
+            </a:fillRef>
+            <a:effectRef idx="1">
+              <a:schemeClr val="accent1"/>
+            </a:effectRef>
+            <a:fontRef idx="minor">
+              <a:schemeClr val="tx1"/>
+            </a:fontRef>
+          </p:style>
+        </p:cxnSp>
+        <p:cxnSp>
+          <p:nvCxnSpPr>
+            <p:cNvPr id="69" name="Egyenes összekötő 68">
+              <a:extLst>
+                <a:ext uri="{FF2B5EF4-FFF2-40B4-BE49-F238E27FC236}">
+                  <a16:creationId xmlns:a16="http://schemas.microsoft.com/office/drawing/2014/main" id="{1F9800DC-0B02-D43E-268D-A2F565ABA46A}"/>
+                </a:ext>
+              </a:extLst>
+            </p:cNvPr>
+            <p:cNvCxnSpPr>
+              <a:cxnSpLocks/>
+              <a:stCxn id="73" idx="0"/>
+              <a:endCxn id="64" idx="4"/>
+            </p:cNvCxnSpPr>
+            <p:nvPr/>
+          </p:nvCxnSpPr>
+          <p:spPr>
+            <a:xfrm flipH="1" flipV="1">
+              <a:off x="4310251" y="2168525"/>
+              <a:ext cx="720000" cy="540475"/>
+            </a:xfrm>
+            <a:prstGeom prst="line">
+              <a:avLst/>
+            </a:prstGeom>
+            <a:solidFill>
+              <a:schemeClr val="bg2">
+                <a:lumMod val="90000"/>
+              </a:schemeClr>
+            </a:solidFill>
+            <a:ln>
+              <a:solidFill>
+                <a:schemeClr val="bg2">
+                  <a:lumMod val="50000"/>
+                </a:schemeClr>
+              </a:solidFill>
+            </a:ln>
+          </p:spPr>
+          <p:style>
+            <a:lnRef idx="2">
+              <a:schemeClr val="accent1"/>
+            </a:lnRef>
+            <a:fillRef idx="0">
+              <a:schemeClr val="accent1"/>
+            </a:fillRef>
+            <a:effectRef idx="1">
+              <a:schemeClr val="accent1"/>
+            </a:effectRef>
+            <a:fontRef idx="minor">
+              <a:schemeClr val="tx1"/>
+            </a:fontRef>
+          </p:style>
+        </p:cxnSp>
+      </p:grpSp>
+      <p:grpSp>
+        <p:nvGrpSpPr>
+          <p:cNvPr id="76" name="Csoportba foglalás 75">
+            <a:extLst>
+              <a:ext uri="{FF2B5EF4-FFF2-40B4-BE49-F238E27FC236}">
+                <a16:creationId xmlns:a16="http://schemas.microsoft.com/office/drawing/2014/main" id="{79A14E5C-6580-F4B7-2C81-A024AFFBC24A}"/>
+              </a:ext>
+            </a:extLst>
+          </p:cNvPr>
+          <p:cNvGrpSpPr/>
+          <p:nvPr/>
+        </p:nvGrpSpPr>
+        <p:grpSpPr>
+          <a:xfrm>
+            <a:off x="6096000" y="3429000"/>
+            <a:ext cx="4536000" cy="2880000"/>
+            <a:chOff x="350251" y="188050"/>
+            <a:chExt cx="5040000" cy="3240950"/>
+          </a:xfrm>
+        </p:grpSpPr>
+        <p:sp>
+          <p:nvSpPr>
+            <p:cNvPr id="77" name="Ellipszis 76">
+              <a:extLst>
+                <a:ext uri="{FF2B5EF4-FFF2-40B4-BE49-F238E27FC236}">
+                  <a16:creationId xmlns:a16="http://schemas.microsoft.com/office/drawing/2014/main" id="{695ADF34-F3D2-FEB9-2C2C-336D0F564095}"/>
+                </a:ext>
+              </a:extLst>
+            </p:cNvPr>
+            <p:cNvSpPr/>
+            <p:nvPr/>
+          </p:nvSpPr>
+          <p:spPr>
+            <a:xfrm>
+              <a:off x="2510251" y="188050"/>
+              <a:ext cx="720000" cy="720000"/>
+            </a:xfrm>
+            <a:prstGeom prst="ellipse">
+              <a:avLst/>
+            </a:prstGeom>
+            <a:solidFill>
+              <a:srgbClr val="FBB753"/>
+            </a:solidFill>
+            <a:ln>
+              <a:solidFill>
+                <a:schemeClr val="tx1"/>
+              </a:solidFill>
+            </a:ln>
+          </p:spPr>
+          <p:style>
+            <a:lnRef idx="2">
+              <a:schemeClr val="accent1">
+                <a:shade val="15000"/>
+              </a:schemeClr>
+            </a:lnRef>
+            <a:fillRef idx="1">
+              <a:schemeClr val="accent1"/>
+            </a:fillRef>
+            <a:effectRef idx="0">
+              <a:schemeClr val="accent1"/>
+            </a:effectRef>
+            <a:fontRef idx="minor">
+              <a:schemeClr val="lt1"/>
+            </a:fontRef>
+          </p:style>
+          <p:txBody>
+            <a:bodyPr lIns="0" rIns="0" rtlCol="0" anchor="ctr"/>
+            <a:lstStyle/>
+            <a:p>
+              <a:pPr algn="ctr"/>
+              <a:r>
+                <a:rPr lang="hu-HU" sz="3200" dirty="0">
+                  <a:solidFill>
+                    <a:schemeClr val="tx1"/>
+                  </a:solidFill>
+                </a:rPr>
+                <a:t>9</a:t>
+              </a:r>
+            </a:p>
+          </p:txBody>
+        </p:sp>
+        <p:cxnSp>
+          <p:nvCxnSpPr>
+            <p:cNvPr id="78" name="Egyenes összekötő 77">
+              <a:extLst>
+                <a:ext uri="{FF2B5EF4-FFF2-40B4-BE49-F238E27FC236}">
+                  <a16:creationId xmlns:a16="http://schemas.microsoft.com/office/drawing/2014/main" id="{5177F24A-CFBD-CE1A-A2C7-709E15710954}"/>
+                </a:ext>
+              </a:extLst>
+            </p:cNvPr>
+            <p:cNvCxnSpPr>
+              <a:cxnSpLocks/>
+              <a:stCxn id="77" idx="4"/>
+              <a:endCxn id="80" idx="0"/>
+            </p:cNvCxnSpPr>
+            <p:nvPr/>
+          </p:nvCxnSpPr>
+          <p:spPr>
+            <a:xfrm flipH="1">
+              <a:off x="1430251" y="908050"/>
+              <a:ext cx="1440000" cy="540475"/>
+            </a:xfrm>
+            <a:prstGeom prst="line">
+              <a:avLst/>
+            </a:prstGeom>
+            <a:solidFill>
+              <a:schemeClr val="bg2">
+                <a:lumMod val="90000"/>
+              </a:schemeClr>
+            </a:solidFill>
+            <a:ln>
+              <a:solidFill>
+                <a:schemeClr val="bg2">
+                  <a:lumMod val="50000"/>
+                </a:schemeClr>
+              </a:solidFill>
+            </a:ln>
+          </p:spPr>
+          <p:style>
+            <a:lnRef idx="2">
+              <a:schemeClr val="accent1"/>
+            </a:lnRef>
+            <a:fillRef idx="0">
+              <a:schemeClr val="accent1"/>
+            </a:fillRef>
+            <a:effectRef idx="1">
+              <a:schemeClr val="accent1"/>
+            </a:effectRef>
+            <a:fontRef idx="minor">
+              <a:schemeClr val="tx1"/>
+            </a:fontRef>
+          </p:style>
+        </p:cxnSp>
+        <p:cxnSp>
+          <p:nvCxnSpPr>
+            <p:cNvPr id="79" name="Egyenes összekötő 78">
+              <a:extLst>
+                <a:ext uri="{FF2B5EF4-FFF2-40B4-BE49-F238E27FC236}">
+                  <a16:creationId xmlns:a16="http://schemas.microsoft.com/office/drawing/2014/main" id="{631B25F8-B39E-D88F-4EA9-11F00E30B12B}"/>
+                </a:ext>
+              </a:extLst>
+            </p:cNvPr>
+            <p:cNvCxnSpPr>
+              <a:cxnSpLocks/>
+              <a:stCxn id="77" idx="4"/>
+              <a:endCxn id="81" idx="0"/>
+            </p:cNvCxnSpPr>
+            <p:nvPr/>
+          </p:nvCxnSpPr>
+          <p:spPr>
+            <a:xfrm>
+              <a:off x="2870251" y="908050"/>
+              <a:ext cx="1440000" cy="540475"/>
+            </a:xfrm>
+            <a:prstGeom prst="line">
+              <a:avLst/>
+            </a:prstGeom>
+            <a:solidFill>
+              <a:schemeClr val="bg2">
+                <a:lumMod val="90000"/>
+              </a:schemeClr>
+            </a:solidFill>
+            <a:ln>
+              <a:solidFill>
+                <a:schemeClr val="bg2">
+                  <a:lumMod val="50000"/>
+                </a:schemeClr>
+              </a:solidFill>
+            </a:ln>
+          </p:spPr>
+          <p:style>
+            <a:lnRef idx="2">
+              <a:schemeClr val="accent1"/>
+            </a:lnRef>
+            <a:fillRef idx="0">
+              <a:schemeClr val="accent1"/>
+            </a:fillRef>
+            <a:effectRef idx="1">
+              <a:schemeClr val="accent1"/>
+            </a:effectRef>
+            <a:fontRef idx="minor">
+              <a:schemeClr val="tx1"/>
+            </a:fontRef>
+          </p:style>
+        </p:cxnSp>
+        <p:sp>
+          <p:nvSpPr>
+            <p:cNvPr id="80" name="Ellipszis 79">
+              <a:extLst>
+                <a:ext uri="{FF2B5EF4-FFF2-40B4-BE49-F238E27FC236}">
+                  <a16:creationId xmlns:a16="http://schemas.microsoft.com/office/drawing/2014/main" id="{820F78EB-AEFA-0695-3CF0-78C053E0EAE6}"/>
+                </a:ext>
+              </a:extLst>
+            </p:cNvPr>
+            <p:cNvSpPr/>
+            <p:nvPr/>
+          </p:nvSpPr>
+          <p:spPr>
+            <a:xfrm>
+              <a:off x="1070251" y="1448525"/>
+              <a:ext cx="720000" cy="720000"/>
+            </a:xfrm>
+            <a:prstGeom prst="ellipse">
+              <a:avLst/>
+            </a:prstGeom>
+            <a:solidFill>
+              <a:schemeClr val="bg2">
+                <a:lumMod val="90000"/>
+              </a:schemeClr>
+            </a:solidFill>
+            <a:ln>
+              <a:solidFill>
+                <a:schemeClr val="bg2">
+                  <a:lumMod val="50000"/>
+                </a:schemeClr>
+              </a:solidFill>
+            </a:ln>
+          </p:spPr>
+          <p:style>
+            <a:lnRef idx="2">
+              <a:schemeClr val="accent1">
+                <a:shade val="15000"/>
+              </a:schemeClr>
+            </a:lnRef>
+            <a:fillRef idx="1">
+              <a:schemeClr val="accent1"/>
+            </a:fillRef>
+            <a:effectRef idx="0">
+              <a:schemeClr val="accent1"/>
+            </a:effectRef>
+            <a:fontRef idx="minor">
+              <a:schemeClr val="lt1"/>
+            </a:fontRef>
+          </p:style>
+          <p:txBody>
+            <a:bodyPr lIns="0" rIns="0" rtlCol="0" anchor="ctr"/>
+            <a:lstStyle/>
+            <a:p>
+              <a:pPr algn="ctr"/>
+              <a:r>
+                <a:rPr lang="hu-HU" sz="3200" dirty="0">
+                  <a:solidFill>
+                    <a:schemeClr val="bg2">
+                      <a:lumMod val="75000"/>
+                    </a:schemeClr>
+                  </a:solidFill>
+                </a:rPr>
+                <a:t>12</a:t>
+              </a:r>
+            </a:p>
+          </p:txBody>
+        </p:sp>
+        <p:sp>
+          <p:nvSpPr>
+            <p:cNvPr id="81" name="Ellipszis 80">
+              <a:extLst>
+                <a:ext uri="{FF2B5EF4-FFF2-40B4-BE49-F238E27FC236}">
+                  <a16:creationId xmlns:a16="http://schemas.microsoft.com/office/drawing/2014/main" id="{3BAFC6CE-A82E-F492-1F75-0E23B3C43E6D}"/>
+                </a:ext>
+              </a:extLst>
+            </p:cNvPr>
+            <p:cNvSpPr/>
+            <p:nvPr/>
+          </p:nvSpPr>
+          <p:spPr>
+            <a:xfrm>
+              <a:off x="3950251" y="1448525"/>
+              <a:ext cx="720000" cy="720000"/>
+            </a:xfrm>
+            <a:prstGeom prst="ellipse">
+              <a:avLst/>
+            </a:prstGeom>
+            <a:solidFill>
+              <a:schemeClr val="bg2">
+                <a:lumMod val="90000"/>
+              </a:schemeClr>
+            </a:solidFill>
+            <a:ln>
+              <a:solidFill>
+                <a:schemeClr val="bg2">
+                  <a:lumMod val="50000"/>
+                </a:schemeClr>
+              </a:solidFill>
+            </a:ln>
+          </p:spPr>
+          <p:style>
+            <a:lnRef idx="2">
+              <a:schemeClr val="accent1">
+                <a:shade val="15000"/>
+              </a:schemeClr>
+            </a:lnRef>
+            <a:fillRef idx="1">
+              <a:schemeClr val="accent1"/>
+            </a:fillRef>
+            <a:effectRef idx="0">
+              <a:schemeClr val="accent1"/>
+            </a:effectRef>
+            <a:fontRef idx="minor">
+              <a:schemeClr val="lt1"/>
+            </a:fontRef>
+          </p:style>
+          <p:txBody>
+            <a:bodyPr lIns="0" rIns="0" rtlCol="0" anchor="ctr"/>
+            <a:lstStyle/>
+            <a:p>
+              <a:pPr algn="ctr"/>
+              <a:r>
+                <a:rPr lang="hu-HU" sz="3200" dirty="0">
+                  <a:solidFill>
+                    <a:schemeClr val="bg2">
+                      <a:lumMod val="75000"/>
+                    </a:schemeClr>
+                  </a:solidFill>
+                </a:rPr>
+                <a:t>-3</a:t>
+              </a:r>
+            </a:p>
+          </p:txBody>
+        </p:sp>
+        <p:grpSp>
+          <p:nvGrpSpPr>
+            <p:cNvPr id="82" name="Csoportba foglalás 81">
+              <a:extLst>
+                <a:ext uri="{FF2B5EF4-FFF2-40B4-BE49-F238E27FC236}">
+                  <a16:creationId xmlns:a16="http://schemas.microsoft.com/office/drawing/2014/main" id="{3942C09E-F3DD-E334-B826-B8D6A695DF9B}"/>
+                </a:ext>
+              </a:extLst>
+            </p:cNvPr>
+            <p:cNvGrpSpPr/>
+            <p:nvPr/>
+          </p:nvGrpSpPr>
+          <p:grpSpPr>
+            <a:xfrm>
+              <a:off x="350251" y="2709000"/>
+              <a:ext cx="5040000" cy="720000"/>
+              <a:chOff x="3576000" y="3069000"/>
+              <a:chExt cx="5040000" cy="720000"/>
+            </a:xfrm>
+            <a:solidFill>
+              <a:srgbClr val="FBB753"/>
+            </a:solidFill>
+          </p:grpSpPr>
+          <p:grpSp>
+            <p:nvGrpSpPr>
+              <p:cNvPr id="87" name="Csoportba foglalás 86">
+                <a:extLst>
+                  <a:ext uri="{FF2B5EF4-FFF2-40B4-BE49-F238E27FC236}">
+                    <a16:creationId xmlns:a16="http://schemas.microsoft.com/office/drawing/2014/main" id="{92A2F9D9-33F4-8191-EF3E-125EFAFD5787}"/>
+                  </a:ext>
+                </a:extLst>
+              </p:cNvPr>
+              <p:cNvGrpSpPr/>
+              <p:nvPr/>
+            </p:nvGrpSpPr>
+            <p:grpSpPr>
+              <a:xfrm>
+                <a:off x="3576000" y="3069000"/>
+                <a:ext cx="2160000" cy="720000"/>
+                <a:chOff x="3756001" y="3069000"/>
+                <a:chExt cx="2160000" cy="720000"/>
+              </a:xfrm>
+              <a:grpFill/>
+            </p:grpSpPr>
+            <p:sp>
+              <p:nvSpPr>
+                <p:cNvPr id="91" name="Ellipszis 90">
+                  <a:extLst>
+                    <a:ext uri="{FF2B5EF4-FFF2-40B4-BE49-F238E27FC236}">
+                      <a16:creationId xmlns:a16="http://schemas.microsoft.com/office/drawing/2014/main" id="{12FDC3DD-4504-9C8A-2AB8-79F1AC0D9B74}"/>
+                    </a:ext>
+                  </a:extLst>
+                </p:cNvPr>
+                <p:cNvSpPr/>
+                <p:nvPr/>
+              </p:nvSpPr>
+              <p:spPr>
+                <a:xfrm>
+                  <a:off x="3756001" y="3069000"/>
+                  <a:ext cx="720000" cy="720000"/>
+                </a:xfrm>
+                <a:prstGeom prst="ellipse">
+                  <a:avLst/>
+                </a:prstGeom>
+                <a:solidFill>
+                  <a:schemeClr val="bg2">
+                    <a:lumMod val="90000"/>
+                  </a:schemeClr>
+                </a:solidFill>
+                <a:ln>
+                  <a:solidFill>
+                    <a:schemeClr val="bg2">
+                      <a:lumMod val="50000"/>
+                    </a:schemeClr>
+                  </a:solidFill>
+                </a:ln>
+              </p:spPr>
+              <p:style>
+                <a:lnRef idx="2">
+                  <a:schemeClr val="accent1">
+                    <a:shade val="15000"/>
+                  </a:schemeClr>
+                </a:lnRef>
+                <a:fillRef idx="1">
+                  <a:schemeClr val="accent1"/>
+                </a:fillRef>
+                <a:effectRef idx="0">
+                  <a:schemeClr val="accent1"/>
+                </a:effectRef>
+                <a:fontRef idx="minor">
+                  <a:schemeClr val="lt1"/>
+                </a:fontRef>
+              </p:style>
+              <p:txBody>
+                <a:bodyPr lIns="0" rIns="0" rtlCol="0" anchor="ctr"/>
+                <a:lstStyle/>
+                <a:p>
+                  <a:pPr algn="ctr"/>
+                  <a:r>
+                    <a:rPr lang="hu-HU" sz="3200" dirty="0">
+                      <a:solidFill>
+                        <a:schemeClr val="bg2">
+                          <a:lumMod val="75000"/>
+                        </a:schemeClr>
+                      </a:solidFill>
+                    </a:rPr>
+                    <a:t>3</a:t>
+                  </a:r>
+                </a:p>
+              </p:txBody>
+            </p:sp>
+            <p:sp>
+              <p:nvSpPr>
+                <p:cNvPr id="92" name="Ellipszis 91">
+                  <a:extLst>
+                    <a:ext uri="{FF2B5EF4-FFF2-40B4-BE49-F238E27FC236}">
+                      <a16:creationId xmlns:a16="http://schemas.microsoft.com/office/drawing/2014/main" id="{2188FE27-6F78-A48F-A1AE-52D282E82705}"/>
+                    </a:ext>
+                  </a:extLst>
+                </p:cNvPr>
+                <p:cNvSpPr/>
+                <p:nvPr/>
+              </p:nvSpPr>
+              <p:spPr>
+                <a:xfrm>
+                  <a:off x="5196001" y="3069000"/>
+                  <a:ext cx="720000" cy="720000"/>
+                </a:xfrm>
+                <a:prstGeom prst="ellipse">
+                  <a:avLst/>
+                </a:prstGeom>
+                <a:solidFill>
+                  <a:schemeClr val="bg2">
+                    <a:lumMod val="90000"/>
+                  </a:schemeClr>
+                </a:solidFill>
+                <a:ln>
+                  <a:solidFill>
+                    <a:schemeClr val="bg2">
+                      <a:lumMod val="50000"/>
+                    </a:schemeClr>
+                  </a:solidFill>
+                </a:ln>
+              </p:spPr>
+              <p:style>
+                <a:lnRef idx="2">
+                  <a:schemeClr val="accent1">
+                    <a:shade val="15000"/>
+                  </a:schemeClr>
+                </a:lnRef>
+                <a:fillRef idx="1">
+                  <a:schemeClr val="accent1"/>
+                </a:fillRef>
+                <a:effectRef idx="0">
+                  <a:schemeClr val="accent1"/>
+                </a:effectRef>
+                <a:fontRef idx="minor">
+                  <a:schemeClr val="lt1"/>
+                </a:fontRef>
+              </p:style>
+              <p:txBody>
+                <a:bodyPr lIns="0" rIns="0" rtlCol="0" anchor="ctr"/>
+                <a:lstStyle/>
+                <a:p>
+                  <a:pPr algn="ctr"/>
+                  <a:r>
+                    <a:rPr lang="hu-HU" sz="3200" dirty="0">
+                      <a:solidFill>
+                        <a:schemeClr val="bg2">
+                          <a:lumMod val="75000"/>
+                        </a:schemeClr>
+                      </a:solidFill>
+                    </a:rPr>
+                    <a:t>4</a:t>
+                  </a:r>
+                </a:p>
+              </p:txBody>
+            </p:sp>
+          </p:grpSp>
+          <p:grpSp>
+            <p:nvGrpSpPr>
+              <p:cNvPr id="88" name="Csoportba foglalás 87">
+                <a:extLst>
+                  <a:ext uri="{FF2B5EF4-FFF2-40B4-BE49-F238E27FC236}">
+                    <a16:creationId xmlns:a16="http://schemas.microsoft.com/office/drawing/2014/main" id="{5B5940FA-E09F-6527-F530-B147F70A802F}"/>
+                  </a:ext>
+                </a:extLst>
+              </p:cNvPr>
+              <p:cNvGrpSpPr/>
+              <p:nvPr/>
+            </p:nvGrpSpPr>
+            <p:grpSpPr>
+              <a:xfrm>
+                <a:off x="6456000" y="3069000"/>
+                <a:ext cx="2160000" cy="720000"/>
+                <a:chOff x="6276000" y="3087854"/>
+                <a:chExt cx="2160000" cy="720000"/>
+              </a:xfrm>
+              <a:grpFill/>
+            </p:grpSpPr>
+            <p:sp>
+              <p:nvSpPr>
+                <p:cNvPr id="89" name="Ellipszis 88">
+                  <a:extLst>
+                    <a:ext uri="{FF2B5EF4-FFF2-40B4-BE49-F238E27FC236}">
+                      <a16:creationId xmlns:a16="http://schemas.microsoft.com/office/drawing/2014/main" id="{8DC2FA19-4428-5FF5-C4CA-160646F49ADD}"/>
+                    </a:ext>
+                  </a:extLst>
+                </p:cNvPr>
+                <p:cNvSpPr/>
+                <p:nvPr/>
+              </p:nvSpPr>
+              <p:spPr>
+                <a:xfrm>
+                  <a:off x="6276000" y="3087854"/>
+                  <a:ext cx="720000" cy="720000"/>
+                </a:xfrm>
+                <a:prstGeom prst="ellipse">
+                  <a:avLst/>
+                </a:prstGeom>
+                <a:solidFill>
+                  <a:schemeClr val="bg2">
+                    <a:lumMod val="90000"/>
+                  </a:schemeClr>
+                </a:solidFill>
+                <a:ln>
+                  <a:solidFill>
+                    <a:schemeClr val="bg2">
+                      <a:lumMod val="50000"/>
+                    </a:schemeClr>
+                  </a:solidFill>
+                </a:ln>
+              </p:spPr>
+              <p:style>
+                <a:lnRef idx="2">
+                  <a:schemeClr val="accent1">
+                    <a:shade val="15000"/>
+                  </a:schemeClr>
+                </a:lnRef>
+                <a:fillRef idx="1">
+                  <a:schemeClr val="accent1"/>
+                </a:fillRef>
+                <a:effectRef idx="0">
+                  <a:schemeClr val="accent1"/>
+                </a:effectRef>
+                <a:fontRef idx="minor">
+                  <a:schemeClr val="lt1"/>
+                </a:fontRef>
+              </p:style>
+              <p:txBody>
+                <a:bodyPr lIns="0" rIns="0" rtlCol="0" anchor="ctr"/>
+                <a:lstStyle/>
+                <a:p>
+                  <a:pPr algn="ctr"/>
+                  <a:r>
+                    <a:rPr lang="hu-HU" sz="3200" dirty="0">
+                      <a:solidFill>
+                        <a:schemeClr val="bg2">
+                          <a:lumMod val="75000"/>
+                        </a:schemeClr>
+                      </a:solidFill>
+                    </a:rPr>
+                    <a:t>6</a:t>
+                  </a:r>
+                </a:p>
+              </p:txBody>
+            </p:sp>
+            <p:sp>
+              <p:nvSpPr>
+                <p:cNvPr id="90" name="Ellipszis 89">
+                  <a:extLst>
+                    <a:ext uri="{FF2B5EF4-FFF2-40B4-BE49-F238E27FC236}">
+                      <a16:creationId xmlns:a16="http://schemas.microsoft.com/office/drawing/2014/main" id="{0789DC22-ABE6-5840-DCA8-DED4C23C139E}"/>
+                    </a:ext>
+                  </a:extLst>
+                </p:cNvPr>
+                <p:cNvSpPr/>
+                <p:nvPr/>
+              </p:nvSpPr>
+              <p:spPr>
+                <a:xfrm>
+                  <a:off x="7716000" y="3087854"/>
+                  <a:ext cx="720000" cy="720000"/>
+                </a:xfrm>
+                <a:prstGeom prst="ellipse">
+                  <a:avLst/>
+                </a:prstGeom>
+                <a:solidFill>
+                  <a:schemeClr val="bg2">
+                    <a:lumMod val="90000"/>
+                  </a:schemeClr>
+                </a:solidFill>
+                <a:ln>
+                  <a:solidFill>
+                    <a:schemeClr val="bg2">
+                      <a:lumMod val="50000"/>
+                    </a:schemeClr>
+                  </a:solidFill>
+                </a:ln>
+              </p:spPr>
+              <p:style>
+                <a:lnRef idx="2">
+                  <a:schemeClr val="accent1">
+                    <a:shade val="15000"/>
+                  </a:schemeClr>
+                </a:lnRef>
+                <a:fillRef idx="1">
+                  <a:schemeClr val="accent1"/>
+                </a:fillRef>
+                <a:effectRef idx="0">
+                  <a:schemeClr val="accent1"/>
+                </a:effectRef>
+                <a:fontRef idx="minor">
+                  <a:schemeClr val="lt1"/>
+                </a:fontRef>
+              </p:style>
+              <p:txBody>
+                <a:bodyPr lIns="0" rIns="0" rtlCol="0" anchor="ctr"/>
+                <a:lstStyle/>
+                <a:p>
+                  <a:pPr algn="ctr"/>
+                  <a:r>
+                    <a:rPr lang="hu-HU" sz="3200" dirty="0">
+                      <a:solidFill>
+                        <a:schemeClr val="bg2">
+                          <a:lumMod val="75000"/>
+                        </a:schemeClr>
+                      </a:solidFill>
+                    </a:rPr>
+                    <a:t>9</a:t>
+                  </a:r>
+                </a:p>
+              </p:txBody>
+            </p:sp>
+          </p:grpSp>
+        </p:grpSp>
+        <p:cxnSp>
+          <p:nvCxnSpPr>
+            <p:cNvPr id="83" name="Egyenes összekötő 82">
+              <a:extLst>
+                <a:ext uri="{FF2B5EF4-FFF2-40B4-BE49-F238E27FC236}">
+                  <a16:creationId xmlns:a16="http://schemas.microsoft.com/office/drawing/2014/main" id="{F147202D-02DB-B204-98FF-A7FE0204A922}"/>
+                </a:ext>
+              </a:extLst>
+            </p:cNvPr>
+            <p:cNvCxnSpPr>
+              <a:cxnSpLocks/>
+              <a:stCxn id="91" idx="0"/>
+              <a:endCxn id="80" idx="4"/>
+            </p:cNvCxnSpPr>
+            <p:nvPr/>
+          </p:nvCxnSpPr>
+          <p:spPr>
+            <a:xfrm flipV="1">
+              <a:off x="710251" y="2168525"/>
+              <a:ext cx="720000" cy="540475"/>
+            </a:xfrm>
+            <a:prstGeom prst="line">
+              <a:avLst/>
+            </a:prstGeom>
+            <a:ln>
+              <a:solidFill>
+                <a:schemeClr val="bg2">
+                  <a:lumMod val="50000"/>
+                </a:schemeClr>
+              </a:solidFill>
+            </a:ln>
+          </p:spPr>
+          <p:style>
+            <a:lnRef idx="2">
+              <a:schemeClr val="accent1"/>
+            </a:lnRef>
+            <a:fillRef idx="0">
+              <a:schemeClr val="accent1"/>
+            </a:fillRef>
+            <a:effectRef idx="1">
+              <a:schemeClr val="accent1"/>
+            </a:effectRef>
+            <a:fontRef idx="minor">
+              <a:schemeClr val="tx1"/>
+            </a:fontRef>
+          </p:style>
+        </p:cxnSp>
+        <p:cxnSp>
+          <p:nvCxnSpPr>
+            <p:cNvPr id="84" name="Egyenes összekötő 83">
+              <a:extLst>
+                <a:ext uri="{FF2B5EF4-FFF2-40B4-BE49-F238E27FC236}">
+                  <a16:creationId xmlns:a16="http://schemas.microsoft.com/office/drawing/2014/main" id="{2E526AFB-14DD-BBDA-1866-640457F73A9B}"/>
+                </a:ext>
+              </a:extLst>
+            </p:cNvPr>
+            <p:cNvCxnSpPr>
+              <a:cxnSpLocks/>
+              <a:stCxn id="92" idx="0"/>
+              <a:endCxn id="80" idx="4"/>
+            </p:cNvCxnSpPr>
+            <p:nvPr/>
+          </p:nvCxnSpPr>
+          <p:spPr>
+            <a:xfrm flipH="1" flipV="1">
+              <a:off x="1430251" y="2168525"/>
+              <a:ext cx="720000" cy="540475"/>
+            </a:xfrm>
+            <a:prstGeom prst="line">
+              <a:avLst/>
+            </a:prstGeom>
+            <a:ln>
+              <a:solidFill>
+                <a:schemeClr val="bg2">
+                  <a:lumMod val="50000"/>
+                </a:schemeClr>
+              </a:solidFill>
+            </a:ln>
+          </p:spPr>
+          <p:style>
+            <a:lnRef idx="2">
+              <a:schemeClr val="accent1"/>
+            </a:lnRef>
+            <a:fillRef idx="0">
+              <a:schemeClr val="accent1"/>
+            </a:fillRef>
+            <a:effectRef idx="1">
+              <a:schemeClr val="accent1"/>
+            </a:effectRef>
+            <a:fontRef idx="minor">
+              <a:schemeClr val="tx1"/>
+            </a:fontRef>
+          </p:style>
+        </p:cxnSp>
+        <p:cxnSp>
+          <p:nvCxnSpPr>
+            <p:cNvPr id="85" name="Egyenes összekötő 84">
+              <a:extLst>
+                <a:ext uri="{FF2B5EF4-FFF2-40B4-BE49-F238E27FC236}">
+                  <a16:creationId xmlns:a16="http://schemas.microsoft.com/office/drawing/2014/main" id="{DAA455F0-AB7F-A0BE-2C2D-BCD6E87F0120}"/>
+                </a:ext>
+              </a:extLst>
+            </p:cNvPr>
+            <p:cNvCxnSpPr>
+              <a:cxnSpLocks/>
+              <a:stCxn id="89" idx="0"/>
+              <a:endCxn id="81" idx="4"/>
+            </p:cNvCxnSpPr>
+            <p:nvPr/>
+          </p:nvCxnSpPr>
+          <p:spPr>
+            <a:xfrm flipV="1">
+              <a:off x="3590251" y="2168525"/>
+              <a:ext cx="720000" cy="540475"/>
+            </a:xfrm>
+            <a:prstGeom prst="line">
+              <a:avLst/>
+            </a:prstGeom>
+            <a:solidFill>
+              <a:schemeClr val="bg2">
+                <a:lumMod val="90000"/>
+              </a:schemeClr>
+            </a:solidFill>
+            <a:ln>
+              <a:solidFill>
+                <a:schemeClr val="bg2">
+                  <a:lumMod val="50000"/>
+                </a:schemeClr>
+              </a:solidFill>
+            </a:ln>
+          </p:spPr>
+          <p:style>
+            <a:lnRef idx="2">
+              <a:schemeClr val="accent1"/>
+            </a:lnRef>
+            <a:fillRef idx="0">
+              <a:schemeClr val="accent1"/>
+            </a:fillRef>
+            <a:effectRef idx="1">
+              <a:schemeClr val="accent1"/>
+            </a:effectRef>
+            <a:fontRef idx="minor">
+              <a:schemeClr val="tx1"/>
+            </a:fontRef>
+          </p:style>
+        </p:cxnSp>
+        <p:cxnSp>
+          <p:nvCxnSpPr>
+            <p:cNvPr id="86" name="Egyenes összekötő 85">
+              <a:extLst>
+                <a:ext uri="{FF2B5EF4-FFF2-40B4-BE49-F238E27FC236}">
+                  <a16:creationId xmlns:a16="http://schemas.microsoft.com/office/drawing/2014/main" id="{F2517A13-F8AD-0249-CABF-55D43B82FBA3}"/>
+                </a:ext>
+              </a:extLst>
+            </p:cNvPr>
+            <p:cNvCxnSpPr>
+              <a:cxnSpLocks/>
+              <a:stCxn id="90" idx="0"/>
+              <a:endCxn id="81" idx="4"/>
+            </p:cNvCxnSpPr>
+            <p:nvPr/>
+          </p:nvCxnSpPr>
+          <p:spPr>
+            <a:xfrm flipH="1" flipV="1">
+              <a:off x="4310251" y="2168525"/>
+              <a:ext cx="720000" cy="540475"/>
+            </a:xfrm>
+            <a:prstGeom prst="line">
+              <a:avLst/>
+            </a:prstGeom>
+            <a:solidFill>
+              <a:schemeClr val="bg2">
+                <a:lumMod val="90000"/>
+              </a:schemeClr>
+            </a:solidFill>
+            <a:ln>
+              <a:solidFill>
+                <a:schemeClr val="bg2">
+                  <a:lumMod val="50000"/>
+                </a:schemeClr>
+              </a:solidFill>
+            </a:ln>
+          </p:spPr>
+          <p:style>
+            <a:lnRef idx="2">
+              <a:schemeClr val="accent1"/>
+            </a:lnRef>
+            <a:fillRef idx="0">
+              <a:schemeClr val="accent1"/>
+            </a:fillRef>
+            <a:effectRef idx="1">
+              <a:schemeClr val="accent1"/>
+            </a:effectRef>
+            <a:fontRef idx="minor">
+              <a:schemeClr val="tx1"/>
+            </a:fontRef>
+          </p:style>
+        </p:cxnSp>
+      </p:grpSp>
+    </p:spTree>
+    <p:extLst>
+      <p:ext uri="{BB962C8B-B14F-4D97-AF65-F5344CB8AC3E}">
+        <p14:creationId xmlns:p14="http://schemas.microsoft.com/office/powerpoint/2010/main" val="3645846032"/>
+      </p:ext>
+    </p:extLst>
+  </p:cSld>
+  <p:clrMapOvr>
+    <a:masterClrMapping/>
+  </p:clrMapOvr>
+</p:sld>
+</file>
+
+<file path=ppt/slides/slide7.xml><?xml version="1.0" encoding="utf-8"?>
+<p:sld xmlns:a="http://schemas.openxmlformats.org/drawingml/2006/main" xmlns:r="http://schemas.openxmlformats.org/officeDocument/2006/relationships" xmlns:p="http://schemas.openxmlformats.org/presentationml/2006/main">
+  <p:cSld>
+    <p:spTree>
+      <p:nvGrpSpPr>
+        <p:cNvPr id="1" name=""/>
+        <p:cNvGrpSpPr/>
+        <p:nvPr/>
+      </p:nvGrpSpPr>
+      <p:grpSpPr>
+        <a:xfrm>
+          <a:off x="0" y="0"/>
+          <a:ext cx="0" cy="0"/>
+          <a:chOff x="0" y="0"/>
+          <a:chExt cx="0" cy="0"/>
+        </a:xfrm>
+      </p:grpSpPr>
+      <p:grpSp>
+        <p:nvGrpSpPr>
+          <p:cNvPr id="9" name="Csoportba foglalás 8">
+            <a:extLst>
+              <a:ext uri="{FF2B5EF4-FFF2-40B4-BE49-F238E27FC236}">
+                <a16:creationId xmlns:a16="http://schemas.microsoft.com/office/drawing/2014/main" id="{E29EE0D1-451B-44FE-E982-5E909EDEF1A0}"/>
+              </a:ext>
+            </a:extLst>
+          </p:cNvPr>
+          <p:cNvGrpSpPr/>
+          <p:nvPr/>
+        </p:nvGrpSpPr>
+        <p:grpSpPr>
+          <a:xfrm>
+            <a:off x="472020" y="2524760"/>
+            <a:ext cx="2814320" cy="1808480"/>
+            <a:chOff x="1544320" y="2926080"/>
+            <a:chExt cx="2814320" cy="1808480"/>
+          </a:xfrm>
+        </p:grpSpPr>
+        <p:sp>
+          <p:nvSpPr>
+            <p:cNvPr id="5" name="Téglalap: lekerekített 4">
+              <a:extLst>
+                <a:ext uri="{FF2B5EF4-FFF2-40B4-BE49-F238E27FC236}">
+                  <a16:creationId xmlns:a16="http://schemas.microsoft.com/office/drawing/2014/main" id="{BED50C9D-3B85-5498-3523-754EA897B31B}"/>
+                </a:ext>
+              </a:extLst>
+            </p:cNvPr>
+            <p:cNvSpPr/>
+            <p:nvPr/>
+          </p:nvSpPr>
+          <p:spPr>
+            <a:xfrm>
+              <a:off x="1544320" y="2926080"/>
+              <a:ext cx="2814320" cy="1808480"/>
+            </a:xfrm>
+            <a:prstGeom prst="roundRect">
+              <a:avLst/>
+            </a:prstGeom>
+            <a:solidFill>
+              <a:srgbClr val="00B0F0"/>
+            </a:solidFill>
+            <a:ln>
+              <a:noFill/>
+            </a:ln>
+          </p:spPr>
+          <p:style>
+            <a:lnRef idx="2">
+              <a:schemeClr val="accent1">
+                <a:shade val="15000"/>
+              </a:schemeClr>
+            </a:lnRef>
+            <a:fillRef idx="1">
+              <a:schemeClr val="accent1"/>
+            </a:fillRef>
+            <a:effectRef idx="0">
+              <a:schemeClr val="accent1"/>
+            </a:effectRef>
+            <a:fontRef idx="minor">
+              <a:schemeClr val="lt1"/>
+            </a:fontRef>
+          </p:style>
+          <p:txBody>
+            <a:bodyPr rtlCol="0" anchor="ctr"/>
+            <a:lstStyle/>
+            <a:p>
+              <a:pPr algn="ctr"/>
+              <a:r>
+                <a:rPr lang="hu-HU" sz="2000" noProof="1">
+                  <a:solidFill>
+                    <a:schemeClr val="tx1"/>
+                  </a:solidFill>
+                </a:rPr>
+                <a:t>A bevitt szöveg</a:t>
+              </a:r>
+            </a:p>
+            <a:p>
+              <a:pPr algn="ctr"/>
+              <a:endParaRPr lang="hu-HU" sz="2000" noProof="1"/>
+            </a:p>
+            <a:p>
+              <a:pPr algn="ctr"/>
+              <a:endParaRPr lang="hu-HU" sz="2000" noProof="1"/>
+            </a:p>
+            <a:p>
+              <a:pPr algn="ctr"/>
+              <a:endParaRPr lang="hu-HU" sz="2000" noProof="1"/>
+            </a:p>
+          </p:txBody>
+        </p:sp>
+        <p:sp>
+          <p:nvSpPr>
+            <p:cNvPr id="6" name="Téglalap: lekerekített 5">
+              <a:extLst>
+                <a:ext uri="{FF2B5EF4-FFF2-40B4-BE49-F238E27FC236}">
+                  <a16:creationId xmlns:a16="http://schemas.microsoft.com/office/drawing/2014/main" id="{E18BF2A4-53A4-3C40-DDC7-E9EF0202BFB5}"/>
+                </a:ext>
+              </a:extLst>
+            </p:cNvPr>
+            <p:cNvSpPr/>
+            <p:nvPr/>
+          </p:nvSpPr>
+          <p:spPr>
+            <a:xfrm>
+              <a:off x="1645920" y="3759200"/>
+              <a:ext cx="2600960" cy="812800"/>
+            </a:xfrm>
+            <a:prstGeom prst="roundRect">
+              <a:avLst/>
+            </a:prstGeom>
+            <a:solidFill>
+              <a:srgbClr val="50AED8"/>
+            </a:solidFill>
+          </p:spPr>
+          <p:style>
+            <a:lnRef idx="2">
+              <a:schemeClr val="accent1">
+                <a:shade val="15000"/>
+              </a:schemeClr>
+            </a:lnRef>
+            <a:fillRef idx="1">
+              <a:schemeClr val="accent1"/>
+            </a:fillRef>
+            <a:effectRef idx="0">
+              <a:schemeClr val="accent1"/>
+            </a:effectRef>
+            <a:fontRef idx="minor">
+              <a:schemeClr val="lt1"/>
+            </a:fontRef>
+          </p:style>
+          <p:txBody>
+            <a:bodyPr rtlCol="0" anchor="ctr"/>
+            <a:lstStyle/>
+            <a:p>
+              <a:pPr algn="ctr"/>
+              <a:r>
+                <a:rPr lang="hu-HU" sz="2000" noProof="1">
+                  <a:solidFill>
+                    <a:schemeClr val="bg1"/>
+                  </a:solidFill>
+                </a:rPr>
+                <a:t>2+</a:t>
+              </a:r>
+              <a:r>
+                <a:rPr lang="hu-HU" sz="2000" noProof="1"/>
+                <a:t>3×(1-2+1)+…</a:t>
+              </a:r>
+            </a:p>
+          </p:txBody>
+        </p:sp>
+      </p:grpSp>
+      <p:grpSp>
+        <p:nvGrpSpPr>
+          <p:cNvPr id="12" name="Csoportba foglalás 11">
+            <a:extLst>
+              <a:ext uri="{FF2B5EF4-FFF2-40B4-BE49-F238E27FC236}">
+                <a16:creationId xmlns:a16="http://schemas.microsoft.com/office/drawing/2014/main" id="{E3070D41-9CF9-A9FA-DD64-9C1DC340CB66}"/>
+              </a:ext>
+            </a:extLst>
+          </p:cNvPr>
+          <p:cNvGrpSpPr/>
+          <p:nvPr/>
+        </p:nvGrpSpPr>
+        <p:grpSpPr>
+          <a:xfrm>
+            <a:off x="4034279" y="1784350"/>
+            <a:ext cx="3124200" cy="3289300"/>
+            <a:chOff x="4333240" y="2034540"/>
+            <a:chExt cx="3124200" cy="3289300"/>
+          </a:xfrm>
+        </p:grpSpPr>
+        <p:sp>
+          <p:nvSpPr>
+            <p:cNvPr id="7" name="Téglalap: lekerekített 6">
+              <a:extLst>
+                <a:ext uri="{FF2B5EF4-FFF2-40B4-BE49-F238E27FC236}">
+                  <a16:creationId xmlns:a16="http://schemas.microsoft.com/office/drawing/2014/main" id="{FB2FBC0C-91B8-B991-86FA-128252E505D5}"/>
+                </a:ext>
+              </a:extLst>
+            </p:cNvPr>
+            <p:cNvSpPr/>
+            <p:nvPr/>
+          </p:nvSpPr>
+          <p:spPr>
+            <a:xfrm>
+              <a:off x="4333240" y="2034540"/>
+              <a:ext cx="3124200" cy="3289300"/>
+            </a:xfrm>
+            <a:prstGeom prst="roundRect">
+              <a:avLst/>
+            </a:prstGeom>
+            <a:solidFill>
+              <a:schemeClr val="accent6">
+                <a:lumMod val="60000"/>
+                <a:lumOff val="40000"/>
+              </a:schemeClr>
+            </a:solidFill>
+            <a:ln>
+              <a:noFill/>
+            </a:ln>
+          </p:spPr>
+          <p:style>
+            <a:lnRef idx="2">
+              <a:schemeClr val="accent1">
+                <a:shade val="15000"/>
+              </a:schemeClr>
+            </a:lnRef>
+            <a:fillRef idx="1">
+              <a:schemeClr val="accent1"/>
+            </a:fillRef>
+            <a:effectRef idx="0">
+              <a:schemeClr val="accent1"/>
+            </a:effectRef>
+            <a:fontRef idx="minor">
+              <a:schemeClr val="lt1"/>
+            </a:fontRef>
+          </p:style>
+          <p:txBody>
+            <a:bodyPr rtlCol="0" anchor="ctr"/>
+            <a:lstStyle/>
+            <a:p>
+              <a:pPr algn="ctr"/>
+              <a:r>
+                <a:rPr lang="hu-HU" sz="2000" noProof="1">
+                  <a:solidFill>
+                    <a:schemeClr val="tx1"/>
+                  </a:solidFill>
+                </a:rPr>
+                <a:t>A parser felismer egy tokent és objektummá változtatja</a:t>
+              </a:r>
+            </a:p>
+            <a:p>
+              <a:pPr algn="ctr"/>
+              <a:endParaRPr lang="hu-HU" sz="2000" noProof="1"/>
+            </a:p>
+            <a:p>
+              <a:pPr algn="ctr"/>
+              <a:endParaRPr lang="hu-HU" sz="2000" noProof="1"/>
+            </a:p>
+            <a:p>
+              <a:pPr algn="ctr"/>
+              <a:endParaRPr lang="hu-HU" sz="2000" noProof="1"/>
+            </a:p>
+            <a:p>
+              <a:pPr algn="ctr"/>
+              <a:endParaRPr lang="hu-HU" sz="2000" noProof="1"/>
+            </a:p>
+            <a:p>
+              <a:pPr algn="ctr"/>
+              <a:endParaRPr lang="hu-HU" sz="2000" noProof="1"/>
+            </a:p>
+            <a:p>
+              <a:pPr algn="ctr"/>
+              <a:endParaRPr lang="hu-HU" sz="2000" noProof="1"/>
+            </a:p>
+            <a:p>
+              <a:pPr algn="ctr"/>
+              <a:endParaRPr lang="hu-HU" sz="2000" noProof="1"/>
+            </a:p>
+          </p:txBody>
+        </p:sp>
+        <p:sp>
+          <p:nvSpPr>
+            <p:cNvPr id="10" name="Téglalap: lekerekített 9">
+              <a:extLst>
+                <a:ext uri="{FF2B5EF4-FFF2-40B4-BE49-F238E27FC236}">
+                  <a16:creationId xmlns:a16="http://schemas.microsoft.com/office/drawing/2014/main" id="{E17EED49-16EE-8587-A7E2-41065E00C00A}"/>
+                </a:ext>
+              </a:extLst>
+            </p:cNvPr>
+            <p:cNvSpPr/>
+            <p:nvPr/>
+          </p:nvSpPr>
+          <p:spPr>
+            <a:xfrm>
+              <a:off x="4594860" y="3357880"/>
+              <a:ext cx="2600960" cy="812800"/>
+            </a:xfrm>
+            <a:prstGeom prst="roundRect">
+              <a:avLst/>
+            </a:prstGeom>
+            <a:solidFill>
+              <a:srgbClr val="50AED8"/>
+            </a:solidFill>
+          </p:spPr>
+          <p:style>
+            <a:lnRef idx="2">
+              <a:schemeClr val="accent1">
+                <a:shade val="15000"/>
+              </a:schemeClr>
+            </a:lnRef>
+            <a:fillRef idx="1">
+              <a:schemeClr val="accent1"/>
+            </a:fillRef>
+            <a:effectRef idx="0">
+              <a:schemeClr val="accent1"/>
+            </a:effectRef>
+            <a:fontRef idx="minor">
+              <a:schemeClr val="lt1"/>
+            </a:fontRef>
+          </p:style>
+          <p:txBody>
+            <a:bodyPr rtlCol="0" anchor="ctr"/>
+            <a:lstStyle/>
+            <a:p>
+              <a:pPr algn="ctr"/>
+              <a:r>
+                <a:rPr lang="hu-HU" sz="2000" noProof="1"/>
+                <a:t>3×(1-2+1)+…</a:t>
+              </a:r>
+            </a:p>
+          </p:txBody>
+        </p:sp>
+        <p:sp>
+          <p:nvSpPr>
+            <p:cNvPr id="11" name="Téglalap: lekerekített 10">
+              <a:extLst>
+                <a:ext uri="{FF2B5EF4-FFF2-40B4-BE49-F238E27FC236}">
+                  <a16:creationId xmlns:a16="http://schemas.microsoft.com/office/drawing/2014/main" id="{85455549-1932-EDB3-2C1B-888EA0D42439}"/>
+                </a:ext>
+              </a:extLst>
+            </p:cNvPr>
+            <p:cNvSpPr/>
+            <p:nvPr/>
+          </p:nvSpPr>
+          <p:spPr>
+            <a:xfrm>
+              <a:off x="4594860" y="4333240"/>
+              <a:ext cx="2600960" cy="812800"/>
+            </a:xfrm>
+            <a:prstGeom prst="roundRect">
+              <a:avLst/>
+            </a:prstGeom>
+            <a:solidFill>
+              <a:srgbClr val="00B050"/>
+            </a:solidFill>
+          </p:spPr>
+          <p:style>
+            <a:lnRef idx="2">
+              <a:schemeClr val="accent1">
+                <a:shade val="15000"/>
+              </a:schemeClr>
+            </a:lnRef>
+            <a:fillRef idx="1">
+              <a:schemeClr val="accent1"/>
+            </a:fillRef>
+            <a:effectRef idx="0">
+              <a:schemeClr val="accent1"/>
+            </a:effectRef>
+            <a:fontRef idx="minor">
+              <a:schemeClr val="lt1"/>
+            </a:fontRef>
+          </p:style>
+          <p:txBody>
+            <a:bodyPr rtlCol="0" anchor="ctr"/>
+            <a:lstStyle/>
+            <a:p>
+              <a:pPr algn="ctr"/>
+              <a:r>
+                <a:rPr lang="hu-HU" sz="2000" noProof="1"/>
+                <a:t>Number(2),</a:t>
+              </a:r>
+            </a:p>
+            <a:p>
+              <a:pPr algn="ctr"/>
+              <a:r>
+                <a:rPr lang="hu-HU" sz="2000" noProof="1"/>
+                <a:t>Add()</a:t>
+              </a:r>
+            </a:p>
+          </p:txBody>
+        </p:sp>
+      </p:grpSp>
+      <p:cxnSp>
+        <p:nvCxnSpPr>
+          <p:cNvPr id="13" name="Egyenes összekötő nyíllal 12">
+            <a:extLst>
+              <a:ext uri="{FF2B5EF4-FFF2-40B4-BE49-F238E27FC236}">
+                <a16:creationId xmlns:a16="http://schemas.microsoft.com/office/drawing/2014/main" id="{B5FB11CB-67AB-89FE-D525-B7199C7DB2D9}"/>
+              </a:ext>
+            </a:extLst>
+          </p:cNvPr>
+          <p:cNvCxnSpPr>
+            <a:cxnSpLocks/>
+            <a:stCxn id="5" idx="3"/>
+            <a:endCxn id="7" idx="1"/>
+          </p:cNvCxnSpPr>
+          <p:nvPr/>
+        </p:nvCxnSpPr>
+        <p:spPr>
+          <a:xfrm>
+            <a:off x="3286340" y="3429000"/>
+            <a:ext cx="747939" cy="0"/>
+          </a:xfrm>
+          <a:prstGeom prst="straightConnector1">
+            <a:avLst/>
+          </a:prstGeom>
+          <a:ln w="38100">
+            <a:tailEnd type="triangle"/>
+          </a:ln>
+        </p:spPr>
+        <p:style>
+          <a:lnRef idx="2">
+            <a:schemeClr val="dk1"/>
+          </a:lnRef>
+          <a:fillRef idx="0">
+            <a:schemeClr val="dk1"/>
+          </a:fillRef>
+          <a:effectRef idx="1">
+            <a:schemeClr val="dk1"/>
+          </a:effectRef>
+          <a:fontRef idx="minor">
+            <a:schemeClr val="tx1"/>
+          </a:fontRef>
+        </p:style>
+      </p:cxnSp>
+      <p:cxnSp>
+        <p:nvCxnSpPr>
+          <p:cNvPr id="16" name="Egyenes összekötő nyíllal 15">
+            <a:extLst>
+              <a:ext uri="{FF2B5EF4-FFF2-40B4-BE49-F238E27FC236}">
+                <a16:creationId xmlns:a16="http://schemas.microsoft.com/office/drawing/2014/main" id="{85A02642-063D-BA86-0191-54C829E2BAF6}"/>
+              </a:ext>
+            </a:extLst>
+          </p:cNvPr>
+          <p:cNvCxnSpPr>
+            <a:cxnSpLocks/>
+            <a:stCxn id="7" idx="3"/>
+            <a:endCxn id="8" idx="1"/>
+          </p:cNvCxnSpPr>
+          <p:nvPr/>
+        </p:nvCxnSpPr>
+        <p:spPr>
+          <a:xfrm>
+            <a:off x="7158479" y="3429000"/>
+            <a:ext cx="747939" cy="0"/>
+          </a:xfrm>
+          <a:prstGeom prst="straightConnector1">
+            <a:avLst/>
+          </a:prstGeom>
+          <a:ln w="38100">
+            <a:tailEnd type="triangle"/>
+          </a:ln>
+        </p:spPr>
+        <p:style>
+          <a:lnRef idx="2">
+            <a:schemeClr val="dk1"/>
+          </a:lnRef>
+          <a:fillRef idx="0">
+            <a:schemeClr val="dk1"/>
+          </a:fillRef>
+          <a:effectRef idx="1">
+            <a:schemeClr val="dk1"/>
+          </a:effectRef>
+          <a:fontRef idx="minor">
+            <a:schemeClr val="tx1"/>
+          </a:fontRef>
+        </p:style>
+      </p:cxnSp>
+      <p:sp>
+        <p:nvSpPr>
+          <p:cNvPr id="19" name="Nyíl: visszakanyarodó 18">
+            <a:extLst>
+              <a:ext uri="{FF2B5EF4-FFF2-40B4-BE49-F238E27FC236}">
+                <a16:creationId xmlns:a16="http://schemas.microsoft.com/office/drawing/2014/main" id="{F449D66E-5B08-7C09-A894-FC1FF055E5C3}"/>
+              </a:ext>
+            </a:extLst>
+          </p:cNvPr>
+          <p:cNvSpPr/>
+          <p:nvPr/>
+        </p:nvSpPr>
+        <p:spPr>
+          <a:xfrm rot="10800000">
+            <a:off x="4575299" y="5090795"/>
+            <a:ext cx="2042160" cy="433705"/>
+          </a:xfrm>
+          <a:prstGeom prst="uturnArrow">
+            <a:avLst>
+              <a:gd name="adj1" fmla="val 1697"/>
+              <a:gd name="adj2" fmla="val 3929"/>
+              <a:gd name="adj3" fmla="val 8661"/>
+              <a:gd name="adj4" fmla="val 43750"/>
+              <a:gd name="adj5" fmla="val 95715"/>
+            </a:avLst>
+          </a:prstGeom>
+          <a:ln w="38100">
+            <a:tailEnd type="triangle"/>
+          </a:ln>
+        </p:spPr>
+        <p:style>
+          <a:lnRef idx="2">
+            <a:schemeClr val="dk1"/>
+          </a:lnRef>
+          <a:fillRef idx="0">
+            <a:schemeClr val="dk1"/>
+          </a:fillRef>
+          <a:effectRef idx="1">
+            <a:schemeClr val="dk1"/>
+          </a:effectRef>
+          <a:fontRef idx="minor">
+            <a:schemeClr val="tx1"/>
+          </a:fontRef>
+        </p:style>
+        <p:txBody>
+          <a:bodyPr rtlCol="0" anchor="ctr"/>
+          <a:lstStyle/>
+          <a:p>
+            <a:pPr algn="ctr"/>
+            <a:endParaRPr lang="hu-HU">
+              <a:solidFill>
+                <a:schemeClr val="tx1"/>
+              </a:solidFill>
+            </a:endParaRPr>
+          </a:p>
+        </p:txBody>
+      </p:sp>
+      <p:grpSp>
+        <p:nvGrpSpPr>
+          <p:cNvPr id="26" name="Csoportba foglalás 25">
+            <a:extLst>
+              <a:ext uri="{FF2B5EF4-FFF2-40B4-BE49-F238E27FC236}">
+                <a16:creationId xmlns:a16="http://schemas.microsoft.com/office/drawing/2014/main" id="{87A5C84F-7D48-B4DF-9045-4EDCE6C4AD7C}"/>
+              </a:ext>
+            </a:extLst>
+          </p:cNvPr>
+          <p:cNvGrpSpPr/>
+          <p:nvPr/>
+        </p:nvGrpSpPr>
+        <p:grpSpPr>
+          <a:xfrm>
+            <a:off x="7906418" y="2365316"/>
+            <a:ext cx="2814320" cy="2127368"/>
+            <a:chOff x="8804060" y="2362082"/>
+            <a:chExt cx="2814320" cy="2127368"/>
+          </a:xfrm>
+        </p:grpSpPr>
+        <p:sp>
+          <p:nvSpPr>
+            <p:cNvPr id="8" name="Téglalap: lekerekített 7">
+              <a:extLst>
+                <a:ext uri="{FF2B5EF4-FFF2-40B4-BE49-F238E27FC236}">
+                  <a16:creationId xmlns:a16="http://schemas.microsoft.com/office/drawing/2014/main" id="{D87DB55F-DB80-1906-00F5-50917D2B9FD7}"/>
+                </a:ext>
+              </a:extLst>
+            </p:cNvPr>
+            <p:cNvSpPr/>
+            <p:nvPr/>
+          </p:nvSpPr>
+          <p:spPr>
+            <a:xfrm>
+              <a:off x="8804060" y="2362082"/>
+              <a:ext cx="2814320" cy="2127368"/>
+            </a:xfrm>
+            <a:prstGeom prst="roundRect">
+              <a:avLst/>
+            </a:prstGeom>
+            <a:solidFill>
+              <a:srgbClr val="FFC000"/>
+            </a:solidFill>
+            <a:ln>
+              <a:noFill/>
+            </a:ln>
+          </p:spPr>
+          <p:style>
+            <a:lnRef idx="2">
+              <a:schemeClr val="accent1">
+                <a:shade val="15000"/>
+              </a:schemeClr>
+            </a:lnRef>
+            <a:fillRef idx="1">
+              <a:schemeClr val="accent1"/>
+            </a:fillRef>
+            <a:effectRef idx="0">
+              <a:schemeClr val="accent1"/>
+            </a:effectRef>
+            <a:fontRef idx="minor">
+              <a:schemeClr val="lt1"/>
+            </a:fontRef>
+          </p:style>
+          <p:txBody>
+            <a:bodyPr rtlCol="0" anchor="ctr"/>
+            <a:lstStyle/>
+            <a:p>
+              <a:pPr algn="ctr"/>
+              <a:r>
+                <a:rPr lang="hu-HU" sz="2000" noProof="1">
+                  <a:solidFill>
+                    <a:schemeClr val="tx1"/>
+                  </a:solidFill>
+                </a:rPr>
+                <a:t>Objektum tömb</a:t>
+              </a:r>
+            </a:p>
+            <a:p>
+              <a:pPr algn="ctr"/>
+              <a:endParaRPr lang="hu-HU" sz="2000" noProof="1">
+                <a:solidFill>
+                  <a:schemeClr val="tx1"/>
+                </a:solidFill>
+              </a:endParaRPr>
+            </a:p>
+            <a:p>
+              <a:pPr algn="ctr"/>
+              <a:endParaRPr lang="hu-HU" sz="2000" noProof="1"/>
+            </a:p>
+            <a:p>
+              <a:pPr algn="ctr"/>
+              <a:endParaRPr lang="hu-HU" sz="2000" noProof="1"/>
+            </a:p>
+            <a:p>
+              <a:pPr algn="ctr"/>
+              <a:endParaRPr lang="hu-HU" sz="2000" noProof="1"/>
+            </a:p>
+            <a:p>
+              <a:pPr algn="ctr"/>
+              <a:endParaRPr lang="hu-HU" sz="2000" noProof="1"/>
+            </a:p>
+          </p:txBody>
+        </p:sp>
+        <p:sp>
+          <p:nvSpPr>
+            <p:cNvPr id="21" name="Téglalap: lekerekített 20">
+              <a:extLst>
+                <a:ext uri="{FF2B5EF4-FFF2-40B4-BE49-F238E27FC236}">
+                  <a16:creationId xmlns:a16="http://schemas.microsoft.com/office/drawing/2014/main" id="{5912FE60-6A04-4370-8179-CF4B0F42378B}"/>
+                </a:ext>
+              </a:extLst>
+            </p:cNvPr>
+            <p:cNvSpPr/>
+            <p:nvPr/>
+          </p:nvSpPr>
+          <p:spPr>
+            <a:xfrm>
+              <a:off x="8910740" y="2916392"/>
+              <a:ext cx="2600960" cy="1413614"/>
+            </a:xfrm>
+            <a:prstGeom prst="roundRect">
+              <a:avLst/>
+            </a:prstGeom>
+            <a:solidFill>
+              <a:srgbClr val="00B050"/>
+            </a:solidFill>
+          </p:spPr>
+          <p:style>
+            <a:lnRef idx="2">
+              <a:schemeClr val="accent1">
+                <a:shade val="15000"/>
+              </a:schemeClr>
+            </a:lnRef>
+            <a:fillRef idx="1">
+              <a:schemeClr val="accent1"/>
+            </a:fillRef>
+            <a:effectRef idx="0">
+              <a:schemeClr val="accent1"/>
+            </a:effectRef>
+            <a:fontRef idx="minor">
+              <a:schemeClr val="lt1"/>
+            </a:fontRef>
+          </p:style>
+          <p:txBody>
+            <a:bodyPr rtlCol="0" anchor="ctr"/>
+            <a:lstStyle/>
+            <a:p>
+              <a:pPr algn="ctr"/>
+              <a:r>
+                <a:rPr lang="hu-HU" sz="2000" noProof="1"/>
+                <a:t>Number(2),</a:t>
+              </a:r>
+            </a:p>
+            <a:p>
+              <a:pPr algn="ctr"/>
+              <a:r>
+                <a:rPr lang="hu-HU" sz="2000" noProof="1"/>
+                <a:t>Add(),</a:t>
+              </a:r>
+            </a:p>
+            <a:p>
+              <a:pPr algn="ctr"/>
+              <a:r>
+                <a:rPr lang="hu-HU" sz="2000" noProof="1"/>
+                <a:t>Number(3),</a:t>
+              </a:r>
+            </a:p>
+            <a:p>
+              <a:pPr algn="ctr"/>
+              <a:r>
+                <a:rPr lang="hu-HU" sz="2000" noProof="1"/>
+                <a:t>…</a:t>
+              </a:r>
+            </a:p>
+          </p:txBody>
+        </p:sp>
+      </p:grpSp>
+      <p:sp>
+        <p:nvSpPr>
+          <p:cNvPr id="25" name="Szövegdoboz 24">
+            <a:extLst>
+              <a:ext uri="{FF2B5EF4-FFF2-40B4-BE49-F238E27FC236}">
+                <a16:creationId xmlns:a16="http://schemas.microsoft.com/office/drawing/2014/main" id="{8D05953B-3F50-E37F-9D68-2A95E0D42AE8}"/>
+              </a:ext>
+            </a:extLst>
+          </p:cNvPr>
+          <p:cNvSpPr txBox="1"/>
+          <p:nvPr/>
+        </p:nvSpPr>
+        <p:spPr>
+          <a:xfrm>
+            <a:off x="4119274" y="5541646"/>
+            <a:ext cx="2954207" cy="369332"/>
+          </a:xfrm>
+          <a:prstGeom prst="rect">
+            <a:avLst/>
+          </a:prstGeom>
+          <a:noFill/>
+        </p:spPr>
+        <p:txBody>
+          <a:bodyPr wrap="none" rtlCol="0">
+            <a:spAutoFit/>
+          </a:bodyPr>
+          <a:lstStyle/>
+          <a:p>
+            <a:r>
+              <a:rPr lang="hu-HU" dirty="0"/>
+              <a:t>Ameddig tart a bevitt szöveg</a:t>
+            </a:r>
+          </a:p>
+        </p:txBody>
+      </p:sp>
+    </p:spTree>
+    <p:extLst>
+      <p:ext uri="{BB962C8B-B14F-4D97-AF65-F5344CB8AC3E}">
+        <p14:creationId xmlns:p14="http://schemas.microsoft.com/office/powerpoint/2010/main" val="782287198"/>
+      </p:ext>
+    </p:extLst>
+  </p:cSld>
+  <p:clrMapOvr>
+    <a:masterClrMapping/>
+  </p:clrMapOvr>
+</p:sld>
+</file>
+
+<file path=ppt/slides/slide8.xml><?xml version="1.0" encoding="utf-8"?>
+<p:sld xmlns:a="http://schemas.openxmlformats.org/drawingml/2006/main" xmlns:r="http://schemas.openxmlformats.org/officeDocument/2006/relationships" xmlns:p="http://schemas.openxmlformats.org/presentationml/2006/main">
+  <p:cSld>
+    <p:spTree>
+      <p:nvGrpSpPr>
+        <p:cNvPr id="1" name=""/>
+        <p:cNvGrpSpPr/>
+        <p:nvPr/>
+      </p:nvGrpSpPr>
+      <p:grpSpPr>
+        <a:xfrm>
+          <a:off x="0" y="0"/>
+          <a:ext cx="0" cy="0"/>
+          <a:chOff x="0" y="0"/>
+          <a:chExt cx="0" cy="0"/>
+        </a:xfrm>
+      </p:grpSpPr>
+    </p:spTree>
+    <p:extLst>
+      <p:ext uri="{BB962C8B-B14F-4D97-AF65-F5344CB8AC3E}">
+        <p14:creationId xmlns:p14="http://schemas.microsoft.com/office/powerpoint/2010/main" val="1237646313"/>
+      </p:ext>
+    </p:extLst>
+  </p:cSld>
+  <p:clrMapOvr>
+    <a:masterClrMapping/>
+  </p:clrMapOvr>
+</p:sld>
+</file>
+
 <file path=ppt/theme/theme1.xml><?xml version="1.0" encoding="utf-8"?>
 <a:theme xmlns:a="http://schemas.openxmlformats.org/drawingml/2006/main" name="Office-téma">
   <a:themeElements>
